--- a/manual/Intranet-Training-v1.0.pptx
+++ b/manual/Intranet-Training-v1.0.pptx
@@ -141,7 +141,7 @@
   <p:extLst>
     <p:ext uri="{521415D9-36F7-43E2-AB2F-B90AF26B5E84}">
       <p14:sectionLst xmlns:p14="http://schemas.microsoft.com/office/powerpoint/2010/main">
-        <p14:section name="เปิด" id="{2c6850e3-a998-f89d-7233-fb142fdba622}">
+        <p14:section name="เปิด" id="{db8141ad-c532-d83b-4464-7e8733896b16}">
           <p14:sldIdLst>
             <p14:sldId id="256"/>
             <p14:sldId id="257"/>
@@ -149,14 +149,14 @@
             <p14:sldId id="259"/>
           </p14:sldIdLst>
         </p14:section>
-        <p14:section name="เริ่มต้นใช้งาน" id="{e4ef9adc-9629-5e62-4176-cda8804207d5}">
+        <p14:section name="เริ่มต้นใช้งาน" id="{b72a34a4-2a53-f696-8c3e-6c7a5329c00c}">
           <p14:sldIdLst>
             <p14:sldId id="260"/>
             <p14:sldId id="261"/>
             <p14:sldId id="262"/>
           </p14:sldIdLst>
         </p14:section>
-        <p14:section name="ยื่นคำขอและติดตามสถานะ" id="{5d0122e4-12c1-2d40-2e34-30a7b7386f27}">
+        <p14:section name="ยื่นคำขอและติดตามสถานะ" id="{69bfde4a-6b70-a427-bf6c-498989dee11e}">
           <p14:sldIdLst>
             <p14:sldId id="263"/>
             <p14:sldId id="264"/>
@@ -170,7 +170,7 @@
             <p14:sldId id="272"/>
           </p14:sldIdLst>
         </p14:section>
-        <p14:section name="สำหรับผู้อนุมัติ" id="{9da7fc1b-7063-c402-5128-a6f31e2a9db9}">
+        <p14:section name="สำหรับผู้อนุมัติ" id="{aebe23c4-4d3e-2493-e2a1-851fb21a179a}">
           <p14:sldIdLst>
             <p14:sldId id="273"/>
             <p14:sldId id="274"/>
@@ -180,7 +180,7 @@
             <p14:sldId id="278"/>
           </p14:sldIdLst>
         </p14:section>
-        <p14:section name="เมนูอื่น ๆ ที่ใช้ทุกวัน" id="{6a66d509-1dda-74ab-6564-ffaecf098ee7}">
+        <p14:section name="เมนูอื่น ๆ ที่ใช้ทุกวัน" id="{f701d3ab-3177-5ae3-d7f2-49680ede9bdd}">
           <p14:sldIdLst>
             <p14:sldId id="279"/>
             <p14:sldId id="280"/>
@@ -191,7 +191,7 @@
             <p14:sldId id="285"/>
           </p14:sldIdLst>
         </p14:section>
-        <p14:section name="ฝึกปฏิบัติและทดสอบ" id="{c3943517-de0a-f14a-c521-bce2d1c91a87}">
+        <p14:section name="ฝึกปฏิบัติและทดสอบ" id="{d296b68c-d4a4-65e6-9a69-1df81618070e}">
           <p14:sldIdLst>
             <p14:sldId id="286"/>
             <p14:sldId id="287"/>
@@ -199,7 +199,7 @@
             <p14:sldId id="289"/>
           </p14:sldIdLst>
         </p14:section>
-        <p14:section name="ปิด" id="{263b68a6-e43e-862d-cb8c-68c20add30cc}">
+        <p14:section name="ปิด" id="{3d864fe1-40a6-8c1f-5ad1-fd053dc76ab7}">
           <p14:sldIdLst>
             <p14:sldId id="290"/>
           </p14:sldIdLst>
@@ -3720,7 +3720,7 @@
           <a:lstStyle>
             <a:lvl1pPr algn="l" indent="0" marL="0">
               <a:buNone/>
-              <a:defRPr lang="en-US" sz="4000" b="1" dirty="0">
+              <a:defRPr lang="en-US" sz="5400" b="1" dirty="0">
                 <a:solidFill>
                   <a:schemeClr val="bg1"/>
                 </a:solidFill>
@@ -3731,7 +3731,7 @@
             <a:pPr algn="l" indent="0" marL="0">
               <a:buNone/>
             </a:pPr>
-            <a:endParaRPr lang="en-US" sz="4000" dirty="0"/>
+            <a:endParaRPr lang="en-US" sz="5400" dirty="0"/>
           </a:p>
         </p:txBody>
       </p:sp>
@@ -3759,7 +3759,7 @@
           <a:lstStyle>
             <a:lvl1pPr algn="l" indent="0" marL="0">
               <a:buNone/>
-              <a:defRPr lang="en-US" sz="1800" dirty="0">
+              <a:defRPr lang="en-US" sz="2450" dirty="0">
                 <a:solidFill>
                   <a:schemeClr val="bg1"/>
                 </a:solidFill>
@@ -3770,7 +3770,7 @@
             <a:pPr algn="l" indent="0" marL="0">
               <a:buNone/>
             </a:pPr>
-            <a:endParaRPr lang="en-US" sz="1800" dirty="0"/>
+            <a:endParaRPr lang="en-US" sz="2450" dirty="0"/>
           </a:p>
         </p:txBody>
       </p:sp>
@@ -3830,7 +3830,7 @@
           <a:lstStyle>
             <a:lvl1pPr algn="l" indent="0" marL="0">
               <a:buNone/>
-              <a:defRPr lang="en-US" sz="3800" b="1" dirty="0">
+              <a:defRPr lang="en-US" sz="5150" b="1" dirty="0">
                 <a:solidFill>
                   <a:schemeClr val="bg1"/>
                 </a:solidFill>
@@ -3841,7 +3841,7 @@
             <a:pPr algn="l" indent="0" marL="0">
               <a:buNone/>
             </a:pPr>
-            <a:endParaRPr lang="en-US" sz="3800" dirty="0"/>
+            <a:endParaRPr lang="en-US" sz="5150" dirty="0"/>
           </a:p>
         </p:txBody>
       </p:sp>
@@ -3869,7 +3869,7 @@
           <a:lstStyle>
             <a:lvl1pPr algn="l" indent="0" marL="0">
               <a:buNone/>
-              <a:defRPr lang="en-US" sz="1800" dirty="0">
+              <a:defRPr lang="en-US" sz="2450" dirty="0">
                 <a:solidFill>
                   <a:schemeClr val="bg1"/>
                 </a:solidFill>
@@ -3880,7 +3880,7 @@
             <a:pPr algn="l" indent="0" marL="0">
               <a:buNone/>
             </a:pPr>
-            <a:endParaRPr lang="en-US" sz="1800" dirty="0"/>
+            <a:endParaRPr lang="en-US" sz="2450" dirty="0"/>
           </a:p>
         </p:txBody>
       </p:sp>
@@ -3940,7 +3940,7 @@
           <a:lstStyle>
             <a:lvl1pPr algn="l" indent="0" marL="0">
               <a:buNone/>
-              <a:defRPr lang="en-US" sz="3000" b="1" dirty="0">
+              <a:defRPr lang="en-US" sz="4050" b="1" dirty="0">
                 <a:solidFill>
                   <a:schemeClr val="tx2"/>
                 </a:solidFill>
@@ -3951,7 +3951,7 @@
             <a:pPr algn="l" indent="0" marL="0">
               <a:buNone/>
             </a:pPr>
-            <a:endParaRPr lang="en-US" sz="3000" dirty="0"/>
+            <a:endParaRPr lang="en-US" sz="4050" dirty="0"/>
           </a:p>
         </p:txBody>
       </p:sp>
@@ -4004,14 +4004,14 @@
               <a:buNone/>
             </a:pPr>
             <a:r>
-              <a:rPr lang="en-US" sz="1000" dirty="0">
+              <a:rPr lang="en-US" sz="1350" dirty="0">
                 <a:solidFill>
                   <a:schemeClr val="accent5"/>
                 </a:solidFill>
               </a:rPr>
               <a:t>อบรมการใช้งานระบบ Intranet · Prime Power Group</a:t>
             </a:r>
-            <a:endParaRPr lang="en-US" sz="1000" dirty="0"/>
+            <a:endParaRPr lang="en-US" sz="1350" dirty="0"/>
           </a:p>
         </p:txBody>
       </p:sp>
@@ -4043,7 +4043,7 @@
           <a:bodyPr/>
           <a:lstStyle>
             <a:lvl1pPr>
-              <a:defRPr sz="1000">
+              <a:defRPr sz="1350">
                 <a:solidFill>
                   <a:schemeClr val="accent5"/>
                 </a:solidFill>
@@ -4113,7 +4113,7 @@
           <a:bodyPr/>
           <a:lstStyle>
             <a:lvl1pPr>
-              <a:defRPr sz="1000">
+              <a:defRPr sz="1350">
                 <a:solidFill>
                   <a:schemeClr val="accent5"/>
                 </a:solidFill>
@@ -4488,14 +4488,14 @@
               <a:buNone/>
             </a:pPr>
             <a:r>
-              <a:rPr lang="en-US" sz="4000" b="1" dirty="0">
+              <a:rPr lang="en-US" sz="5400" b="1" dirty="0">
                 <a:solidFill>
                   <a:schemeClr val="bg1"/>
                 </a:solidFill>
               </a:rPr>
               <a:t>อบรมการใช้งานระบบ Intranet</a:t>
             </a:r>
-            <a:endParaRPr lang="en-US" sz="4000" dirty="0"/>
+            <a:endParaRPr lang="en-US" sz="5400" dirty="0"/>
           </a:p>
         </p:txBody>
       </p:sp>
@@ -4526,14 +4526,14 @@
               <a:buNone/>
             </a:pPr>
             <a:r>
-              <a:rPr lang="en-US" sz="1800" dirty="0">
+              <a:rPr lang="en-US" sz="2450" dirty="0">
                 <a:solidFill>
                   <a:schemeClr val="bg1"/>
                 </a:solidFill>
               </a:rPr>
               <a:t>สำหรับพนักงานใหม่และผู้ใช้งานทุกระดับ · พร้อมตัวอย่างงานจริงทีละขั้นตอน</a:t>
             </a:r>
-            <a:endParaRPr lang="en-US" sz="1800" dirty="0"/>
+            <a:endParaRPr lang="en-US" sz="2450" dirty="0"/>
           </a:p>
         </p:txBody>
       </p:sp>
@@ -4589,28 +4589,28 @@
               <a:buNone/>
             </a:pPr>
             <a:r>
-              <a:rPr lang="en-US" sz="1200" dirty="0">
+              <a:rPr lang="en-US" sz="1600" dirty="0">
                 <a:solidFill>
                   <a:srgbClr val="B9CDE6"/>
                 </a:solidFill>
               </a:rPr>
               <a:t>ใช้เวลา</a:t>
             </a:r>
-            <a:endParaRPr lang="en-US" sz="1200" dirty="0"/>
-          </a:p>
-          <a:p>
-            <a:pPr indent="0" marL="0">
-              <a:buNone/>
-            </a:pPr>
-            <a:r>
-              <a:rPr lang="en-US" sz="1600" b="1" dirty="0">
+            <a:endParaRPr lang="en-US" sz="1600" dirty="0"/>
+          </a:p>
+          <a:p>
+            <a:pPr indent="0" marL="0">
+              <a:buNone/>
+            </a:pPr>
+            <a:r>
+              <a:rPr lang="en-US" sz="1900" b="1" dirty="0">
                 <a:solidFill>
                   <a:schemeClr val="bg1"/>
                 </a:solidFill>
               </a:rPr>
               <a:t>ประมาณ 2 ชั่วโมง</a:t>
             </a:r>
-            <a:endParaRPr lang="en-US" sz="1200" dirty="0"/>
+            <a:endParaRPr lang="en-US" sz="1600" dirty="0"/>
           </a:p>
         </p:txBody>
       </p:sp>
@@ -4666,28 +4666,28 @@
               <a:buNone/>
             </a:pPr>
             <a:r>
-              <a:rPr lang="en-US" sz="1200" dirty="0">
+              <a:rPr lang="en-US" sz="1600" dirty="0">
                 <a:solidFill>
                   <a:srgbClr val="B9CDE6"/>
                 </a:solidFill>
               </a:rPr>
               <a:t>ฉบับที่</a:t>
             </a:r>
-            <a:endParaRPr lang="en-US" sz="1200" dirty="0"/>
-          </a:p>
-          <a:p>
-            <a:pPr indent="0" marL="0">
-              <a:buNone/>
-            </a:pPr>
-            <a:r>
-              <a:rPr lang="en-US" sz="1600" b="1" dirty="0">
+            <a:endParaRPr lang="en-US" sz="1600" dirty="0"/>
+          </a:p>
+          <a:p>
+            <a:pPr indent="0" marL="0">
+              <a:buNone/>
+            </a:pPr>
+            <a:r>
+              <a:rPr lang="en-US" sz="1900" b="1" dirty="0">
                 <a:solidFill>
                   <a:schemeClr val="bg1"/>
                 </a:solidFill>
               </a:rPr>
               <a:t>1.0 · ต.ค. 2569</a:t>
             </a:r>
-            <a:endParaRPr lang="en-US" sz="1200" dirty="0"/>
+            <a:endParaRPr lang="en-US" sz="1600" dirty="0"/>
           </a:p>
         </p:txBody>
       </p:sp>
@@ -4743,28 +4743,28 @@
               <a:buNone/>
             </a:pPr>
             <a:r>
-              <a:rPr lang="en-US" sz="1200" dirty="0">
+              <a:rPr lang="en-US" sz="1600" dirty="0">
                 <a:solidFill>
                   <a:srgbClr val="B9CDE6"/>
                 </a:solidFill>
               </a:rPr>
               <a:t>คู่มือฉบับเต็ม</a:t>
             </a:r>
-            <a:endParaRPr lang="en-US" sz="1200" dirty="0"/>
-          </a:p>
-          <a:p>
-            <a:pPr indent="0" marL="0">
-              <a:buNone/>
-            </a:pPr>
-            <a:r>
-              <a:rPr lang="en-US" sz="1600" b="1" dirty="0">
+            <a:endParaRPr lang="en-US" sz="1600" dirty="0"/>
+          </a:p>
+          <a:p>
+            <a:pPr indent="0" marL="0">
+              <a:buNone/>
+            </a:pPr>
+            <a:r>
+              <a:rPr lang="en-US" sz="1900" b="1" dirty="0">
                 <a:solidFill>
                   <a:schemeClr val="bg1"/>
                 </a:solidFill>
               </a:rPr>
               <a:t>เมนูหน้าแรก → คู่มือการใช้งาน</a:t>
             </a:r>
-            <a:endParaRPr lang="en-US" sz="1200" dirty="0"/>
+            <a:endParaRPr lang="en-US" sz="1600" dirty="0"/>
           </a:p>
         </p:txBody>
       </p:sp>
@@ -4820,14 +4820,14 @@
               <a:buNone/>
             </a:pPr>
             <a:r>
-              <a:rPr lang="en-US" sz="3000" b="1" dirty="0">
+              <a:rPr lang="en-US" sz="4050" b="1" dirty="0">
                 <a:solidFill>
                   <a:schemeClr val="tx2"/>
                 </a:solidFill>
               </a:rPr>
               <a:t>ขั้นที่ 1: หาแบบฟอร์ม</a:t>
             </a:r>
-            <a:endParaRPr lang="en-US" sz="3000" dirty="0"/>
+            <a:endParaRPr lang="en-US" sz="4050" dirty="0"/>
           </a:p>
         </p:txBody>
       </p:sp>
@@ -4937,14 +4937,14 @@
               <a:buNone/>
             </a:pPr>
             <a:r>
-              <a:rPr lang="en-US" sz="1300" b="1" dirty="0">
+              <a:rPr lang="en-US" sz="1750" b="1" dirty="0">
                 <a:solidFill>
                   <a:schemeClr val="bg1"/>
                 </a:solidFill>
               </a:rPr>
               <a:t>1</a:t>
             </a:r>
-            <a:endParaRPr lang="en-US" sz="1300" dirty="0"/>
+            <a:endParaRPr lang="en-US" sz="1750" dirty="0"/>
           </a:p>
         </p:txBody>
       </p:sp>
@@ -4957,7 +4957,7 @@
         <p:spPr>
           <a:xfrm>
             <a:off x="8842248" y="1371600"/>
-            <a:ext cx="2907792" cy="384048"/>
+            <a:ext cx="2907792" cy="435166"/>
           </a:xfrm>
           <a:prstGeom prst="rect">
             <a:avLst/>
@@ -4973,7 +4973,7 @@
               <a:buNone/>
             </a:pPr>
             <a:r>
-              <a:rPr lang="en-US" sz="1500" dirty="0">
+              <a:rPr lang="en-US" sz="2050" dirty="0">
                 <a:solidFill>
                   <a:schemeClr val="tx1"/>
                 </a:solidFill>
@@ -4984,14 +4984,14 @@
               <a:buNone/>
             </a:pPr>
             <a:r>
-              <a:rPr lang="en-US" sz="1500" b="1" dirty="0">
+              <a:rPr lang="en-US" sz="2050" b="1" dirty="0">
                 <a:solidFill>
                   <a:schemeClr val="tx2"/>
                 </a:solidFill>
               </a:rPr>
               <a:t>แบบฟอร์มทั้งหมด</a:t>
             </a:r>
-            <a:endParaRPr lang="en-US" sz="1500" dirty="0"/>
+            <a:endParaRPr lang="en-US" sz="2050" dirty="0"/>
           </a:p>
         </p:txBody>
       </p:sp>
@@ -5003,7 +5003,7 @@
         </p:nvSpPr>
         <p:spPr>
           <a:xfrm>
-            <a:off x="8366760" y="1911096"/>
+            <a:off x="8366760" y="1962214"/>
             <a:ext cx="329184" cy="329184"/>
           </a:xfrm>
           <a:prstGeom prst="ellipse">
@@ -5028,7 +5028,7 @@
         </p:nvSpPr>
         <p:spPr>
           <a:xfrm>
-            <a:off x="8366760" y="1911096"/>
+            <a:off x="8366760" y="1962214"/>
             <a:ext cx="329184" cy="329184"/>
           </a:xfrm>
           <a:prstGeom prst="rect">
@@ -5045,14 +5045,14 @@
               <a:buNone/>
             </a:pPr>
             <a:r>
-              <a:rPr lang="en-US" sz="1300" b="1" dirty="0">
+              <a:rPr lang="en-US" sz="1750" b="1" dirty="0">
                 <a:solidFill>
                   <a:schemeClr val="bg1"/>
                 </a:solidFill>
               </a:rPr>
               <a:t>2</a:t>
             </a:r>
-            <a:endParaRPr lang="en-US" sz="1300" dirty="0"/>
+            <a:endParaRPr lang="en-US" sz="1750" dirty="0"/>
           </a:p>
         </p:txBody>
       </p:sp>
@@ -5064,8 +5064,8 @@
         </p:nvSpPr>
         <p:spPr>
           <a:xfrm>
-            <a:off x="8842248" y="1883664"/>
-            <a:ext cx="2907792" cy="624078"/>
+            <a:off x="8842248" y="1934782"/>
+            <a:ext cx="2907792" cy="760603"/>
           </a:xfrm>
           <a:prstGeom prst="rect">
             <a:avLst/>
@@ -5081,7 +5081,7 @@
               <a:buNone/>
             </a:pPr>
             <a:r>
-              <a:rPr lang="en-US" sz="1500" dirty="0">
+              <a:rPr lang="en-US" sz="2050" dirty="0">
                 <a:solidFill>
                   <a:schemeClr val="tx1"/>
                 </a:solidFill>
@@ -5092,14 +5092,14 @@
               <a:buNone/>
             </a:pPr>
             <a:r>
-              <a:rPr lang="en-US" sz="1500" b="1" dirty="0">
+              <a:rPr lang="en-US" sz="2050" b="1" dirty="0">
                 <a:solidFill>
                   <a:schemeClr val="tx2"/>
                 </a:solidFill>
               </a:rPr>
               <a:t>เบิกเงิน</a:t>
             </a:r>
-            <a:endParaRPr lang="en-US" sz="1500" dirty="0"/>
+            <a:endParaRPr lang="en-US" sz="2050" dirty="0"/>
           </a:p>
         </p:txBody>
       </p:sp>
@@ -5111,7 +5111,7 @@
         </p:nvSpPr>
         <p:spPr>
           <a:xfrm>
-            <a:off x="8366760" y="2663190"/>
+            <a:off x="8366760" y="2850833"/>
             <a:ext cx="329184" cy="329184"/>
           </a:xfrm>
           <a:prstGeom prst="ellipse">
@@ -5136,7 +5136,7 @@
         </p:nvSpPr>
         <p:spPr>
           <a:xfrm>
-            <a:off x="8366760" y="2663190"/>
+            <a:off x="8366760" y="2850833"/>
             <a:ext cx="329184" cy="329184"/>
           </a:xfrm>
           <a:prstGeom prst="rect">
@@ -5153,14 +5153,14 @@
               <a:buNone/>
             </a:pPr>
             <a:r>
-              <a:rPr lang="en-US" sz="1300" b="1" dirty="0">
+              <a:rPr lang="en-US" sz="1750" b="1" dirty="0">
                 <a:solidFill>
                   <a:schemeClr val="bg1"/>
                 </a:solidFill>
               </a:rPr>
               <a:t>3</a:t>
             </a:r>
-            <a:endParaRPr lang="en-US" sz="1300" dirty="0"/>
+            <a:endParaRPr lang="en-US" sz="1750" dirty="0"/>
           </a:p>
         </p:txBody>
       </p:sp>
@@ -5172,8 +5172,8 @@
         </p:nvSpPr>
         <p:spPr>
           <a:xfrm>
-            <a:off x="8842248" y="2635758"/>
-            <a:ext cx="2907792" cy="624078"/>
+            <a:off x="8842248" y="2823401"/>
+            <a:ext cx="2907792" cy="760603"/>
           </a:xfrm>
           <a:prstGeom prst="rect">
             <a:avLst/>
@@ -5189,7 +5189,7 @@
               <a:buNone/>
             </a:pPr>
             <a:r>
-              <a:rPr lang="en-US" sz="1500" dirty="0">
+              <a:rPr lang="en-US" sz="2050" dirty="0">
                 <a:solidFill>
                   <a:schemeClr val="tx1"/>
                 </a:solidFill>
@@ -5200,14 +5200,14 @@
               <a:buNone/>
             </a:pPr>
             <a:r>
-              <a:rPr lang="en-US" sz="1500" b="1" dirty="0">
+              <a:rPr lang="en-US" sz="2050" b="1" dirty="0">
                 <a:solidFill>
                   <a:schemeClr val="tx2"/>
                 </a:solidFill>
               </a:rPr>
               <a:t>แบบฟอร์มขอเบิกเงินทดรองจ่าย</a:t>
             </a:r>
-            <a:endParaRPr lang="en-US" sz="1500" dirty="0"/>
+            <a:endParaRPr lang="en-US" sz="2050" dirty="0"/>
           </a:p>
         </p:txBody>
       </p:sp>
@@ -5263,7 +5263,7 @@
               <a:buNone/>
             </a:pPr>
             <a:r>
-              <a:rPr lang="en-US" sz="1400" dirty="0">
+              <a:rPr lang="en-US" sz="1900" dirty="0">
                 <a:solidFill>
                   <a:schemeClr val="tx1"/>
                 </a:solidFill>
@@ -5274,7 +5274,7 @@
               <a:buNone/>
             </a:pPr>
             <a:r>
-              <a:rPr lang="en-US" sz="1400" dirty="0">
+              <a:rPr lang="en-US" sz="1900" dirty="0">
                 <a:solidFill>
                   <a:schemeClr val="tx1"/>
                 </a:solidFill>
@@ -5285,7 +5285,7 @@
               <a:buNone/>
             </a:pPr>
             <a:r>
-              <a:rPr lang="en-US" sz="1400" b="1" dirty="0">
+              <a:rPr lang="en-US" sz="1900" b="1" dirty="0">
                 <a:solidFill>
                   <a:schemeClr val="tx2"/>
                 </a:solidFill>
@@ -5296,14 +5296,14 @@
               <a:buNone/>
             </a:pPr>
             <a:r>
-              <a:rPr lang="en-US" sz="1400" dirty="0">
+              <a:rPr lang="en-US" sz="1900" dirty="0">
                 <a:solidFill>
                   <a:schemeClr val="tx1"/>
                 </a:solidFill>
               </a:rPr>
               <a:t> บนการ์ด ช่วยให้หาง่าย · การ์ด “เปิดระบบ ↗” คือระบบภายนอก</a:t>
             </a:r>
-            <a:endParaRPr lang="en-US" sz="1400" dirty="0"/>
+            <a:endParaRPr lang="en-US" sz="1900" dirty="0"/>
           </a:p>
         </p:txBody>
       </p:sp>
@@ -5335,7 +5335,7 @@
           <a:bodyPr/>
           <a:lstStyle>
             <a:lvl1pPr>
-              <a:defRPr sz="1000">
+              <a:defRPr sz="1350">
                 <a:solidFill>
                   <a:schemeClr val="accent5"/>
                 </a:solidFill>
@@ -5404,14 +5404,14 @@
               <a:buNone/>
             </a:pPr>
             <a:r>
-              <a:rPr lang="en-US" sz="3000" b="1" dirty="0">
+              <a:rPr lang="en-US" sz="4050" b="1" dirty="0">
                 <a:solidFill>
                   <a:schemeClr val="tx2"/>
                 </a:solidFill>
               </a:rPr>
               <a:t>ขั้นที่ 2: กรอกข้อมูลทั่วไป</a:t>
             </a:r>
-            <a:endParaRPr lang="en-US" sz="3000" dirty="0"/>
+            <a:endParaRPr lang="en-US" sz="4050" dirty="0"/>
           </a:p>
         </p:txBody>
       </p:sp>
@@ -5521,14 +5521,14 @@
               <a:buNone/>
             </a:pPr>
             <a:r>
-              <a:rPr lang="en-US" sz="1300" b="1" dirty="0">
+              <a:rPr lang="en-US" sz="1750" b="1" dirty="0">
                 <a:solidFill>
                   <a:schemeClr val="bg1"/>
                 </a:solidFill>
               </a:rPr>
               <a:t>1</a:t>
             </a:r>
-            <a:endParaRPr lang="en-US" sz="1300" dirty="0"/>
+            <a:endParaRPr lang="en-US" sz="1750" dirty="0"/>
           </a:p>
         </p:txBody>
       </p:sp>
@@ -5541,7 +5541,7 @@
         <p:spPr>
           <a:xfrm>
             <a:off x="8842248" y="1371600"/>
-            <a:ext cx="2907792" cy="384048"/>
+            <a:ext cx="2907792" cy="435166"/>
           </a:xfrm>
           <a:prstGeom prst="rect">
             <a:avLst/>
@@ -5557,7 +5557,7 @@
               <a:buNone/>
             </a:pPr>
             <a:r>
-              <a:rPr lang="en-US" sz="1500" b="1" dirty="0">
+              <a:rPr lang="en-US" sz="2050" b="1" dirty="0">
                 <a:solidFill>
                   <a:schemeClr val="tx2"/>
                 </a:solidFill>
@@ -5568,14 +5568,14 @@
               <a:buNone/>
             </a:pPr>
             <a:r>
-              <a:rPr lang="en-US" sz="1500" dirty="0">
+              <a:rPr lang="en-US" sz="2050" dirty="0">
                 <a:solidFill>
                   <a:schemeClr val="tx1"/>
                 </a:solidFill>
               </a:rPr>
               <a:t> สั้นและสื่อความ</a:t>
             </a:r>
-            <a:endParaRPr lang="en-US" sz="1500" dirty="0"/>
+            <a:endParaRPr lang="en-US" sz="2050" dirty="0"/>
           </a:p>
         </p:txBody>
       </p:sp>
@@ -5587,7 +5587,7 @@
         </p:nvSpPr>
         <p:spPr>
           <a:xfrm>
-            <a:off x="8366760" y="1911096"/>
+            <a:off x="8366760" y="1962214"/>
             <a:ext cx="329184" cy="329184"/>
           </a:xfrm>
           <a:prstGeom prst="ellipse">
@@ -5612,7 +5612,7 @@
         </p:nvSpPr>
         <p:spPr>
           <a:xfrm>
-            <a:off x="8366760" y="1911096"/>
+            <a:off x="8366760" y="1962214"/>
             <a:ext cx="329184" cy="329184"/>
           </a:xfrm>
           <a:prstGeom prst="rect">
@@ -5629,14 +5629,14 @@
               <a:buNone/>
             </a:pPr>
             <a:r>
-              <a:rPr lang="en-US" sz="1300" b="1" dirty="0">
+              <a:rPr lang="en-US" sz="1750" b="1" dirty="0">
                 <a:solidFill>
                   <a:schemeClr val="bg1"/>
                 </a:solidFill>
               </a:rPr>
               <a:t>2</a:t>
             </a:r>
-            <a:endParaRPr lang="en-US" sz="1300" dirty="0"/>
+            <a:endParaRPr lang="en-US" sz="1750" dirty="0"/>
           </a:p>
         </p:txBody>
       </p:sp>
@@ -5648,8 +5648,8 @@
         </p:nvSpPr>
         <p:spPr>
           <a:xfrm>
-            <a:off x="8842248" y="1883664"/>
-            <a:ext cx="2907792" cy="384048"/>
+            <a:off x="8842248" y="1934782"/>
+            <a:ext cx="2907792" cy="435166"/>
           </a:xfrm>
           <a:prstGeom prst="rect">
             <a:avLst/>
@@ -5665,7 +5665,7 @@
               <a:buNone/>
             </a:pPr>
             <a:r>
-              <a:rPr lang="en-US" sz="1500" b="1" dirty="0">
+              <a:rPr lang="en-US" sz="2050" b="1" dirty="0">
                 <a:solidFill>
                   <a:schemeClr val="tx2"/>
                 </a:solidFill>
@@ -5676,14 +5676,14 @@
               <a:buNone/>
             </a:pPr>
             <a:r>
-              <a:rPr lang="en-US" sz="1500" dirty="0">
+              <a:rPr lang="en-US" sz="2050" dirty="0">
                 <a:solidFill>
                   <a:schemeClr val="tx1"/>
                 </a:solidFill>
               </a:rPr>
               <a:t> ระบบใส่วันนี้ให้</a:t>
             </a:r>
-            <a:endParaRPr lang="en-US" sz="1500" dirty="0"/>
+            <a:endParaRPr lang="en-US" sz="2050" dirty="0"/>
           </a:p>
         </p:txBody>
       </p:sp>
@@ -5695,7 +5695,7 @@
         </p:nvSpPr>
         <p:spPr>
           <a:xfrm>
-            <a:off x="8366760" y="2423160"/>
+            <a:off x="8366760" y="2525395"/>
             <a:ext cx="329184" cy="329184"/>
           </a:xfrm>
           <a:prstGeom prst="ellipse">
@@ -5720,7 +5720,7 @@
         </p:nvSpPr>
         <p:spPr>
           <a:xfrm>
-            <a:off x="8366760" y="2423160"/>
+            <a:off x="8366760" y="2525395"/>
             <a:ext cx="329184" cy="329184"/>
           </a:xfrm>
           <a:prstGeom prst="rect">
@@ -5737,14 +5737,14 @@
               <a:buNone/>
             </a:pPr>
             <a:r>
-              <a:rPr lang="en-US" sz="1300" b="1" dirty="0">
+              <a:rPr lang="en-US" sz="1750" b="1" dirty="0">
                 <a:solidFill>
                   <a:schemeClr val="bg1"/>
                 </a:solidFill>
               </a:rPr>
               <a:t>3</a:t>
             </a:r>
-            <a:endParaRPr lang="en-US" sz="1300" dirty="0"/>
+            <a:endParaRPr lang="en-US" sz="1750" dirty="0"/>
           </a:p>
         </p:txBody>
       </p:sp>
@@ -5756,8 +5756,8 @@
         </p:nvSpPr>
         <p:spPr>
           <a:xfrm>
-            <a:off x="8842248" y="2395728"/>
-            <a:ext cx="2907792" cy="624078"/>
+            <a:off x="8842248" y="2497963"/>
+            <a:ext cx="2907792" cy="760603"/>
           </a:xfrm>
           <a:prstGeom prst="rect">
             <a:avLst/>
@@ -5773,7 +5773,7 @@
               <a:buNone/>
             </a:pPr>
             <a:r>
-              <a:rPr lang="en-US" sz="1500" b="1" dirty="0">
+              <a:rPr lang="en-US" sz="2050" b="1" dirty="0">
                 <a:solidFill>
                   <a:schemeClr val="tx2"/>
                 </a:solidFill>
@@ -5784,14 +5784,14 @@
               <a:buNone/>
             </a:pPr>
             <a:r>
-              <a:rPr lang="en-US" sz="1500" dirty="0">
+              <a:rPr lang="en-US" sz="2050" dirty="0">
                 <a:solidFill>
                   <a:schemeClr val="tx1"/>
                 </a:solidFill>
               </a:rPr>
               <a:t> พิมพ์บางคำแล้วเลือกจากรายการ</a:t>
             </a:r>
-            <a:endParaRPr lang="en-US" sz="1500" dirty="0"/>
+            <a:endParaRPr lang="en-US" sz="2050" dirty="0"/>
           </a:p>
         </p:txBody>
       </p:sp>
@@ -5803,7 +5803,7 @@
         </p:nvSpPr>
         <p:spPr>
           <a:xfrm>
-            <a:off x="8366760" y="3175254"/>
+            <a:off x="8366760" y="3414014"/>
             <a:ext cx="329184" cy="329184"/>
           </a:xfrm>
           <a:prstGeom prst="ellipse">
@@ -5828,7 +5828,7 @@
         </p:nvSpPr>
         <p:spPr>
           <a:xfrm>
-            <a:off x="8366760" y="3175254"/>
+            <a:off x="8366760" y="3414014"/>
             <a:ext cx="329184" cy="329184"/>
           </a:xfrm>
           <a:prstGeom prst="rect">
@@ -5845,14 +5845,14 @@
               <a:buNone/>
             </a:pPr>
             <a:r>
-              <a:rPr lang="en-US" sz="1300" b="1" dirty="0">
+              <a:rPr lang="en-US" sz="1750" b="1" dirty="0">
                 <a:solidFill>
                   <a:schemeClr val="bg1"/>
                 </a:solidFill>
               </a:rPr>
               <a:t>4</a:t>
             </a:r>
-            <a:endParaRPr lang="en-US" sz="1300" dirty="0"/>
+            <a:endParaRPr lang="en-US" sz="1750" dirty="0"/>
           </a:p>
         </p:txBody>
       </p:sp>
@@ -5864,8 +5864,8 @@
         </p:nvSpPr>
         <p:spPr>
           <a:xfrm>
-            <a:off x="8842248" y="3147822"/>
-            <a:ext cx="2907792" cy="384048"/>
+            <a:off x="8842248" y="3386582"/>
+            <a:ext cx="2907792" cy="760603"/>
           </a:xfrm>
           <a:prstGeom prst="rect">
             <a:avLst/>
@@ -5881,7 +5881,7 @@
               <a:buNone/>
             </a:pPr>
             <a:r>
-              <a:rPr lang="en-US" sz="1500" b="1" dirty="0">
+              <a:rPr lang="en-US" sz="2050" b="1" dirty="0">
                 <a:solidFill>
                   <a:schemeClr val="tx2"/>
                 </a:solidFill>
@@ -5892,14 +5892,14 @@
               <a:buNone/>
             </a:pPr>
             <a:r>
-              <a:rPr lang="en-US" sz="1500" dirty="0">
+              <a:rPr lang="en-US" sz="2050" dirty="0">
                 <a:solidFill>
                   <a:schemeClr val="tx1"/>
                 </a:solidFill>
               </a:rPr>
               <a:t> วันที่ต้องใช้เงิน</a:t>
             </a:r>
-            <a:endParaRPr lang="en-US" sz="1500" dirty="0"/>
+            <a:endParaRPr lang="en-US" sz="2050" dirty="0"/>
           </a:p>
         </p:txBody>
       </p:sp>
@@ -5955,7 +5955,7 @@
               <a:buNone/>
             </a:pPr>
             <a:r>
-              <a:rPr lang="en-US" sz="1400" dirty="0">
+              <a:rPr lang="en-US" sz="1900" dirty="0">
                 <a:solidFill>
                   <a:schemeClr val="tx1"/>
                 </a:solidFill>
@@ -5966,14 +5966,14 @@
               <a:buNone/>
             </a:pPr>
             <a:r>
-              <a:rPr lang="en-US" sz="1400" dirty="0">
+              <a:rPr lang="en-US" sz="1900" dirty="0">
                 <a:solidFill>
                   <a:schemeClr val="tx1"/>
                 </a:solidFill>
               </a:rPr>
               <a:t>ข้อมูลผู้ยื่น (ช่องสีเทา) ระบบดึงมาให้ ถ้าผิดแจ้ง HR</a:t>
             </a:r>
-            <a:endParaRPr lang="en-US" sz="1400" dirty="0"/>
+            <a:endParaRPr lang="en-US" sz="1900" dirty="0"/>
           </a:p>
         </p:txBody>
       </p:sp>
@@ -6005,7 +6005,7 @@
           <a:bodyPr/>
           <a:lstStyle>
             <a:lvl1pPr>
-              <a:defRPr sz="1000">
+              <a:defRPr sz="1350">
                 <a:solidFill>
                   <a:schemeClr val="accent5"/>
                 </a:solidFill>
@@ -6074,14 +6074,14 @@
               <a:buNone/>
             </a:pPr>
             <a:r>
-              <a:rPr lang="en-US" sz="3000" b="1" dirty="0">
+              <a:rPr lang="en-US" sz="4050" b="1" dirty="0">
                 <a:solidFill>
                   <a:schemeClr val="tx2"/>
                 </a:solidFill>
               </a:rPr>
               <a:t>ขั้นที่ 3: รายละเอียดและไฟล์แนบ</a:t>
             </a:r>
-            <a:endParaRPr lang="en-US" sz="3000" dirty="0"/>
+            <a:endParaRPr lang="en-US" sz="4050" dirty="0"/>
           </a:p>
         </p:txBody>
       </p:sp>
@@ -6191,14 +6191,14 @@
               <a:buNone/>
             </a:pPr>
             <a:r>
-              <a:rPr lang="en-US" sz="1300" b="1" dirty="0">
+              <a:rPr lang="en-US" sz="1750" b="1" dirty="0">
                 <a:solidFill>
                   <a:schemeClr val="bg1"/>
                 </a:solidFill>
               </a:rPr>
               <a:t>5</a:t>
             </a:r>
-            <a:endParaRPr lang="en-US" sz="1300" dirty="0"/>
+            <a:endParaRPr lang="en-US" sz="1750" dirty="0"/>
           </a:p>
         </p:txBody>
       </p:sp>
@@ -6211,7 +6211,7 @@
         <p:spPr>
           <a:xfrm>
             <a:off x="8842248" y="1371600"/>
-            <a:ext cx="2907792" cy="624078"/>
+            <a:ext cx="2907792" cy="760603"/>
           </a:xfrm>
           <a:prstGeom prst="rect">
             <a:avLst/>
@@ -6227,7 +6227,7 @@
               <a:buNone/>
             </a:pPr>
             <a:r>
-              <a:rPr lang="en-US" sz="1500" b="1" dirty="0">
+              <a:rPr lang="en-US" sz="2050" b="1" dirty="0">
                 <a:solidFill>
                   <a:schemeClr val="tx2"/>
                 </a:solidFill>
@@ -6238,14 +6238,14 @@
               <a:buNone/>
             </a:pPr>
             <a:r>
-              <a:rPr lang="en-US" sz="1500" dirty="0">
+              <a:rPr lang="en-US" sz="2050" dirty="0">
                 <a:solidFill>
                   <a:schemeClr val="tx1"/>
                 </a:solidFill>
               </a:rPr>
               <a:t> ซื้ออะไร ใช้ที่ไหน ทำไม</a:t>
             </a:r>
-            <a:endParaRPr lang="en-US" sz="1500" dirty="0"/>
+            <a:endParaRPr lang="en-US" sz="2050" dirty="0"/>
           </a:p>
         </p:txBody>
       </p:sp>
@@ -6257,7 +6257,7 @@
         </p:nvSpPr>
         <p:spPr>
           <a:xfrm>
-            <a:off x="8366760" y="2151126"/>
+            <a:off x="8366760" y="2287651"/>
             <a:ext cx="329184" cy="329184"/>
           </a:xfrm>
           <a:prstGeom prst="ellipse">
@@ -6282,7 +6282,7 @@
         </p:nvSpPr>
         <p:spPr>
           <a:xfrm>
-            <a:off x="8366760" y="2151126"/>
+            <a:off x="8366760" y="2287651"/>
             <a:ext cx="329184" cy="329184"/>
           </a:xfrm>
           <a:prstGeom prst="rect">
@@ -6299,14 +6299,14 @@
               <a:buNone/>
             </a:pPr>
             <a:r>
-              <a:rPr lang="en-US" sz="1300" b="1" dirty="0">
+              <a:rPr lang="en-US" sz="1750" b="1" dirty="0">
                 <a:solidFill>
                   <a:schemeClr val="bg1"/>
                 </a:solidFill>
               </a:rPr>
               <a:t>6</a:t>
             </a:r>
-            <a:endParaRPr lang="en-US" sz="1300" dirty="0"/>
+            <a:endParaRPr lang="en-US" sz="1750" dirty="0"/>
           </a:p>
         </p:txBody>
       </p:sp>
@@ -6318,8 +6318,8 @@
         </p:nvSpPr>
         <p:spPr>
           <a:xfrm>
-            <a:off x="8842248" y="2123694"/>
-            <a:ext cx="2907792" cy="624078"/>
+            <a:off x="8842248" y="2260219"/>
+            <a:ext cx="2907792" cy="760603"/>
           </a:xfrm>
           <a:prstGeom prst="rect">
             <a:avLst/>
@@ -6335,7 +6335,7 @@
               <a:buNone/>
             </a:pPr>
             <a:r>
-              <a:rPr lang="en-US" sz="1500" b="1" dirty="0">
+              <a:rPr lang="en-US" sz="2050" b="1" dirty="0">
                 <a:solidFill>
                   <a:schemeClr val="tx2"/>
                 </a:solidFill>
@@ -6346,14 +6346,14 @@
               <a:buNone/>
             </a:pPr>
             <a:r>
-              <a:rPr lang="en-US" sz="1500" dirty="0">
+              <a:rPr lang="en-US" sz="2050" dirty="0">
                 <a:solidFill>
                   <a:schemeClr val="tx1"/>
                 </a:solidFill>
               </a:rPr>
               <a:t> ตัวเลขอย่างเดียว เช่น 12500</a:t>
             </a:r>
-            <a:endParaRPr lang="en-US" sz="1500" dirty="0"/>
+            <a:endParaRPr lang="en-US" sz="2050" dirty="0"/>
           </a:p>
         </p:txBody>
       </p:sp>
@@ -6365,7 +6365,7 @@
         </p:nvSpPr>
         <p:spPr>
           <a:xfrm>
-            <a:off x="8366760" y="2903220"/>
+            <a:off x="8366760" y="3176270"/>
             <a:ext cx="329184" cy="329184"/>
           </a:xfrm>
           <a:prstGeom prst="ellipse">
@@ -6390,7 +6390,7 @@
         </p:nvSpPr>
         <p:spPr>
           <a:xfrm>
-            <a:off x="8366760" y="2903220"/>
+            <a:off x="8366760" y="3176270"/>
             <a:ext cx="329184" cy="329184"/>
           </a:xfrm>
           <a:prstGeom prst="rect">
@@ -6407,14 +6407,14 @@
               <a:buNone/>
             </a:pPr>
             <a:r>
-              <a:rPr lang="en-US" sz="1300" b="1" dirty="0">
+              <a:rPr lang="en-US" sz="1750" b="1" dirty="0">
                 <a:solidFill>
                   <a:schemeClr val="bg1"/>
                 </a:solidFill>
               </a:rPr>
               <a:t>7</a:t>
             </a:r>
-            <a:endParaRPr lang="en-US" sz="1300" dirty="0"/>
+            <a:endParaRPr lang="en-US" sz="1750" dirty="0"/>
           </a:p>
         </p:txBody>
       </p:sp>
@@ -6426,8 +6426,8 @@
         </p:nvSpPr>
         <p:spPr>
           <a:xfrm>
-            <a:off x="8842248" y="2875788"/>
-            <a:ext cx="2907792" cy="624078"/>
+            <a:off x="8842248" y="3148838"/>
+            <a:ext cx="2907792" cy="760603"/>
           </a:xfrm>
           <a:prstGeom prst="rect">
             <a:avLst/>
@@ -6443,7 +6443,7 @@
               <a:buNone/>
             </a:pPr>
             <a:r>
-              <a:rPr lang="en-US" sz="1500" b="1" dirty="0">
+              <a:rPr lang="en-US" sz="2050" b="1" dirty="0">
                 <a:solidFill>
                   <a:schemeClr val="tx2"/>
                 </a:solidFill>
@@ -6454,14 +6454,14 @@
               <a:buNone/>
             </a:pPr>
             <a:r>
-              <a:rPr lang="en-US" sz="1500" dirty="0">
+              <a:rPr lang="en-US" sz="2050" dirty="0">
                 <a:solidFill>
                   <a:schemeClr val="tx1"/>
                 </a:solidFill>
               </a:rPr>
               <a:t> ใบเสนอราคา / ใบเสร็จ</a:t>
             </a:r>
-            <a:endParaRPr lang="en-US" sz="1500" dirty="0"/>
+            <a:endParaRPr lang="en-US" sz="2050" dirty="0"/>
           </a:p>
         </p:txBody>
       </p:sp>
@@ -6517,7 +6517,7 @@
               <a:buNone/>
             </a:pPr>
             <a:r>
-              <a:rPr lang="en-US" sz="1400" dirty="0">
+              <a:rPr lang="en-US" sz="1900" dirty="0">
                 <a:solidFill>
                   <a:schemeClr val="tx1"/>
                 </a:solidFill>
@@ -6528,14 +6528,14 @@
               <a:buNone/>
             </a:pPr>
             <a:r>
-              <a:rPr lang="en-US" sz="1400" dirty="0">
+              <a:rPr lang="en-US" sz="1900" dirty="0">
                 <a:solidFill>
                   <a:schemeClr val="tx1"/>
                 </a:solidFill>
               </a:rPr>
               <a:t>สูงสุด 5 ไฟล์ ไฟล์ละไม่เกิน 10 MB · รูปภาพหรือ PDF · มือถือถ่ายรูปแนบได้ทันที</a:t>
             </a:r>
-            <a:endParaRPr lang="en-US" sz="1400" dirty="0"/>
+            <a:endParaRPr lang="en-US" sz="1900" dirty="0"/>
           </a:p>
         </p:txBody>
       </p:sp>
@@ -6567,7 +6567,7 @@
           <a:bodyPr/>
           <a:lstStyle>
             <a:lvl1pPr>
-              <a:defRPr sz="1000">
+              <a:defRPr sz="1350">
                 <a:solidFill>
                   <a:schemeClr val="accent5"/>
                 </a:solidFill>
@@ -6636,14 +6636,14 @@
               <a:buNone/>
             </a:pPr>
             <a:r>
-              <a:rPr lang="en-US" sz="3000" b="1" dirty="0">
+              <a:rPr lang="en-US" sz="4050" b="1" dirty="0">
                 <a:solidFill>
                   <a:schemeClr val="tx2"/>
                 </a:solidFill>
               </a:rPr>
               <a:t>ขั้นที่ 4: ลงลายเซ็นและส่งคำขอ</a:t>
             </a:r>
-            <a:endParaRPr lang="en-US" sz="3000" dirty="0"/>
+            <a:endParaRPr lang="en-US" sz="4050" dirty="0"/>
           </a:p>
         </p:txBody>
       </p:sp>
@@ -6753,14 +6753,14 @@
               <a:buNone/>
             </a:pPr>
             <a:r>
-              <a:rPr lang="en-US" sz="1300" b="1" dirty="0">
+              <a:rPr lang="en-US" sz="1750" b="1" dirty="0">
                 <a:solidFill>
                   <a:schemeClr val="bg1"/>
                 </a:solidFill>
               </a:rPr>
               <a:t>8</a:t>
             </a:r>
-            <a:endParaRPr lang="en-US" sz="1300" dirty="0"/>
+            <a:endParaRPr lang="en-US" sz="1750" dirty="0"/>
           </a:p>
         </p:txBody>
       </p:sp>
@@ -6773,7 +6773,7 @@
         <p:spPr>
           <a:xfrm>
             <a:off x="8842248" y="1371600"/>
-            <a:ext cx="2907792" cy="624078"/>
+            <a:ext cx="2907792" cy="760603"/>
           </a:xfrm>
           <a:prstGeom prst="rect">
             <a:avLst/>
@@ -6789,7 +6789,7 @@
               <a:buNone/>
             </a:pPr>
             <a:r>
-              <a:rPr lang="en-US" sz="1500" dirty="0">
+              <a:rPr lang="en-US" sz="2050" dirty="0">
                 <a:solidFill>
                   <a:schemeClr val="tx1"/>
                 </a:solidFill>
@@ -6800,7 +6800,7 @@
               <a:buNone/>
             </a:pPr>
             <a:r>
-              <a:rPr lang="en-US" sz="1500" b="1" dirty="0">
+              <a:rPr lang="en-US" sz="2050" b="1" dirty="0">
                 <a:solidFill>
                   <a:schemeClr val="tx2"/>
                 </a:solidFill>
@@ -6811,14 +6811,14 @@
               <a:buNone/>
             </a:pPr>
             <a:r>
-              <a:rPr lang="en-US" sz="1500" dirty="0">
+              <a:rPr lang="en-US" sz="2050" dirty="0">
                 <a:solidFill>
                   <a:schemeClr val="tx1"/>
                 </a:solidFill>
               </a:rPr>
               <a:t> กรอบเหลือง (เงื่อนไขเวลา)</a:t>
             </a:r>
-            <a:endParaRPr lang="en-US" sz="1500" dirty="0"/>
+            <a:endParaRPr lang="en-US" sz="2050" dirty="0"/>
           </a:p>
         </p:txBody>
       </p:sp>
@@ -6830,7 +6830,7 @@
         </p:nvSpPr>
         <p:spPr>
           <a:xfrm>
-            <a:off x="8366760" y="2151126"/>
+            <a:off x="8366760" y="2287651"/>
             <a:ext cx="329184" cy="329184"/>
           </a:xfrm>
           <a:prstGeom prst="ellipse">
@@ -6855,7 +6855,7 @@
         </p:nvSpPr>
         <p:spPr>
           <a:xfrm>
-            <a:off x="8366760" y="2151126"/>
+            <a:off x="8366760" y="2287651"/>
             <a:ext cx="329184" cy="329184"/>
           </a:xfrm>
           <a:prstGeom prst="rect">
@@ -6872,14 +6872,14 @@
               <a:buNone/>
             </a:pPr>
             <a:r>
-              <a:rPr lang="en-US" sz="1300" b="1" dirty="0">
+              <a:rPr lang="en-US" sz="1750" b="1" dirty="0">
                 <a:solidFill>
                   <a:schemeClr val="bg1"/>
                 </a:solidFill>
               </a:rPr>
               <a:t>9</a:t>
             </a:r>
-            <a:endParaRPr lang="en-US" sz="1300" dirty="0"/>
+            <a:endParaRPr lang="en-US" sz="1750" dirty="0"/>
           </a:p>
         </p:txBody>
       </p:sp>
@@ -6891,8 +6891,8 @@
         </p:nvSpPr>
         <p:spPr>
           <a:xfrm>
-            <a:off x="8842248" y="2123694"/>
-            <a:ext cx="2907792" cy="624078"/>
+            <a:off x="8842248" y="2260219"/>
+            <a:ext cx="2907792" cy="760603"/>
           </a:xfrm>
           <a:prstGeom prst="rect">
             <a:avLst/>
@@ -6908,7 +6908,7 @@
               <a:buNone/>
             </a:pPr>
             <a:r>
-              <a:rPr lang="en-US" sz="1500" b="1" dirty="0">
+              <a:rPr lang="en-US" sz="2050" b="1" dirty="0">
                 <a:solidFill>
                   <a:schemeClr val="tx2"/>
                 </a:solidFill>
@@ -6919,14 +6919,14 @@
               <a:buNone/>
             </a:pPr>
             <a:r>
-              <a:rPr lang="en-US" sz="1500" dirty="0">
+              <a:rPr lang="en-US" sz="2050" dirty="0">
                 <a:solidFill>
                   <a:schemeClr val="tx1"/>
                 </a:solidFill>
               </a:rPr>
               <a:t> ในกรอบ หรืออัปโหลดรูปลายเซ็น</a:t>
             </a:r>
-            <a:endParaRPr lang="en-US" sz="1500" dirty="0"/>
+            <a:endParaRPr lang="en-US" sz="2050" dirty="0"/>
           </a:p>
         </p:txBody>
       </p:sp>
@@ -6938,7 +6938,7 @@
         </p:nvSpPr>
         <p:spPr>
           <a:xfrm>
-            <a:off x="8366760" y="2903220"/>
+            <a:off x="8366760" y="3176270"/>
             <a:ext cx="329184" cy="329184"/>
           </a:xfrm>
           <a:prstGeom prst="ellipse">
@@ -6963,7 +6963,7 @@
         </p:nvSpPr>
         <p:spPr>
           <a:xfrm>
-            <a:off x="8366760" y="2903220"/>
+            <a:off x="8366760" y="3176270"/>
             <a:ext cx="329184" cy="329184"/>
           </a:xfrm>
           <a:prstGeom prst="rect">
@@ -6980,14 +6980,14 @@
               <a:buNone/>
             </a:pPr>
             <a:r>
-              <a:rPr lang="en-US" sz="1300" b="1" dirty="0">
+              <a:rPr lang="en-US" sz="1750" b="1" dirty="0">
                 <a:solidFill>
                   <a:schemeClr val="bg1"/>
                 </a:solidFill>
               </a:rPr>
               <a:t>10</a:t>
             </a:r>
-            <a:endParaRPr lang="en-US" sz="1300" dirty="0"/>
+            <a:endParaRPr lang="en-US" sz="1750" dirty="0"/>
           </a:p>
         </p:txBody>
       </p:sp>
@@ -6999,8 +6999,8 @@
         </p:nvSpPr>
         <p:spPr>
           <a:xfrm>
-            <a:off x="8842248" y="2875788"/>
-            <a:ext cx="2907792" cy="624078"/>
+            <a:off x="8842248" y="3148838"/>
+            <a:ext cx="2907792" cy="760603"/>
           </a:xfrm>
           <a:prstGeom prst="rect">
             <a:avLst/>
@@ -7016,14 +7016,14 @@
               <a:buNone/>
             </a:pPr>
             <a:r>
-              <a:rPr lang="en-US" sz="1500" dirty="0">
+              <a:rPr lang="en-US" sz="2050" dirty="0">
                 <a:solidFill>
                   <a:schemeClr val="tx1"/>
                 </a:solidFill>
               </a:rPr>
               <a:t>ดาวน์โหลดตัวอย่างเอกสาร (ไม่บังคับ)</a:t>
             </a:r>
-            <a:endParaRPr lang="en-US" sz="1500" dirty="0"/>
+            <a:endParaRPr lang="en-US" sz="2050" dirty="0"/>
           </a:p>
         </p:txBody>
       </p:sp>
@@ -7035,7 +7035,7 @@
         </p:nvSpPr>
         <p:spPr>
           <a:xfrm>
-            <a:off x="8366760" y="3655314"/>
+            <a:off x="8366760" y="4064889"/>
             <a:ext cx="329184" cy="329184"/>
           </a:xfrm>
           <a:prstGeom prst="ellipse">
@@ -7060,7 +7060,7 @@
         </p:nvSpPr>
         <p:spPr>
           <a:xfrm>
-            <a:off x="8366760" y="3655314"/>
+            <a:off x="8366760" y="4064889"/>
             <a:ext cx="329184" cy="329184"/>
           </a:xfrm>
           <a:prstGeom prst="rect">
@@ -7077,14 +7077,14 @@
               <a:buNone/>
             </a:pPr>
             <a:r>
-              <a:rPr lang="en-US" sz="1300" b="1" dirty="0">
+              <a:rPr lang="en-US" sz="1750" b="1" dirty="0">
                 <a:solidFill>
                   <a:schemeClr val="bg1"/>
                 </a:solidFill>
               </a:rPr>
               <a:t>11</a:t>
             </a:r>
-            <a:endParaRPr lang="en-US" sz="1300" dirty="0"/>
+            <a:endParaRPr lang="en-US" sz="1750" dirty="0"/>
           </a:p>
         </p:txBody>
       </p:sp>
@@ -7096,8 +7096,8 @@
         </p:nvSpPr>
         <p:spPr>
           <a:xfrm>
-            <a:off x="8842248" y="3627882"/>
-            <a:ext cx="2907792" cy="384048"/>
+            <a:off x="8842248" y="4037457"/>
+            <a:ext cx="2907792" cy="435166"/>
           </a:xfrm>
           <a:prstGeom prst="rect">
             <a:avLst/>
@@ -7113,7 +7113,7 @@
               <a:buNone/>
             </a:pPr>
             <a:r>
-              <a:rPr lang="en-US" sz="1500" dirty="0">
+              <a:rPr lang="en-US" sz="2050" dirty="0">
                 <a:solidFill>
                   <a:schemeClr val="tx1"/>
                 </a:solidFill>
@@ -7124,14 +7124,14 @@
               <a:buNone/>
             </a:pPr>
             <a:r>
-              <a:rPr lang="en-US" sz="1500" b="1" dirty="0">
+              <a:rPr lang="en-US" sz="2050" b="1" dirty="0">
                 <a:solidFill>
                   <a:schemeClr val="tx2"/>
                 </a:solidFill>
               </a:rPr>
               <a:t>ส่งคำขอ</a:t>
             </a:r>
-            <a:endParaRPr lang="en-US" sz="1500" dirty="0"/>
+            <a:endParaRPr lang="en-US" sz="2050" dirty="0"/>
           </a:p>
         </p:txBody>
       </p:sp>
@@ -7163,7 +7163,7 @@
           <a:bodyPr/>
           <a:lstStyle>
             <a:lvl1pPr>
-              <a:defRPr sz="1000">
+              <a:defRPr sz="1350">
                 <a:solidFill>
                   <a:schemeClr val="accent5"/>
                 </a:solidFill>
@@ -7232,14 +7232,14 @@
               <a:buNone/>
             </a:pPr>
             <a:r>
-              <a:rPr lang="en-US" sz="3000" b="1" dirty="0">
+              <a:rPr lang="en-US" sz="4050" b="1" dirty="0">
                 <a:solidFill>
                   <a:schemeClr val="tx2"/>
                 </a:solidFill>
               </a:rPr>
               <a:t>ขั้นที่ 5: ตรวจทาน ยืนยัน ได้เลขที่คำขอ</a:t>
             </a:r>
-            <a:endParaRPr lang="en-US" sz="3000" dirty="0"/>
+            <a:endParaRPr lang="en-US" sz="4050" dirty="0"/>
           </a:p>
         </p:txBody>
       </p:sp>
@@ -7380,14 +7380,14 @@
               <a:buNone/>
             </a:pPr>
             <a:r>
-              <a:rPr lang="en-US" sz="1400" dirty="0">
+              <a:rPr lang="en-US" sz="1900" dirty="0">
                 <a:solidFill>
                   <a:schemeClr val="tx1"/>
                 </a:solidFill>
               </a:rPr>
               <a:t>ตรวจข้อมูลทั้งหมดในหน้าต่างสรุป → ถูกต้องกด ยืนยันส่งคำขอ · ผิดกด กลับไปแก้ไข</a:t>
             </a:r>
-            <a:endParaRPr lang="en-US" sz="1400" dirty="0"/>
+            <a:endParaRPr lang="en-US" sz="1900" dirty="0"/>
           </a:p>
         </p:txBody>
       </p:sp>
@@ -7416,14 +7416,14 @@
               <a:buNone/>
             </a:pPr>
             <a:r>
-              <a:rPr lang="en-US" sz="1400" dirty="0">
+              <a:rPr lang="en-US" sz="1900" dirty="0">
                 <a:solidFill>
                   <a:schemeClr val="tx1"/>
                 </a:solidFill>
               </a:rPr>
               <a:t>ส่งสำเร็จได้ เลขที่คำขอ เช่น FM-ACC-002-001-2026 จดไว้อ้างอิง</a:t>
             </a:r>
-            <a:endParaRPr lang="en-US" sz="1400" dirty="0"/>
+            <a:endParaRPr lang="en-US" sz="1900" dirty="0"/>
           </a:p>
         </p:txBody>
       </p:sp>
@@ -7455,7 +7455,7 @@
           <a:bodyPr/>
           <a:lstStyle>
             <a:lvl1pPr>
-              <a:defRPr sz="1000">
+              <a:defRPr sz="1350">
                 <a:solidFill>
                   <a:schemeClr val="accent5"/>
                 </a:solidFill>
@@ -7524,14 +7524,14 @@
               <a:buNone/>
             </a:pPr>
             <a:r>
-              <a:rPr lang="en-US" sz="3000" b="1" dirty="0">
+              <a:rPr lang="en-US" sz="4050" b="1" dirty="0">
                 <a:solidFill>
                   <a:schemeClr val="tx2"/>
                 </a:solidFill>
               </a:rPr>
               <a:t>ติดตามสถานะ: คำขอถึงใครแล้ว</a:t>
             </a:r>
-            <a:endParaRPr lang="en-US" sz="3000" dirty="0"/>
+            <a:endParaRPr lang="en-US" sz="4050" dirty="0"/>
           </a:p>
         </p:txBody>
       </p:sp>
@@ -7641,14 +7641,14 @@
               <a:buNone/>
             </a:pPr>
             <a:r>
-              <a:rPr lang="en-US" sz="1300" b="1" dirty="0">
+              <a:rPr lang="en-US" sz="1750" b="1" dirty="0">
                 <a:solidFill>
                   <a:schemeClr val="bg1"/>
                 </a:solidFill>
               </a:rPr>
               <a:t>1</a:t>
             </a:r>
-            <a:endParaRPr lang="en-US" sz="1300" dirty="0"/>
+            <a:endParaRPr lang="en-US" sz="1750" dirty="0"/>
           </a:p>
         </p:txBody>
       </p:sp>
@@ -7661,7 +7661,7 @@
         <p:spPr>
           <a:xfrm>
             <a:off x="7607808" y="1371600"/>
-            <a:ext cx="4142232" cy="384048"/>
+            <a:ext cx="4142232" cy="435166"/>
           </a:xfrm>
           <a:prstGeom prst="rect">
             <a:avLst/>
@@ -7677,14 +7677,14 @@
               <a:buNone/>
             </a:pPr>
             <a:r>
-              <a:rPr lang="en-US" sz="1500" dirty="0">
+              <a:rPr lang="en-US" sz="2050" dirty="0">
                 <a:solidFill>
                   <a:schemeClr val="tx1"/>
                 </a:solidFill>
               </a:rPr>
               <a:t>สถานะ ผู้ยื่น เวลายื่น</a:t>
             </a:r>
-            <a:endParaRPr lang="en-US" sz="1500" dirty="0"/>
+            <a:endParaRPr lang="en-US" sz="2050" dirty="0"/>
           </a:p>
         </p:txBody>
       </p:sp>
@@ -7696,7 +7696,7 @@
         </p:nvSpPr>
         <p:spPr>
           <a:xfrm>
-            <a:off x="7132320" y="1911096"/>
+            <a:off x="7132320" y="1962214"/>
             <a:ext cx="329184" cy="329184"/>
           </a:xfrm>
           <a:prstGeom prst="ellipse">
@@ -7721,7 +7721,7 @@
         </p:nvSpPr>
         <p:spPr>
           <a:xfrm>
-            <a:off x="7132320" y="1911096"/>
+            <a:off x="7132320" y="1962214"/>
             <a:ext cx="329184" cy="329184"/>
           </a:xfrm>
           <a:prstGeom prst="rect">
@@ -7738,14 +7738,14 @@
               <a:buNone/>
             </a:pPr>
             <a:r>
-              <a:rPr lang="en-US" sz="1300" b="1" dirty="0">
+              <a:rPr lang="en-US" sz="1750" b="1" dirty="0">
                 <a:solidFill>
                   <a:schemeClr val="bg1"/>
                 </a:solidFill>
               </a:rPr>
               <a:t>2</a:t>
             </a:r>
-            <a:endParaRPr lang="en-US" sz="1300" dirty="0"/>
+            <a:endParaRPr lang="en-US" sz="1750" dirty="0"/>
           </a:p>
         </p:txBody>
       </p:sp>
@@ -7757,8 +7757,8 @@
         </p:nvSpPr>
         <p:spPr>
           <a:xfrm>
-            <a:off x="7607808" y="1883664"/>
-            <a:ext cx="4142232" cy="384048"/>
+            <a:off x="7607808" y="1934782"/>
+            <a:ext cx="4142232" cy="435166"/>
           </a:xfrm>
           <a:prstGeom prst="rect">
             <a:avLst/>
@@ -7774,14 +7774,14 @@
               <a:buNone/>
             </a:pPr>
             <a:r>
-              <a:rPr lang="en-US" sz="1500" dirty="0">
+              <a:rPr lang="en-US" sz="2050" dirty="0">
                 <a:solidFill>
                   <a:schemeClr val="tx1"/>
                 </a:solidFill>
               </a:rPr>
               <a:t>ข้อมูลที่กรอก · กดไฟล์แนบเพื่อเปิด</a:t>
             </a:r>
-            <a:endParaRPr lang="en-US" sz="1500" dirty="0"/>
+            <a:endParaRPr lang="en-US" sz="2050" dirty="0"/>
           </a:p>
         </p:txBody>
       </p:sp>
@@ -7793,7 +7793,7 @@
         </p:nvSpPr>
         <p:spPr>
           <a:xfrm>
-            <a:off x="7132320" y="2423160"/>
+            <a:off x="7132320" y="2525395"/>
             <a:ext cx="329184" cy="329184"/>
           </a:xfrm>
           <a:prstGeom prst="ellipse">
@@ -7818,7 +7818,7 @@
         </p:nvSpPr>
         <p:spPr>
           <a:xfrm>
-            <a:off x="7132320" y="2423160"/>
+            <a:off x="7132320" y="2525395"/>
             <a:ext cx="329184" cy="329184"/>
           </a:xfrm>
           <a:prstGeom prst="rect">
@@ -7835,14 +7835,14 @@
               <a:buNone/>
             </a:pPr>
             <a:r>
-              <a:rPr lang="en-US" sz="1300" b="1" dirty="0">
+              <a:rPr lang="en-US" sz="1750" b="1" dirty="0">
                 <a:solidFill>
                   <a:schemeClr val="bg1"/>
                 </a:solidFill>
               </a:rPr>
               <a:t>3</a:t>
             </a:r>
-            <a:endParaRPr lang="en-US" sz="1300" dirty="0"/>
+            <a:endParaRPr lang="en-US" sz="1750" dirty="0"/>
           </a:p>
         </p:txBody>
       </p:sp>
@@ -7854,8 +7854,8 @@
         </p:nvSpPr>
         <p:spPr>
           <a:xfrm>
-            <a:off x="7607808" y="2395728"/>
-            <a:ext cx="4142232" cy="624078"/>
+            <a:off x="7607808" y="2497963"/>
+            <a:ext cx="4142232" cy="760603"/>
           </a:xfrm>
           <a:prstGeom prst="rect">
             <a:avLst/>
@@ -7871,7 +7871,7 @@
               <a:buNone/>
             </a:pPr>
             <a:r>
-              <a:rPr lang="en-US" sz="1500" b="1" dirty="0">
+              <a:rPr lang="en-US" sz="2050" b="1" dirty="0">
                 <a:solidFill>
                   <a:schemeClr val="tx2"/>
                 </a:solidFill>
@@ -7882,14 +7882,14 @@
               <a:buNone/>
             </a:pPr>
             <a:r>
-              <a:rPr lang="en-US" sz="1500" dirty="0">
+              <a:rPr lang="en-US" sz="2050" dirty="0">
                 <a:solidFill>
                   <a:schemeClr val="tx1"/>
                 </a:solidFill>
               </a:rPr>
               <a:t> เขียว = ผ่าน · น้ำเงิน = กำลังรอ (บอกเวลาที่รอ)</a:t>
             </a:r>
-            <a:endParaRPr lang="en-US" sz="1500" dirty="0"/>
+            <a:endParaRPr lang="en-US" sz="2050" dirty="0"/>
           </a:p>
         </p:txBody>
       </p:sp>
@@ -7901,7 +7901,7 @@
         </p:nvSpPr>
         <p:spPr>
           <a:xfrm>
-            <a:off x="7132320" y="3175254"/>
+            <a:off x="7132320" y="3414014"/>
             <a:ext cx="329184" cy="329184"/>
           </a:xfrm>
           <a:prstGeom prst="ellipse">
@@ -7926,7 +7926,7 @@
         </p:nvSpPr>
         <p:spPr>
           <a:xfrm>
-            <a:off x="7132320" y="3175254"/>
+            <a:off x="7132320" y="3414014"/>
             <a:ext cx="329184" cy="329184"/>
           </a:xfrm>
           <a:prstGeom prst="rect">
@@ -7943,14 +7943,14 @@
               <a:buNone/>
             </a:pPr>
             <a:r>
-              <a:rPr lang="en-US" sz="1300" b="1" dirty="0">
+              <a:rPr lang="en-US" sz="1750" b="1" dirty="0">
                 <a:solidFill>
                   <a:schemeClr val="bg1"/>
                 </a:solidFill>
               </a:rPr>
               <a:t>4</a:t>
             </a:r>
-            <a:endParaRPr lang="en-US" sz="1300" dirty="0"/>
+            <a:endParaRPr lang="en-US" sz="1750" dirty="0"/>
           </a:p>
         </p:txBody>
       </p:sp>
@@ -7962,8 +7962,8 @@
         </p:nvSpPr>
         <p:spPr>
           <a:xfrm>
-            <a:off x="7607808" y="3147822"/>
-            <a:ext cx="4142232" cy="384048"/>
+            <a:off x="7607808" y="3386582"/>
+            <a:ext cx="4142232" cy="435166"/>
           </a:xfrm>
           <a:prstGeom prst="rect">
             <a:avLst/>
@@ -7979,14 +7979,14 @@
               <a:buNone/>
             </a:pPr>
             <a:r>
-              <a:rPr lang="en-US" sz="1500" dirty="0">
+              <a:rPr lang="en-US" sz="2050" dirty="0">
                 <a:solidFill>
                   <a:schemeClr val="tx1"/>
                 </a:solidFill>
               </a:rPr>
               <a:t>แก้ไข / ยกเลิก ได้ก่อนมีคนอนุมัติ</a:t>
             </a:r>
-            <a:endParaRPr lang="en-US" sz="1500" dirty="0"/>
+            <a:endParaRPr lang="en-US" sz="2050" dirty="0"/>
           </a:p>
         </p:txBody>
       </p:sp>
@@ -7998,7 +7998,7 @@
         </p:nvSpPr>
         <p:spPr>
           <a:xfrm>
-            <a:off x="7132320" y="3687318"/>
+            <a:off x="7132320" y="3977196"/>
             <a:ext cx="329184" cy="329184"/>
           </a:xfrm>
           <a:prstGeom prst="ellipse">
@@ -8023,7 +8023,7 @@
         </p:nvSpPr>
         <p:spPr>
           <a:xfrm>
-            <a:off x="7132320" y="3687318"/>
+            <a:off x="7132320" y="3977196"/>
             <a:ext cx="329184" cy="329184"/>
           </a:xfrm>
           <a:prstGeom prst="rect">
@@ -8040,14 +8040,14 @@
               <a:buNone/>
             </a:pPr>
             <a:r>
-              <a:rPr lang="en-US" sz="1300" b="1" dirty="0">
+              <a:rPr lang="en-US" sz="1750" b="1" dirty="0">
                 <a:solidFill>
                   <a:schemeClr val="bg1"/>
                 </a:solidFill>
               </a:rPr>
               <a:t>5</a:t>
             </a:r>
-            <a:endParaRPr lang="en-US" sz="1300" dirty="0"/>
+            <a:endParaRPr lang="en-US" sz="1750" dirty="0"/>
           </a:p>
         </p:txBody>
       </p:sp>
@@ -8059,8 +8059,8 @@
         </p:nvSpPr>
         <p:spPr>
           <a:xfrm>
-            <a:off x="7607808" y="3659886"/>
-            <a:ext cx="4142232" cy="384048"/>
+            <a:off x="7607808" y="3949764"/>
+            <a:ext cx="4142232" cy="435166"/>
           </a:xfrm>
           <a:prstGeom prst="rect">
             <a:avLst/>
@@ -8076,14 +8076,14 @@
               <a:buNone/>
             </a:pPr>
             <a:r>
-              <a:rPr lang="en-US" sz="1500" dirty="0">
+              <a:rPr lang="en-US" sz="2050" dirty="0">
                 <a:solidFill>
                   <a:schemeClr val="tx1"/>
                 </a:solidFill>
               </a:rPr>
               <a:t>ส่งออกเป็นเอกสาร PDF</a:t>
             </a:r>
-            <a:endParaRPr lang="en-US" sz="1500" dirty="0"/>
+            <a:endParaRPr lang="en-US" sz="2050" dirty="0"/>
           </a:p>
         </p:txBody>
       </p:sp>
@@ -8115,7 +8115,7 @@
           <a:bodyPr/>
           <a:lstStyle>
             <a:lvl1pPr>
-              <a:defRPr sz="1000">
+              <a:defRPr sz="1350">
                 <a:solidFill>
                   <a:schemeClr val="accent5"/>
                 </a:solidFill>
@@ -8184,14 +8184,14 @@
               <a:buNone/>
             </a:pPr>
             <a:r>
-              <a:rPr lang="en-US" sz="3000" b="1" dirty="0">
+              <a:rPr lang="en-US" sz="4050" b="1" dirty="0">
                 <a:solidFill>
                   <a:schemeClr val="tx2"/>
                 </a:solidFill>
               </a:rPr>
               <a:t>ความหมายของสถานะ</a:t>
             </a:r>
-            <a:endParaRPr lang="en-US" sz="3000" dirty="0"/>
+            <a:endParaRPr lang="en-US" sz="4050" dirty="0"/>
           </a:p>
         </p:txBody>
       </p:sp>
@@ -8232,14 +8232,14 @@
                         <a:buNone/>
                       </a:pPr>
                       <a:r>
-                        <a:rPr lang="en-US" sz="1600" b="1" dirty="0">
+                        <a:rPr lang="en-US" sz="2150" b="1" dirty="0">
                           <a:solidFill>
                             <a:schemeClr val="bg1"/>
                           </a:solidFill>
                         </a:rPr>
                         <a:t>สถานะ</a:t>
                       </a:r>
-                      <a:endParaRPr lang="en-US" sz="1600" dirty="0"/>
+                      <a:endParaRPr lang="en-US" sz="2150" dirty="0"/>
                     </a:p>
                   </a:txBody>
                   <a:tcPr marL="137160" marR="137160" marT="0" marB="0" anchor="ctr">
@@ -8293,14 +8293,14 @@
                         <a:buNone/>
                       </a:pPr>
                       <a:r>
-                        <a:rPr lang="en-US" sz="1600" b="1" dirty="0">
+                        <a:rPr lang="en-US" sz="2150" b="1" dirty="0">
                           <a:solidFill>
                             <a:schemeClr val="bg1"/>
                           </a:solidFill>
                         </a:rPr>
                         <a:t>ความหมาย</a:t>
                       </a:r>
-                      <a:endParaRPr lang="en-US" sz="1600" dirty="0"/>
+                      <a:endParaRPr lang="en-US" sz="2150" dirty="0"/>
                     </a:p>
                   </a:txBody>
                   <a:tcPr marL="137160" marR="137160" marT="0" marB="0" anchor="ctr">
@@ -8354,14 +8354,14 @@
                         <a:buNone/>
                       </a:pPr>
                       <a:r>
-                        <a:rPr lang="en-US" sz="1600" b="1" dirty="0">
+                        <a:rPr lang="en-US" sz="2150" b="1" dirty="0">
                           <a:solidFill>
                             <a:schemeClr val="bg1"/>
                           </a:solidFill>
                         </a:rPr>
                         <a:t>ต้องทำอะไร</a:t>
                       </a:r>
-                      <a:endParaRPr lang="en-US" sz="1600" dirty="0"/>
+                      <a:endParaRPr lang="en-US" sz="2150" dirty="0"/>
                     </a:p>
                   </a:txBody>
                   <a:tcPr marL="137160" marR="137160" marT="0" marB="0" anchor="ctr">
@@ -8417,14 +8417,14 @@
                         <a:buNone/>
                       </a:pPr>
                       <a:r>
-                        <a:rPr lang="en-US" sz="1600" b="1" dirty="0">
+                        <a:rPr lang="en-US" sz="2150" b="1" dirty="0">
                           <a:solidFill>
                             <a:srgbClr val="0B5CAD"/>
                           </a:solidFill>
                         </a:rPr>
                         <a:t>รออนุมัติ</a:t>
                       </a:r>
-                      <a:endParaRPr lang="en-US" sz="1600" dirty="0"/>
+                      <a:endParaRPr lang="en-US" sz="2150" dirty="0"/>
                     </a:p>
                   </a:txBody>
                   <a:tcPr marL="137160" marR="137160" marT="0" marB="0" anchor="ctr">
@@ -8478,14 +8478,14 @@
                         <a:buNone/>
                       </a:pPr>
                       <a:r>
-                        <a:rPr lang="en-US" sz="1600" dirty="0">
+                        <a:rPr lang="en-US" sz="2150" dirty="0">
                           <a:solidFill>
                             <a:schemeClr val="tx1"/>
                           </a:solidFill>
                         </a:rPr>
                         <a:t>อยู่ระหว่างรอผู้อนุมัติ</a:t>
                       </a:r>
-                      <a:endParaRPr lang="en-US" sz="1600" dirty="0"/>
+                      <a:endParaRPr lang="en-US" sz="2150" dirty="0"/>
                     </a:p>
                   </a:txBody>
                   <a:tcPr marL="137160" marR="137160" marT="0" marB="0" anchor="ctr">
@@ -8536,14 +8536,14 @@
                         <a:buNone/>
                       </a:pPr>
                       <a:r>
-                        <a:rPr lang="en-US" sz="1600" dirty="0">
+                        <a:rPr lang="en-US" sz="2150" dirty="0">
                           <a:solidFill>
                             <a:schemeClr val="tx1"/>
                           </a:solidFill>
                         </a:rPr>
                         <a:t>รอ · ค้างนานติดต่อผู้อนุมัติ</a:t>
                       </a:r>
-                      <a:endParaRPr lang="en-US" sz="1600" dirty="0"/>
+                      <a:endParaRPr lang="en-US" sz="2150" dirty="0"/>
                     </a:p>
                   </a:txBody>
                   <a:tcPr marL="137160" marR="137160" marT="0" marB="0" anchor="ctr">
@@ -8596,14 +8596,14 @@
                         <a:buNone/>
                       </a:pPr>
                       <a:r>
-                        <a:rPr lang="en-US" sz="1600" b="1" dirty="0">
+                        <a:rPr lang="en-US" sz="2150" b="1" dirty="0">
                           <a:solidFill>
                             <a:srgbClr val="9A5B00"/>
                           </a:solidFill>
                         </a:rPr>
                         <a:t>ส่งกลับแก้ไข</a:t>
                       </a:r>
-                      <a:endParaRPr lang="en-US" sz="1600" dirty="0"/>
+                      <a:endParaRPr lang="en-US" sz="2150" dirty="0"/>
                     </a:p>
                   </a:txBody>
                   <a:tcPr marL="137160" marR="137160" marT="0" marB="0" anchor="ctr">
@@ -8657,14 +8657,14 @@
                         <a:buNone/>
                       </a:pPr>
                       <a:r>
-                        <a:rPr lang="en-US" sz="1600" dirty="0">
+                        <a:rPr lang="en-US" sz="2150" dirty="0">
                           <a:solidFill>
                             <a:schemeClr val="tx1"/>
                           </a:solidFill>
                         </a:rPr>
                         <a:t>ผู้อนุมัติขอให้แก้หรือเพิ่มข้อมูล</a:t>
                       </a:r>
-                      <a:endParaRPr lang="en-US" sz="1600" dirty="0"/>
+                      <a:endParaRPr lang="en-US" sz="2150" dirty="0"/>
                     </a:p>
                   </a:txBody>
                   <a:tcPr marL="137160" marR="137160" marT="0" marB="0" anchor="ctr">
@@ -8715,14 +8715,14 @@
                         <a:buNone/>
                       </a:pPr>
                       <a:r>
-                        <a:rPr lang="en-US" sz="1600" dirty="0">
+                        <a:rPr lang="en-US" sz="2150" dirty="0">
                           <a:solidFill>
                             <a:schemeClr val="tx1"/>
                           </a:solidFill>
                         </a:rPr>
                         <a:t>อ่านเหตุผล → แก้ไขและยื่นใหม่</a:t>
                       </a:r>
-                      <a:endParaRPr lang="en-US" sz="1600" dirty="0"/>
+                      <a:endParaRPr lang="en-US" sz="2150" dirty="0"/>
                     </a:p>
                   </a:txBody>
                   <a:tcPr marL="137160" marR="137160" marT="0" marB="0" anchor="ctr">
@@ -8775,14 +8775,14 @@
                         <a:buNone/>
                       </a:pPr>
                       <a:r>
-                        <a:rPr lang="en-US" sz="1600" b="1" dirty="0">
+                        <a:rPr lang="en-US" sz="2150" b="1" dirty="0">
                           <a:solidFill>
                             <a:srgbClr val="B42318"/>
                           </a:solidFill>
                         </a:rPr>
                         <a:t>ไม่อนุมัติ</a:t>
                       </a:r>
-                      <a:endParaRPr lang="en-US" sz="1600" dirty="0"/>
+                      <a:endParaRPr lang="en-US" sz="2150" dirty="0"/>
                     </a:p>
                   </a:txBody>
                   <a:tcPr marL="137160" marR="137160" marT="0" marB="0" anchor="ctr">
@@ -8836,14 +8836,14 @@
                         <a:buNone/>
                       </a:pPr>
                       <a:r>
-                        <a:rPr lang="en-US" sz="1600" dirty="0">
+                        <a:rPr lang="en-US" sz="2150" dirty="0">
                           <a:solidFill>
                             <a:schemeClr val="tx1"/>
                           </a:solidFill>
                         </a:rPr>
                         <a:t>ถูกปฏิเสธ จบการพิจารณา</a:t>
                       </a:r>
-                      <a:endParaRPr lang="en-US" sz="1600" dirty="0"/>
+                      <a:endParaRPr lang="en-US" sz="2150" dirty="0"/>
                     </a:p>
                   </a:txBody>
                   <a:tcPr marL="137160" marR="137160" marT="0" marB="0" anchor="ctr">
@@ -8894,14 +8894,14 @@
                         <a:buNone/>
                       </a:pPr>
                       <a:r>
-                        <a:rPr lang="en-US" sz="1600" dirty="0">
+                        <a:rPr lang="en-US" sz="2150" dirty="0">
                           <a:solidFill>
                             <a:schemeClr val="tx1"/>
                           </a:solidFill>
                         </a:rPr>
                         <a:t>อ่านเหตุผล · ยื่นใหม่ถ้าจำเป็น</a:t>
                       </a:r>
-                      <a:endParaRPr lang="en-US" sz="1600" dirty="0"/>
+                      <a:endParaRPr lang="en-US" sz="2150" dirty="0"/>
                     </a:p>
                   </a:txBody>
                   <a:tcPr marL="137160" marR="137160" marT="0" marB="0" anchor="ctr">
@@ -8954,14 +8954,14 @@
                         <a:buNone/>
                       </a:pPr>
                       <a:r>
-                        <a:rPr lang="en-US" sz="1600" b="1" dirty="0">
+                        <a:rPr lang="en-US" sz="2150" b="1" dirty="0">
                           <a:solidFill>
                             <a:srgbClr val="1E7F4F"/>
                           </a:solidFill>
                         </a:rPr>
                         <a:t>อนุมัติแล้ว</a:t>
                       </a:r>
-                      <a:endParaRPr lang="en-US" sz="1600" dirty="0"/>
+                      <a:endParaRPr lang="en-US" sz="2150" dirty="0"/>
                     </a:p>
                   </a:txBody>
                   <a:tcPr marL="137160" marR="137160" marT="0" marB="0" anchor="ctr">
@@ -9015,14 +9015,14 @@
                         <a:buNone/>
                       </a:pPr>
                       <a:r>
-                        <a:rPr lang="en-US" sz="1600" dirty="0">
+                        <a:rPr lang="en-US" sz="2150" dirty="0">
                           <a:solidFill>
                             <a:schemeClr val="tx1"/>
                           </a:solidFill>
                         </a:rPr>
                         <a:t>ผ่านครบทุกลำดับ</a:t>
                       </a:r>
-                      <a:endParaRPr lang="en-US" sz="1600" dirty="0"/>
+                      <a:endParaRPr lang="en-US" sz="2150" dirty="0"/>
                     </a:p>
                   </a:txBody>
                   <a:tcPr marL="137160" marR="137160" marT="0" marB="0" anchor="ctr">
@@ -9073,14 +9073,14 @@
                         <a:buNone/>
                       </a:pPr>
                       <a:r>
-                        <a:rPr lang="en-US" sz="1600" dirty="0">
+                        <a:rPr lang="en-US" sz="2150" dirty="0">
                           <a:solidFill>
                             <a:schemeClr val="tx1"/>
                           </a:solidFill>
                         </a:rPr>
                         <a:t>ดำเนินการตามที่ขอ</a:t>
                       </a:r>
-                      <a:endParaRPr lang="en-US" sz="1600" dirty="0"/>
+                      <a:endParaRPr lang="en-US" sz="2150" dirty="0"/>
                     </a:p>
                   </a:txBody>
                   <a:tcPr marL="137160" marR="137160" marT="0" marB="0" anchor="ctr">
@@ -9133,14 +9133,14 @@
                         <a:buNone/>
                       </a:pPr>
                       <a:r>
-                        <a:rPr lang="en-US" sz="1600" b="1" dirty="0">
+                        <a:rPr lang="en-US" sz="2150" b="1" dirty="0">
                           <a:solidFill>
                             <a:srgbClr val="1E7F4F"/>
                           </a:solidFill>
                         </a:rPr>
                         <a:t>เสร็จสิ้น</a:t>
                       </a:r>
-                      <a:endParaRPr lang="en-US" sz="1600" dirty="0"/>
+                      <a:endParaRPr lang="en-US" sz="2150" dirty="0"/>
                     </a:p>
                   </a:txBody>
                   <a:tcPr marL="137160" marR="137160" marT="0" marB="0" anchor="ctr">
@@ -9194,14 +9194,14 @@
                         <a:buNone/>
                       </a:pPr>
                       <a:r>
-                        <a:rPr lang="en-US" sz="1600" dirty="0">
+                        <a:rPr lang="en-US" sz="2150" dirty="0">
                           <a:solidFill>
                             <a:schemeClr val="tx1"/>
                           </a:solidFill>
                         </a:rPr>
                         <a:t>ปิดงานแล้ว เช่น โอนเงินแล้ว</a:t>
                       </a:r>
-                      <a:endParaRPr lang="en-US" sz="1600" dirty="0"/>
+                      <a:endParaRPr lang="en-US" sz="2150" dirty="0"/>
                     </a:p>
                   </a:txBody>
                   <a:tcPr marL="137160" marR="137160" marT="0" marB="0" anchor="ctr">
@@ -9252,14 +9252,14 @@
                         <a:buNone/>
                       </a:pPr>
                       <a:r>
-                        <a:rPr lang="en-US" sz="1600" dirty="0">
+                        <a:rPr lang="en-US" sz="2150" dirty="0">
                           <a:solidFill>
                             <a:schemeClr val="tx1"/>
                           </a:solidFill>
                         </a:rPr>
                         <a:t>ตรวจสลิป · เก็บ PDF</a:t>
                       </a:r>
-                      <a:endParaRPr lang="en-US" sz="1600" dirty="0"/>
+                      <a:endParaRPr lang="en-US" sz="2150" dirty="0"/>
                     </a:p>
                   </a:txBody>
                   <a:tcPr marL="137160" marR="137160" marT="0" marB="0" anchor="ctr">
@@ -9312,14 +9312,14 @@
                         <a:buNone/>
                       </a:pPr>
                       <a:r>
-                        <a:rPr lang="en-US" sz="1600" b="1" dirty="0">
+                        <a:rPr lang="en-US" sz="2150" b="1" dirty="0">
                           <a:solidFill>
                             <a:srgbClr val="5C6A7A"/>
                           </a:solidFill>
                         </a:rPr>
                         <a:t>ยกเลิก</a:t>
                       </a:r>
-                      <a:endParaRPr lang="en-US" sz="1600" dirty="0"/>
+                      <a:endParaRPr lang="en-US" sz="2150" dirty="0"/>
                     </a:p>
                   </a:txBody>
                   <a:tcPr marL="137160" marR="137160" marT="0" marB="0" anchor="ctr">
@@ -9373,14 +9373,14 @@
                         <a:buNone/>
                       </a:pPr>
                       <a:r>
-                        <a:rPr lang="en-US" sz="1600" dirty="0">
+                        <a:rPr lang="en-US" sz="2150" dirty="0">
                           <a:solidFill>
                             <a:schemeClr val="tx1"/>
                           </a:solidFill>
                         </a:rPr>
                         <a:t>ผู้ยื่นยกเลิกเอง</a:t>
                       </a:r>
-                      <a:endParaRPr lang="en-US" sz="1600" dirty="0"/>
+                      <a:endParaRPr lang="en-US" sz="2150" dirty="0"/>
                     </a:p>
                   </a:txBody>
                   <a:tcPr marL="137160" marR="137160" marT="0" marB="0" anchor="ctr">
@@ -9431,14 +9431,14 @@
                         <a:buNone/>
                       </a:pPr>
                       <a:r>
-                        <a:rPr lang="en-US" sz="1600" dirty="0">
+                        <a:rPr lang="en-US" sz="2150" dirty="0">
                           <a:solidFill>
                             <a:schemeClr val="tx1"/>
                           </a:solidFill>
                         </a:rPr>
                         <a:t>—</a:t>
                       </a:r>
-                      <a:endParaRPr lang="en-US" sz="1600" dirty="0"/>
+                      <a:endParaRPr lang="en-US" sz="2150" dirty="0"/>
                     </a:p>
                   </a:txBody>
                   <a:tcPr marL="137160" marR="137160" marT="0" marB="0" anchor="ctr">
@@ -9513,7 +9513,7 @@
           <a:bodyPr/>
           <a:lstStyle>
             <a:lvl1pPr>
-              <a:defRPr sz="1000">
+              <a:defRPr sz="1350">
                 <a:solidFill>
                   <a:schemeClr val="accent5"/>
                 </a:solidFill>
@@ -9582,14 +9582,14 @@
               <a:buNone/>
             </a:pPr>
             <a:r>
-              <a:rPr lang="en-US" sz="3000" b="1" dirty="0">
+              <a:rPr lang="en-US" sz="4050" b="1" dirty="0">
                 <a:solidFill>
                   <a:schemeClr val="tx2"/>
                 </a:solidFill>
               </a:rPr>
               <a:t>ถูกส่งกลับแก้ไข: แก้แล้วยื่นใหม่ได้เลย</a:t>
             </a:r>
-            <a:endParaRPr lang="en-US" sz="3000" dirty="0"/>
+            <a:endParaRPr lang="en-US" sz="4050" dirty="0"/>
           </a:p>
         </p:txBody>
       </p:sp>
@@ -9699,14 +9699,14 @@
               <a:buNone/>
             </a:pPr>
             <a:r>
-              <a:rPr lang="en-US" sz="1300" b="1" dirty="0">
+              <a:rPr lang="en-US" sz="1750" b="1" dirty="0">
                 <a:solidFill>
                   <a:schemeClr val="bg1"/>
                 </a:solidFill>
               </a:rPr>
               <a:t>1</a:t>
             </a:r>
-            <a:endParaRPr lang="en-US" sz="1300" dirty="0"/>
+            <a:endParaRPr lang="en-US" sz="1750" dirty="0"/>
           </a:p>
         </p:txBody>
       </p:sp>
@@ -9719,7 +9719,7 @@
         <p:spPr>
           <a:xfrm>
             <a:off x="7607808" y="1371600"/>
-            <a:ext cx="4142232" cy="384048"/>
+            <a:ext cx="4142232" cy="435166"/>
           </a:xfrm>
           <a:prstGeom prst="rect">
             <a:avLst/>
@@ -9735,7 +9735,7 @@
               <a:buNone/>
             </a:pPr>
             <a:r>
-              <a:rPr lang="en-US" sz="1500" dirty="0">
+              <a:rPr lang="en-US" sz="2050" dirty="0">
                 <a:solidFill>
                   <a:schemeClr val="tx1"/>
                 </a:solidFill>
@@ -9746,14 +9746,14 @@
               <a:buNone/>
             </a:pPr>
             <a:r>
-              <a:rPr lang="en-US" sz="1500" b="1" dirty="0">
+              <a:rPr lang="en-US" sz="2050" b="1" dirty="0">
                 <a:solidFill>
                   <a:schemeClr val="tx2"/>
                 </a:solidFill>
               </a:rPr>
               <a:t>ส่งกลับแก้ไข</a:t>
             </a:r>
-            <a:endParaRPr lang="en-US" sz="1500" dirty="0"/>
+            <a:endParaRPr lang="en-US" sz="2050" dirty="0"/>
           </a:p>
         </p:txBody>
       </p:sp>
@@ -9765,7 +9765,7 @@
         </p:nvSpPr>
         <p:spPr>
           <a:xfrm>
-            <a:off x="7132320" y="1911096"/>
+            <a:off x="7132320" y="1962214"/>
             <a:ext cx="329184" cy="329184"/>
           </a:xfrm>
           <a:prstGeom prst="ellipse">
@@ -9790,7 +9790,7 @@
         </p:nvSpPr>
         <p:spPr>
           <a:xfrm>
-            <a:off x="7132320" y="1911096"/>
+            <a:off x="7132320" y="1962214"/>
             <a:ext cx="329184" cy="329184"/>
           </a:xfrm>
           <a:prstGeom prst="rect">
@@ -9807,14 +9807,14 @@
               <a:buNone/>
             </a:pPr>
             <a:r>
-              <a:rPr lang="en-US" sz="1300" b="1" dirty="0">
+              <a:rPr lang="en-US" sz="1750" b="1" dirty="0">
                 <a:solidFill>
                   <a:schemeClr val="bg1"/>
                 </a:solidFill>
               </a:rPr>
               <a:t>2</a:t>
             </a:r>
-            <a:endParaRPr lang="en-US" sz="1300" dirty="0"/>
+            <a:endParaRPr lang="en-US" sz="1750" dirty="0"/>
           </a:p>
         </p:txBody>
       </p:sp>
@@ -9826,8 +9826,8 @@
         </p:nvSpPr>
         <p:spPr>
           <a:xfrm>
-            <a:off x="7607808" y="1883664"/>
-            <a:ext cx="4142232" cy="384048"/>
+            <a:off x="7607808" y="1934782"/>
+            <a:ext cx="4142232" cy="435166"/>
           </a:xfrm>
           <a:prstGeom prst="rect">
             <a:avLst/>
@@ -9843,7 +9843,7 @@
               <a:buNone/>
             </a:pPr>
             <a:r>
-              <a:rPr lang="en-US" sz="1500" dirty="0">
+              <a:rPr lang="en-US" sz="2050" dirty="0">
                 <a:solidFill>
                   <a:schemeClr val="tx1"/>
                 </a:solidFill>
@@ -9854,7 +9854,7 @@
               <a:buNone/>
             </a:pPr>
             <a:r>
-              <a:rPr lang="en-US" sz="1500" b="1" dirty="0">
+              <a:rPr lang="en-US" sz="2050" b="1" dirty="0">
                 <a:solidFill>
                   <a:schemeClr val="tx2"/>
                 </a:solidFill>
@@ -9865,14 +9865,14 @@
               <a:buNone/>
             </a:pPr>
             <a:r>
-              <a:rPr lang="en-US" sz="1500" dirty="0">
+              <a:rPr lang="en-US" sz="2050" dirty="0">
                 <a:solidFill>
                   <a:schemeClr val="tx1"/>
                 </a:solidFill>
               </a:rPr>
               <a:t> ในกรอบสีแดง</a:t>
             </a:r>
-            <a:endParaRPr lang="en-US" sz="1500" dirty="0"/>
+            <a:endParaRPr lang="en-US" sz="2050" dirty="0"/>
           </a:p>
         </p:txBody>
       </p:sp>
@@ -9884,7 +9884,7 @@
         </p:nvSpPr>
         <p:spPr>
           <a:xfrm>
-            <a:off x="7132320" y="2423160"/>
+            <a:off x="7132320" y="2525395"/>
             <a:ext cx="329184" cy="329184"/>
           </a:xfrm>
           <a:prstGeom prst="ellipse">
@@ -9909,7 +9909,7 @@
         </p:nvSpPr>
         <p:spPr>
           <a:xfrm>
-            <a:off x="7132320" y="2423160"/>
+            <a:off x="7132320" y="2525395"/>
             <a:ext cx="329184" cy="329184"/>
           </a:xfrm>
           <a:prstGeom prst="rect">
@@ -9926,14 +9926,14 @@
               <a:buNone/>
             </a:pPr>
             <a:r>
-              <a:rPr lang="en-US" sz="1300" b="1" dirty="0">
+              <a:rPr lang="en-US" sz="1750" b="1" dirty="0">
                 <a:solidFill>
                   <a:schemeClr val="bg1"/>
                 </a:solidFill>
               </a:rPr>
               <a:t>3</a:t>
             </a:r>
-            <a:endParaRPr lang="en-US" sz="1300" dirty="0"/>
+            <a:endParaRPr lang="en-US" sz="1750" dirty="0"/>
           </a:p>
         </p:txBody>
       </p:sp>
@@ -9945,8 +9945,8 @@
         </p:nvSpPr>
         <p:spPr>
           <a:xfrm>
-            <a:off x="7607808" y="2395728"/>
-            <a:ext cx="4142232" cy="624078"/>
+            <a:off x="7607808" y="2497963"/>
+            <a:ext cx="4142232" cy="760603"/>
           </a:xfrm>
           <a:prstGeom prst="rect">
             <a:avLst/>
@@ -9962,7 +9962,7 @@
               <a:buNone/>
             </a:pPr>
             <a:r>
-              <a:rPr lang="en-US" sz="1500" dirty="0">
+              <a:rPr lang="en-US" sz="2050" dirty="0">
                 <a:solidFill>
                   <a:schemeClr val="tx1"/>
                 </a:solidFill>
@@ -9973,7 +9973,7 @@
               <a:buNone/>
             </a:pPr>
             <a:r>
-              <a:rPr lang="en-US" sz="1500" b="1" dirty="0">
+              <a:rPr lang="en-US" sz="2050" b="1" dirty="0">
                 <a:solidFill>
                   <a:schemeClr val="tx2"/>
                 </a:solidFill>
@@ -9984,14 +9984,14 @@
               <a:buNone/>
             </a:pPr>
             <a:r>
-              <a:rPr lang="en-US" sz="1500" dirty="0">
+              <a:rPr lang="en-US" sz="2050" dirty="0">
                 <a:solidFill>
                   <a:schemeClr val="tx1"/>
                 </a:solidFill>
               </a:rPr>
               <a:t> · ข้อมูลเดิมถูกใส่ไว้ให้</a:t>
             </a:r>
-            <a:endParaRPr lang="en-US" sz="1500" dirty="0"/>
+            <a:endParaRPr lang="en-US" sz="2050" dirty="0"/>
           </a:p>
         </p:txBody>
       </p:sp>
@@ -10003,7 +10003,7 @@
         </p:nvSpPr>
         <p:spPr>
           <a:xfrm>
-            <a:off x="7132320" y="3175254"/>
+            <a:off x="7132320" y="3414014"/>
             <a:ext cx="329184" cy="329184"/>
           </a:xfrm>
           <a:prstGeom prst="ellipse">
@@ -10028,7 +10028,7 @@
         </p:nvSpPr>
         <p:spPr>
           <a:xfrm>
-            <a:off x="7132320" y="3175254"/>
+            <a:off x="7132320" y="3414014"/>
             <a:ext cx="329184" cy="329184"/>
           </a:xfrm>
           <a:prstGeom prst="rect">
@@ -10045,14 +10045,14 @@
               <a:buNone/>
             </a:pPr>
             <a:r>
-              <a:rPr lang="en-US" sz="1300" b="1" dirty="0">
+              <a:rPr lang="en-US" sz="1750" b="1" dirty="0">
                 <a:solidFill>
                   <a:schemeClr val="bg1"/>
                 </a:solidFill>
               </a:rPr>
               <a:t>4</a:t>
             </a:r>
-            <a:endParaRPr lang="en-US" sz="1300" dirty="0"/>
+            <a:endParaRPr lang="en-US" sz="1750" dirty="0"/>
           </a:p>
         </p:txBody>
       </p:sp>
@@ -10064,8 +10064,8 @@
         </p:nvSpPr>
         <p:spPr>
           <a:xfrm>
-            <a:off x="7607808" y="3147822"/>
-            <a:ext cx="4142232" cy="384048"/>
+            <a:off x="7607808" y="3386582"/>
+            <a:ext cx="4142232" cy="435166"/>
           </a:xfrm>
           <a:prstGeom prst="rect">
             <a:avLst/>
@@ -10081,7 +10081,7 @@
               <a:buNone/>
             </a:pPr>
             <a:r>
-              <a:rPr lang="en-US" sz="1500" dirty="0">
+              <a:rPr lang="en-US" sz="2050" dirty="0">
                 <a:solidFill>
                   <a:schemeClr val="tx1"/>
                 </a:solidFill>
@@ -10092,7 +10092,7 @@
               <a:buNone/>
             </a:pPr>
             <a:r>
-              <a:rPr lang="en-US" sz="1500" b="1" dirty="0">
+              <a:rPr lang="en-US" sz="2050" b="1" dirty="0">
                 <a:solidFill>
                   <a:schemeClr val="tx2"/>
                 </a:solidFill>
@@ -10103,14 +10103,14 @@
               <a:buNone/>
             </a:pPr>
             <a:r>
-              <a:rPr lang="en-US" sz="1500" dirty="0">
+              <a:rPr lang="en-US" sz="2050" dirty="0">
                 <a:solidFill>
                   <a:schemeClr val="tx1"/>
                 </a:solidFill>
               </a:rPr>
               <a:t> (ถาวร)</a:t>
             </a:r>
-            <a:endParaRPr lang="en-US" sz="1500" dirty="0"/>
+            <a:endParaRPr lang="en-US" sz="2050" dirty="0"/>
           </a:p>
         </p:txBody>
       </p:sp>
@@ -10166,7 +10166,7 @@
               <a:buNone/>
             </a:pPr>
             <a:r>
-              <a:rPr lang="en-US" sz="1400" dirty="0">
+              <a:rPr lang="en-US" sz="1900" dirty="0">
                 <a:solidFill>
                   <a:schemeClr val="tx1"/>
                 </a:solidFill>
@@ -10177,14 +10177,14 @@
               <a:buNone/>
             </a:pPr>
             <a:r>
-              <a:rPr lang="en-US" sz="1400" dirty="0">
+              <a:rPr lang="en-US" sz="1900" dirty="0">
                 <a:solidFill>
                   <a:schemeClr val="tx1"/>
                 </a:solidFill>
               </a:rPr>
               <a:t>ยื่นใหม่ใช้เลขที่เดิม และเริ่มอนุมัติจากลำดับแรก</a:t>
             </a:r>
-            <a:endParaRPr lang="en-US" sz="1400" dirty="0"/>
+            <a:endParaRPr lang="en-US" sz="1900" dirty="0"/>
           </a:p>
         </p:txBody>
       </p:sp>
@@ -10216,7 +10216,7 @@
           <a:bodyPr/>
           <a:lstStyle>
             <a:lvl1pPr>
-              <a:defRPr sz="1000">
+              <a:defRPr sz="1350">
                 <a:solidFill>
                   <a:schemeClr val="accent5"/>
                 </a:solidFill>
@@ -10308,14 +10308,14 @@
               <a:buNone/>
             </a:pPr>
             <a:r>
-              <a:rPr lang="en-US" sz="4000" b="1" dirty="0">
+              <a:rPr lang="en-US" sz="5400" b="1" dirty="0">
                 <a:solidFill>
                   <a:schemeClr val="bg1"/>
                 </a:solidFill>
               </a:rPr>
               <a:t>3</a:t>
             </a:r>
-            <a:endParaRPr lang="en-US" sz="4000" dirty="0"/>
+            <a:endParaRPr lang="en-US" sz="5400" dirty="0"/>
           </a:p>
         </p:txBody>
       </p:sp>
@@ -10346,14 +10346,14 @@
               <a:buNone/>
             </a:pPr>
             <a:r>
-              <a:rPr lang="en-US" sz="3800" b="1" dirty="0">
+              <a:rPr lang="en-US" sz="5150" b="1" dirty="0">
                 <a:solidFill>
                   <a:schemeClr val="bg1"/>
                 </a:solidFill>
               </a:rPr>
               <a:t>สำหรับผู้อนุมัติ</a:t>
             </a:r>
-            <a:endParaRPr lang="en-US" sz="3800" dirty="0"/>
+            <a:endParaRPr lang="en-US" sz="5150" dirty="0"/>
           </a:p>
         </p:txBody>
       </p:sp>
@@ -10384,14 +10384,14 @@
               <a:buNone/>
             </a:pPr>
             <a:r>
-              <a:rPr lang="en-US" sz="1800" dirty="0">
+              <a:rPr lang="en-US" sz="2450" dirty="0">
                 <a:solidFill>
                   <a:schemeClr val="bg1"/>
                 </a:solidFill>
               </a:rPr>
               <a:t>อนุมัติในเว็บ · อนุมัติผ่าน Teams · การเงินแนบสลิปและปิดงาน</a:t>
             </a:r>
-            <a:endParaRPr lang="en-US" sz="1800" dirty="0"/>
+            <a:endParaRPr lang="en-US" sz="2450" dirty="0"/>
           </a:p>
         </p:txBody>
       </p:sp>
@@ -10447,14 +10447,14 @@
               <a:buNone/>
             </a:pPr>
             <a:r>
-              <a:rPr lang="en-US" sz="3000" b="1" dirty="0">
+              <a:rPr lang="en-US" sz="4050" b="1" dirty="0">
                 <a:solidFill>
                   <a:schemeClr val="tx2"/>
                 </a:solidFill>
               </a:rPr>
               <a:t>อนุมัติในเว็บ: 3 ปุ่มตัดสินใจ</a:t>
             </a:r>
-            <a:endParaRPr lang="en-US" sz="3000" dirty="0"/>
+            <a:endParaRPr lang="en-US" sz="4050" dirty="0"/>
           </a:p>
         </p:txBody>
       </p:sp>
@@ -10564,14 +10564,14 @@
               <a:buNone/>
             </a:pPr>
             <a:r>
-              <a:rPr lang="en-US" sz="1300" b="1" dirty="0">
+              <a:rPr lang="en-US" sz="1750" b="1" dirty="0">
                 <a:solidFill>
                   <a:schemeClr val="bg1"/>
                 </a:solidFill>
               </a:rPr>
               <a:t>1</a:t>
             </a:r>
-            <a:endParaRPr lang="en-US" sz="1300" dirty="0"/>
+            <a:endParaRPr lang="en-US" sz="1750" dirty="0"/>
           </a:p>
         </p:txBody>
       </p:sp>
@@ -10584,7 +10584,7 @@
         <p:spPr>
           <a:xfrm>
             <a:off x="7607808" y="1371600"/>
-            <a:ext cx="4142232" cy="624078"/>
+            <a:ext cx="4142232" cy="760603"/>
           </a:xfrm>
           <a:prstGeom prst="rect">
             <a:avLst/>
@@ -10600,7 +10600,7 @@
               <a:buNone/>
             </a:pPr>
             <a:r>
-              <a:rPr lang="en-US" sz="1500" dirty="0">
+              <a:rPr lang="en-US" sz="2050" dirty="0">
                 <a:solidFill>
                   <a:schemeClr val="tx1"/>
                 </a:solidFill>
@@ -10611,7 +10611,7 @@
               <a:buNone/>
             </a:pPr>
             <a:r>
-              <a:rPr lang="en-US" sz="1500" b="1" dirty="0">
+              <a:rPr lang="en-US" sz="2050" b="1" dirty="0">
                 <a:solidFill>
                   <a:schemeClr val="tx2"/>
                 </a:solidFill>
@@ -10622,14 +10622,14 @@
               <a:buNone/>
             </a:pPr>
             <a:r>
-              <a:rPr lang="en-US" sz="1500" dirty="0">
+              <a:rPr lang="en-US" sz="2050" dirty="0">
                 <a:solidFill>
                   <a:schemeClr val="tx1"/>
                 </a:solidFill>
               </a:rPr>
               <a:t> (บังคับเมื่อส่งกลับ/ไม่อนุมัติ) · ผู้ยื่นเห็นเป็นกรอบแดง</a:t>
             </a:r>
-            <a:endParaRPr lang="en-US" sz="1500" dirty="0"/>
+            <a:endParaRPr lang="en-US" sz="2050" dirty="0"/>
           </a:p>
         </p:txBody>
       </p:sp>
@@ -10641,7 +10641,7 @@
         </p:nvSpPr>
         <p:spPr>
           <a:xfrm>
-            <a:off x="7132320" y="2151126"/>
+            <a:off x="7132320" y="2287651"/>
             <a:ext cx="329184" cy="329184"/>
           </a:xfrm>
           <a:prstGeom prst="ellipse">
@@ -10666,7 +10666,7 @@
         </p:nvSpPr>
         <p:spPr>
           <a:xfrm>
-            <a:off x="7132320" y="2151126"/>
+            <a:off x="7132320" y="2287651"/>
             <a:ext cx="329184" cy="329184"/>
           </a:xfrm>
           <a:prstGeom prst="rect">
@@ -10683,14 +10683,14 @@
               <a:buNone/>
             </a:pPr>
             <a:r>
-              <a:rPr lang="en-US" sz="1300" b="1" dirty="0">
+              <a:rPr lang="en-US" sz="1750" b="1" dirty="0">
                 <a:solidFill>
                   <a:schemeClr val="bg1"/>
                 </a:solidFill>
               </a:rPr>
               <a:t>2</a:t>
             </a:r>
-            <a:endParaRPr lang="en-US" sz="1300" dirty="0"/>
+            <a:endParaRPr lang="en-US" sz="1750" dirty="0"/>
           </a:p>
         </p:txBody>
       </p:sp>
@@ -10702,8 +10702,8 @@
         </p:nvSpPr>
         <p:spPr>
           <a:xfrm>
-            <a:off x="7607808" y="2123694"/>
-            <a:ext cx="4142232" cy="384048"/>
+            <a:off x="7607808" y="2260219"/>
+            <a:ext cx="4142232" cy="435166"/>
           </a:xfrm>
           <a:prstGeom prst="rect">
             <a:avLst/>
@@ -10719,7 +10719,7 @@
               <a:buNone/>
             </a:pPr>
             <a:r>
-              <a:rPr lang="en-US" sz="1500" b="1" dirty="0">
+              <a:rPr lang="en-US" sz="2050" b="1" dirty="0">
                 <a:solidFill>
                   <a:schemeClr val="tx2"/>
                 </a:solidFill>
@@ -10730,14 +10730,14 @@
               <a:buNone/>
             </a:pPr>
             <a:r>
-              <a:rPr lang="en-US" sz="1500" dirty="0">
+              <a:rPr lang="en-US" sz="2050" dirty="0">
                 <a:solidFill>
                   <a:schemeClr val="tx1"/>
                 </a:solidFill>
               </a:rPr>
               <a:t> ส่งต่อลำดับถัดไป</a:t>
             </a:r>
-            <a:endParaRPr lang="en-US" sz="1500" dirty="0"/>
+            <a:endParaRPr lang="en-US" sz="2050" dirty="0"/>
           </a:p>
         </p:txBody>
       </p:sp>
@@ -10749,7 +10749,7 @@
         </p:nvSpPr>
         <p:spPr>
           <a:xfrm>
-            <a:off x="7132320" y="2663190"/>
+            <a:off x="7132320" y="2850833"/>
             <a:ext cx="329184" cy="329184"/>
           </a:xfrm>
           <a:prstGeom prst="ellipse">
@@ -10774,7 +10774,7 @@
         </p:nvSpPr>
         <p:spPr>
           <a:xfrm>
-            <a:off x="7132320" y="2663190"/>
+            <a:off x="7132320" y="2850833"/>
             <a:ext cx="329184" cy="329184"/>
           </a:xfrm>
           <a:prstGeom prst="rect">
@@ -10791,14 +10791,14 @@
               <a:buNone/>
             </a:pPr>
             <a:r>
-              <a:rPr lang="en-US" sz="1300" b="1" dirty="0">
+              <a:rPr lang="en-US" sz="1750" b="1" dirty="0">
                 <a:solidFill>
                   <a:schemeClr val="bg1"/>
                 </a:solidFill>
               </a:rPr>
               <a:t>3</a:t>
             </a:r>
-            <a:endParaRPr lang="en-US" sz="1300" dirty="0"/>
+            <a:endParaRPr lang="en-US" sz="1750" dirty="0"/>
           </a:p>
         </p:txBody>
       </p:sp>
@@ -10810,8 +10810,8 @@
         </p:nvSpPr>
         <p:spPr>
           <a:xfrm>
-            <a:off x="7607808" y="2635758"/>
-            <a:ext cx="4142232" cy="384048"/>
+            <a:off x="7607808" y="2823401"/>
+            <a:ext cx="4142232" cy="435166"/>
           </a:xfrm>
           <a:prstGeom prst="rect">
             <a:avLst/>
@@ -10827,7 +10827,7 @@
               <a:buNone/>
             </a:pPr>
             <a:r>
-              <a:rPr lang="en-US" sz="1500" b="1" dirty="0">
+              <a:rPr lang="en-US" sz="2050" b="1" dirty="0">
                 <a:solidFill>
                   <a:schemeClr val="tx2"/>
                 </a:solidFill>
@@ -10838,14 +10838,14 @@
               <a:buNone/>
             </a:pPr>
             <a:r>
-              <a:rPr lang="en-US" sz="1500" dirty="0">
+              <a:rPr lang="en-US" sz="2050" dirty="0">
                 <a:solidFill>
                   <a:schemeClr val="tx1"/>
                 </a:solidFill>
               </a:rPr>
               <a:t> คืนให้ผู้ยื่นแก้</a:t>
             </a:r>
-            <a:endParaRPr lang="en-US" sz="1500" dirty="0"/>
+            <a:endParaRPr lang="en-US" sz="2050" dirty="0"/>
           </a:p>
         </p:txBody>
       </p:sp>
@@ -10857,7 +10857,7 @@
         </p:nvSpPr>
         <p:spPr>
           <a:xfrm>
-            <a:off x="7132320" y="3175254"/>
+            <a:off x="7132320" y="3414014"/>
             <a:ext cx="329184" cy="329184"/>
           </a:xfrm>
           <a:prstGeom prst="ellipse">
@@ -10882,7 +10882,7 @@
         </p:nvSpPr>
         <p:spPr>
           <a:xfrm>
-            <a:off x="7132320" y="3175254"/>
+            <a:off x="7132320" y="3414014"/>
             <a:ext cx="329184" cy="329184"/>
           </a:xfrm>
           <a:prstGeom prst="rect">
@@ -10899,14 +10899,14 @@
               <a:buNone/>
             </a:pPr>
             <a:r>
-              <a:rPr lang="en-US" sz="1300" b="1" dirty="0">
+              <a:rPr lang="en-US" sz="1750" b="1" dirty="0">
                 <a:solidFill>
                   <a:schemeClr val="bg1"/>
                 </a:solidFill>
               </a:rPr>
               <a:t>4</a:t>
             </a:r>
-            <a:endParaRPr lang="en-US" sz="1300" dirty="0"/>
+            <a:endParaRPr lang="en-US" sz="1750" dirty="0"/>
           </a:p>
         </p:txBody>
       </p:sp>
@@ -10918,8 +10918,8 @@
         </p:nvSpPr>
         <p:spPr>
           <a:xfrm>
-            <a:off x="7607808" y="3147822"/>
-            <a:ext cx="4142232" cy="384048"/>
+            <a:off x="7607808" y="3386582"/>
+            <a:ext cx="4142232" cy="435166"/>
           </a:xfrm>
           <a:prstGeom prst="rect">
             <a:avLst/>
@@ -10935,7 +10935,7 @@
               <a:buNone/>
             </a:pPr>
             <a:r>
-              <a:rPr lang="en-US" sz="1500" b="1" dirty="0">
+              <a:rPr lang="en-US" sz="2050" b="1" dirty="0">
                 <a:solidFill>
                   <a:schemeClr val="tx2"/>
                 </a:solidFill>
@@ -10946,14 +10946,14 @@
               <a:buNone/>
             </a:pPr>
             <a:r>
-              <a:rPr lang="en-US" sz="1500" dirty="0">
+              <a:rPr lang="en-US" sz="2050" dirty="0">
                 <a:solidFill>
                   <a:schemeClr val="tx1"/>
                 </a:solidFill>
               </a:rPr>
               <a:t> ปฏิเสธและจบคำขอ</a:t>
             </a:r>
-            <a:endParaRPr lang="en-US" sz="1500" dirty="0"/>
+            <a:endParaRPr lang="en-US" sz="2050" dirty="0"/>
           </a:p>
         </p:txBody>
       </p:sp>
@@ -11009,7 +11009,7 @@
               <a:buNone/>
             </a:pPr>
             <a:r>
-              <a:rPr lang="en-US" sz="1400" dirty="0">
+              <a:rPr lang="en-US" sz="1900" dirty="0">
                 <a:solidFill>
                   <a:schemeClr val="tx1"/>
                 </a:solidFill>
@@ -11020,7 +11020,7 @@
               <a:buNone/>
             </a:pPr>
             <a:r>
-              <a:rPr lang="en-US" sz="1400" dirty="0">
+              <a:rPr lang="en-US" sz="1900" dirty="0">
                 <a:solidFill>
                   <a:schemeClr val="tx1"/>
                 </a:solidFill>
@@ -11031,7 +11031,7 @@
               <a:buNone/>
             </a:pPr>
             <a:r>
-              <a:rPr lang="en-US" sz="1400" b="1" dirty="0">
+              <a:rPr lang="en-US" sz="1900" b="1" dirty="0">
                 <a:solidFill>
                   <a:schemeClr val="tx2"/>
                 </a:solidFill>
@@ -11042,14 +11042,14 @@
               <a:buNone/>
             </a:pPr>
             <a:r>
-              <a:rPr lang="en-US" sz="1400" dirty="0">
+              <a:rPr lang="en-US" sz="1900" dirty="0">
                 <a:solidFill>
                   <a:schemeClr val="tx1"/>
                 </a:solidFill>
               </a:rPr>
               <a:t> = คำขอที่ถึงคิวคุณ</a:t>
             </a:r>
-            <a:endParaRPr lang="en-US" sz="1400" dirty="0"/>
+            <a:endParaRPr lang="en-US" sz="1900" dirty="0"/>
           </a:p>
         </p:txBody>
       </p:sp>
@@ -11081,7 +11081,7 @@
           <a:bodyPr/>
           <a:lstStyle>
             <a:lvl1pPr>
-              <a:defRPr sz="1000">
+              <a:defRPr sz="1350">
                 <a:solidFill>
                   <a:schemeClr val="accent5"/>
                 </a:solidFill>
@@ -11150,14 +11150,14 @@
               <a:buNone/>
             </a:pPr>
             <a:r>
-              <a:rPr lang="en-US" sz="3000" b="1" dirty="0">
+              <a:rPr lang="en-US" sz="4050" b="1" dirty="0">
                 <a:solidFill>
                   <a:schemeClr val="tx2"/>
                 </a:solidFill>
               </a:rPr>
               <a:t>วันนี้เราจะเรียนอะไรบ้าง</a:t>
             </a:r>
-            <a:endParaRPr lang="en-US" sz="3000" dirty="0"/>
+            <a:endParaRPr lang="en-US" sz="4050" dirty="0"/>
           </a:p>
         </p:txBody>
       </p:sp>
@@ -11238,14 +11238,14 @@
               <a:buNone/>
             </a:pPr>
             <a:r>
-              <a:rPr lang="en-US" sz="1800" b="1" dirty="0">
+              <a:rPr lang="en-US" sz="2450" b="1" dirty="0">
                 <a:solidFill>
                   <a:schemeClr val="bg1"/>
                 </a:solidFill>
               </a:rPr>
               <a:t>1</a:t>
             </a:r>
-            <a:endParaRPr lang="en-US" sz="1800" dirty="0"/>
+            <a:endParaRPr lang="en-US" sz="2450" dirty="0"/>
           </a:p>
         </p:txBody>
       </p:sp>
@@ -11274,14 +11274,14 @@
               <a:buNone/>
             </a:pPr>
             <a:r>
-              <a:rPr lang="en-US" sz="2000" b="1" dirty="0">
+              <a:rPr lang="en-US" sz="2700" b="1" dirty="0">
                 <a:solidFill>
                   <a:schemeClr val="tx2"/>
                 </a:solidFill>
               </a:rPr>
               <a:t>เริ่มต้นใช้งาน</a:t>
             </a:r>
-            <a:endParaRPr lang="en-US" sz="2000" dirty="0"/>
+            <a:endParaRPr lang="en-US" sz="2700" dirty="0"/>
           </a:p>
         </p:txBody>
       </p:sp>
@@ -11310,14 +11310,14 @@
               <a:buNone/>
             </a:pPr>
             <a:r>
-              <a:rPr lang="en-US" sz="1500" dirty="0">
+              <a:rPr lang="en-US" sz="2050" dirty="0">
                 <a:solidFill>
                   <a:schemeClr val="tx1"/>
                 </a:solidFill>
               </a:rPr>
               <a:t>เข้าสู่ระบบ · PDPA · หน้าแรกและเมนู</a:t>
             </a:r>
-            <a:endParaRPr lang="en-US" sz="1500" dirty="0"/>
+            <a:endParaRPr lang="en-US" sz="2050" dirty="0"/>
           </a:p>
         </p:txBody>
       </p:sp>
@@ -11346,14 +11346,14 @@
               <a:buNone/>
             </a:pPr>
             <a:r>
-              <a:rPr lang="en-US" sz="1500" b="1" dirty="0">
+              <a:rPr lang="en-US" sz="2050" b="1" dirty="0">
                 <a:solidFill>
                   <a:schemeClr val="accent1"/>
                 </a:solidFill>
               </a:rPr>
               <a:t>15 นาที</a:t>
             </a:r>
-            <a:endParaRPr lang="en-US" sz="1500" dirty="0"/>
+            <a:endParaRPr lang="en-US" sz="2050" dirty="0"/>
           </a:p>
         </p:txBody>
       </p:sp>
@@ -11434,14 +11434,14 @@
               <a:buNone/>
             </a:pPr>
             <a:r>
-              <a:rPr lang="en-US" sz="1800" b="1" dirty="0">
+              <a:rPr lang="en-US" sz="2450" b="1" dirty="0">
                 <a:solidFill>
                   <a:schemeClr val="bg1"/>
                 </a:solidFill>
               </a:rPr>
               <a:t>2</a:t>
             </a:r>
-            <a:endParaRPr lang="en-US" sz="1800" dirty="0"/>
+            <a:endParaRPr lang="en-US" sz="2450" dirty="0"/>
           </a:p>
         </p:txBody>
       </p:sp>
@@ -11470,14 +11470,14 @@
               <a:buNone/>
             </a:pPr>
             <a:r>
-              <a:rPr lang="en-US" sz="2000" b="1" dirty="0">
+              <a:rPr lang="en-US" sz="2700" b="1" dirty="0">
                 <a:solidFill>
                   <a:schemeClr val="tx2"/>
                 </a:solidFill>
               </a:rPr>
               <a:t>ยื่นคำขอและติดตาม</a:t>
             </a:r>
-            <a:endParaRPr lang="en-US" sz="2000" dirty="0"/>
+            <a:endParaRPr lang="en-US" sz="2700" dirty="0"/>
           </a:p>
         </p:txBody>
       </p:sp>
@@ -11506,14 +11506,14 @@
               <a:buNone/>
             </a:pPr>
             <a:r>
-              <a:rPr lang="en-US" sz="1500" dirty="0">
+              <a:rPr lang="en-US" sz="2050" dirty="0">
                 <a:solidFill>
                   <a:schemeClr val="tx1"/>
                 </a:solidFill>
               </a:rPr>
               <a:t>กรอกแบบฟอร์ม · ติดตามสถานะ · ส่งกลับแก้ไข · PDF</a:t>
             </a:r>
-            <a:endParaRPr lang="en-US" sz="1500" dirty="0"/>
+            <a:endParaRPr lang="en-US" sz="2050" dirty="0"/>
           </a:p>
         </p:txBody>
       </p:sp>
@@ -11542,14 +11542,14 @@
               <a:buNone/>
             </a:pPr>
             <a:r>
-              <a:rPr lang="en-US" sz="1500" b="1" dirty="0">
+              <a:rPr lang="en-US" sz="2050" b="1" dirty="0">
                 <a:solidFill>
                   <a:schemeClr val="accent1"/>
                 </a:solidFill>
               </a:rPr>
               <a:t>40 นาที</a:t>
             </a:r>
-            <a:endParaRPr lang="en-US" sz="1500" dirty="0"/>
+            <a:endParaRPr lang="en-US" sz="2050" dirty="0"/>
           </a:p>
         </p:txBody>
       </p:sp>
@@ -11630,14 +11630,14 @@
               <a:buNone/>
             </a:pPr>
             <a:r>
-              <a:rPr lang="en-US" sz="1800" b="1" dirty="0">
+              <a:rPr lang="en-US" sz="2450" b="1" dirty="0">
                 <a:solidFill>
                   <a:schemeClr val="bg1"/>
                 </a:solidFill>
               </a:rPr>
               <a:t>3</a:t>
             </a:r>
-            <a:endParaRPr lang="en-US" sz="1800" dirty="0"/>
+            <a:endParaRPr lang="en-US" sz="2450" dirty="0"/>
           </a:p>
         </p:txBody>
       </p:sp>
@@ -11666,14 +11666,14 @@
               <a:buNone/>
             </a:pPr>
             <a:r>
-              <a:rPr lang="en-US" sz="2000" b="1" dirty="0">
+              <a:rPr lang="en-US" sz="2700" b="1" dirty="0">
                 <a:solidFill>
                   <a:schemeClr val="tx2"/>
                 </a:solidFill>
               </a:rPr>
               <a:t>สำหรับผู้อนุมัติ</a:t>
             </a:r>
-            <a:endParaRPr lang="en-US" sz="2000" dirty="0"/>
+            <a:endParaRPr lang="en-US" sz="2700" dirty="0"/>
           </a:p>
         </p:txBody>
       </p:sp>
@@ -11702,14 +11702,14 @@
               <a:buNone/>
             </a:pPr>
             <a:r>
-              <a:rPr lang="en-US" sz="1500" dirty="0">
+              <a:rPr lang="en-US" sz="2050" dirty="0">
                 <a:solidFill>
                   <a:schemeClr val="tx1"/>
                 </a:solidFill>
               </a:rPr>
               <a:t>อนุมัติในเว็บ · Teams · การเงินแนบสลิป</a:t>
             </a:r>
-            <a:endParaRPr lang="en-US" sz="1500" dirty="0"/>
+            <a:endParaRPr lang="en-US" sz="2050" dirty="0"/>
           </a:p>
         </p:txBody>
       </p:sp>
@@ -11738,14 +11738,14 @@
               <a:buNone/>
             </a:pPr>
             <a:r>
-              <a:rPr lang="en-US" sz="1500" b="1" dirty="0">
+              <a:rPr lang="en-US" sz="2050" b="1" dirty="0">
                 <a:solidFill>
                   <a:schemeClr val="accent1"/>
                 </a:solidFill>
               </a:rPr>
               <a:t>20 นาที</a:t>
             </a:r>
-            <a:endParaRPr lang="en-US" sz="1500" dirty="0"/>
+            <a:endParaRPr lang="en-US" sz="2050" dirty="0"/>
           </a:p>
         </p:txBody>
       </p:sp>
@@ -11826,14 +11826,14 @@
               <a:buNone/>
             </a:pPr>
             <a:r>
-              <a:rPr lang="en-US" sz="1800" b="1" dirty="0">
+              <a:rPr lang="en-US" sz="2450" b="1" dirty="0">
                 <a:solidFill>
                   <a:schemeClr val="bg1"/>
                 </a:solidFill>
               </a:rPr>
               <a:t>4</a:t>
             </a:r>
-            <a:endParaRPr lang="en-US" sz="1800" dirty="0"/>
+            <a:endParaRPr lang="en-US" sz="2450" dirty="0"/>
           </a:p>
         </p:txBody>
       </p:sp>
@@ -11862,14 +11862,14 @@
               <a:buNone/>
             </a:pPr>
             <a:r>
-              <a:rPr lang="en-US" sz="2000" b="1" dirty="0">
+              <a:rPr lang="en-US" sz="2700" b="1" dirty="0">
                 <a:solidFill>
                   <a:schemeClr val="tx2"/>
                 </a:solidFill>
               </a:rPr>
               <a:t>เมนูอื่น ๆ</a:t>
             </a:r>
-            <a:endParaRPr lang="en-US" sz="2000" dirty="0"/>
+            <a:endParaRPr lang="en-US" sz="2700" dirty="0"/>
           </a:p>
         </p:txBody>
       </p:sp>
@@ -11898,14 +11898,14 @@
               <a:buNone/>
             </a:pPr>
             <a:r>
-              <a:rPr lang="en-US" sz="1500" dirty="0">
+              <a:rPr lang="en-US" sz="2050" dirty="0">
                 <a:solidFill>
                   <a:schemeClr val="tx1"/>
                 </a:solidFill>
               </a:rPr>
               <a:t>ห้องประชุม · ประเมินผล · บุคลากร · ติดต่อ · มือถือ</a:t>
             </a:r>
-            <a:endParaRPr lang="en-US" sz="1500" dirty="0"/>
+            <a:endParaRPr lang="en-US" sz="2050" dirty="0"/>
           </a:p>
         </p:txBody>
       </p:sp>
@@ -11934,14 +11934,14 @@
               <a:buNone/>
             </a:pPr>
             <a:r>
-              <a:rPr lang="en-US" sz="1500" b="1" dirty="0">
+              <a:rPr lang="en-US" sz="2050" b="1" dirty="0">
                 <a:solidFill>
                   <a:schemeClr val="accent1"/>
                 </a:solidFill>
               </a:rPr>
               <a:t>25 นาที</a:t>
             </a:r>
-            <a:endParaRPr lang="en-US" sz="1500" dirty="0"/>
+            <a:endParaRPr lang="en-US" sz="2050" dirty="0"/>
           </a:p>
         </p:txBody>
       </p:sp>
@@ -12022,14 +12022,14 @@
               <a:buNone/>
             </a:pPr>
             <a:r>
-              <a:rPr lang="en-US" sz="1800" b="1" dirty="0">
+              <a:rPr lang="en-US" sz="2450" b="1" dirty="0">
                 <a:solidFill>
                   <a:schemeClr val="bg1"/>
                 </a:solidFill>
               </a:rPr>
               <a:t>5</a:t>
             </a:r>
-            <a:endParaRPr lang="en-US" sz="1800" dirty="0"/>
+            <a:endParaRPr lang="en-US" sz="2450" dirty="0"/>
           </a:p>
         </p:txBody>
       </p:sp>
@@ -12058,14 +12058,14 @@
               <a:buNone/>
             </a:pPr>
             <a:r>
-              <a:rPr lang="en-US" sz="2000" b="1" dirty="0">
+              <a:rPr lang="en-US" sz="2700" b="1" dirty="0">
                 <a:solidFill>
                   <a:schemeClr val="tx2"/>
                 </a:solidFill>
               </a:rPr>
               <a:t>ฝึกปฏิบัติและทดสอบ</a:t>
             </a:r>
-            <a:endParaRPr lang="en-US" sz="2000" dirty="0"/>
+            <a:endParaRPr lang="en-US" sz="2700" dirty="0"/>
           </a:p>
         </p:txBody>
       </p:sp>
@@ -12094,14 +12094,14 @@
               <a:buNone/>
             </a:pPr>
             <a:r>
-              <a:rPr lang="en-US" sz="1500" dirty="0">
+              <a:rPr lang="en-US" sz="2050" dirty="0">
                 <a:solidFill>
                   <a:schemeClr val="tx1"/>
                 </a:solidFill>
               </a:rPr>
               <a:t>แบบฝึก 3 ชุด · ปัญหาที่พบบ่อย · แบบทดสอบ</a:t>
             </a:r>
-            <a:endParaRPr lang="en-US" sz="1500" dirty="0"/>
+            <a:endParaRPr lang="en-US" sz="2050" dirty="0"/>
           </a:p>
         </p:txBody>
       </p:sp>
@@ -12130,14 +12130,14 @@
               <a:buNone/>
             </a:pPr>
             <a:r>
-              <a:rPr lang="en-US" sz="1500" b="1" dirty="0">
+              <a:rPr lang="en-US" sz="2050" b="1" dirty="0">
                 <a:solidFill>
                   <a:schemeClr val="accent1"/>
                 </a:solidFill>
               </a:rPr>
               <a:t>20 นาที</a:t>
             </a:r>
-            <a:endParaRPr lang="en-US" sz="1500" dirty="0"/>
+            <a:endParaRPr lang="en-US" sz="2050" dirty="0"/>
           </a:p>
         </p:txBody>
       </p:sp>
@@ -12169,7 +12169,7 @@
           <a:bodyPr/>
           <a:lstStyle>
             <a:lvl1pPr>
-              <a:defRPr sz="1000">
+              <a:defRPr sz="1350">
                 <a:solidFill>
                   <a:schemeClr val="accent5"/>
                 </a:solidFill>
@@ -12238,14 +12238,14 @@
               <a:buNone/>
             </a:pPr>
             <a:r>
-              <a:rPr lang="en-US" sz="3000" b="1" dirty="0">
+              <a:rPr lang="en-US" sz="4050" b="1" dirty="0">
                 <a:solidFill>
                   <a:schemeClr val="tx2"/>
                 </a:solidFill>
               </a:rPr>
               <a:t>อนุมัติผ่าน Microsoft Teams</a:t>
             </a:r>
-            <a:endParaRPr lang="en-US" sz="3000" dirty="0"/>
+            <a:endParaRPr lang="en-US" sz="4050" dirty="0"/>
           </a:p>
         </p:txBody>
       </p:sp>
@@ -12299,14 +12299,14 @@
               <a:buNone/>
             </a:pPr>
             <a:r>
-              <a:rPr lang="en-US" sz="1300" b="1" dirty="0">
+              <a:rPr lang="en-US" sz="1750" b="1" dirty="0">
                 <a:solidFill>
                   <a:schemeClr val="bg1"/>
                 </a:solidFill>
               </a:rPr>
               <a:t>1</a:t>
             </a:r>
-            <a:endParaRPr lang="en-US" sz="1300" dirty="0"/>
+            <a:endParaRPr lang="en-US" sz="1750" dirty="0"/>
           </a:p>
         </p:txBody>
       </p:sp>
@@ -12319,7 +12319,7 @@
         <p:spPr>
           <a:xfrm>
             <a:off x="932688" y="1371600"/>
-            <a:ext cx="6108192" cy="658368"/>
+            <a:ext cx="6108192" cy="792353"/>
           </a:xfrm>
           <a:prstGeom prst="rect">
             <a:avLst/>
@@ -12335,7 +12335,7 @@
               <a:buNone/>
             </a:pPr>
             <a:r>
-              <a:rPr lang="en-US" sz="1600" dirty="0">
+              <a:rPr lang="en-US" sz="2150" dirty="0">
                 <a:solidFill>
                   <a:schemeClr val="tx1"/>
                 </a:solidFill>
@@ -12346,7 +12346,7 @@
               <a:buNone/>
             </a:pPr>
             <a:r>
-              <a:rPr lang="en-US" sz="1600" b="1" dirty="0">
+              <a:rPr lang="en-US" sz="2150" b="1" dirty="0">
                 <a:solidFill>
                   <a:schemeClr val="tx2"/>
                 </a:solidFill>
@@ -12357,7 +12357,7 @@
               <a:buNone/>
             </a:pPr>
             <a:r>
-              <a:rPr lang="en-US" sz="1600" dirty="0">
+              <a:rPr lang="en-US" sz="2150" dirty="0">
                 <a:solidFill>
                   <a:schemeClr val="tx1"/>
                 </a:solidFill>
@@ -12368,7 +12368,7 @@
               <a:buNone/>
             </a:pPr>
             <a:r>
-              <a:rPr lang="en-US" sz="1600" b="1" dirty="0">
+              <a:rPr lang="en-US" sz="2150" b="1" dirty="0">
                 <a:solidFill>
                   <a:schemeClr val="tx2"/>
                 </a:solidFill>
@@ -12379,14 +12379,14 @@
               <a:buNone/>
             </a:pPr>
             <a:r>
-              <a:rPr lang="en-US" sz="1600" dirty="0">
+              <a:rPr lang="en-US" sz="2150" dirty="0">
                 <a:solidFill>
                   <a:schemeClr val="tx1"/>
                 </a:solidFill>
               </a:rPr>
               <a:t> (ไม่เห็นกด “…” แล้วค้นหา)</a:t>
             </a:r>
-            <a:endParaRPr lang="en-US" sz="1600" dirty="0"/>
+            <a:endParaRPr lang="en-US" sz="2150" dirty="0"/>
           </a:p>
         </p:txBody>
       </p:sp>
@@ -12398,7 +12398,7 @@
         </p:nvSpPr>
         <p:spPr>
           <a:xfrm>
-            <a:off x="457200" y="2185416"/>
+            <a:off x="457200" y="2319401"/>
             <a:ext cx="329184" cy="329184"/>
           </a:xfrm>
           <a:prstGeom prst="ellipse">
@@ -12423,7 +12423,7 @@
         </p:nvSpPr>
         <p:spPr>
           <a:xfrm>
-            <a:off x="457200" y="2185416"/>
+            <a:off x="457200" y="2319401"/>
             <a:ext cx="329184" cy="329184"/>
           </a:xfrm>
           <a:prstGeom prst="rect">
@@ -12440,14 +12440,14 @@
               <a:buNone/>
             </a:pPr>
             <a:r>
-              <a:rPr lang="en-US" sz="1300" b="1" dirty="0">
+              <a:rPr lang="en-US" sz="1750" b="1" dirty="0">
                 <a:solidFill>
                   <a:schemeClr val="bg1"/>
                 </a:solidFill>
               </a:rPr>
               <a:t>2</a:t>
             </a:r>
-            <a:endParaRPr lang="en-US" sz="1300" dirty="0"/>
+            <a:endParaRPr lang="en-US" sz="1750" dirty="0"/>
           </a:p>
         </p:txBody>
       </p:sp>
@@ -12459,8 +12459,8 @@
         </p:nvSpPr>
         <p:spPr>
           <a:xfrm>
-            <a:off x="932688" y="2157984"/>
-            <a:ext cx="6108192" cy="384048"/>
+            <a:off x="932688" y="2291969"/>
+            <a:ext cx="6108192" cy="451041"/>
           </a:xfrm>
           <a:prstGeom prst="rect">
             <a:avLst/>
@@ -12476,7 +12476,7 @@
               <a:buNone/>
             </a:pPr>
             <a:r>
-              <a:rPr lang="en-US" sz="1600" dirty="0">
+              <a:rPr lang="en-US" sz="2150" dirty="0">
                 <a:solidFill>
                   <a:schemeClr val="tx1"/>
                 </a:solidFill>
@@ -12487,7 +12487,7 @@
               <a:buNone/>
             </a:pPr>
             <a:r>
-              <a:rPr lang="en-US" sz="1600" b="1" dirty="0">
+              <a:rPr lang="en-US" sz="2150" b="1" dirty="0">
                 <a:solidFill>
                   <a:schemeClr val="tx2"/>
                 </a:solidFill>
@@ -12498,14 +12498,14 @@
               <a:buNone/>
             </a:pPr>
             <a:r>
-              <a:rPr lang="en-US" sz="1600" dirty="0">
+              <a:rPr lang="en-US" sz="2150" dirty="0">
                 <a:solidFill>
                   <a:schemeClr val="tx1"/>
                 </a:solidFill>
               </a:rPr>
               <a:t> → การ์ด “ขออนุมัติ FM-xxx จาก …”</a:t>
             </a:r>
-            <a:endParaRPr lang="en-US" sz="1600" dirty="0"/>
+            <a:endParaRPr lang="en-US" sz="2150" dirty="0"/>
           </a:p>
         </p:txBody>
       </p:sp>
@@ -12517,7 +12517,7 @@
         </p:nvSpPr>
         <p:spPr>
           <a:xfrm>
-            <a:off x="457200" y="2697480"/>
+            <a:off x="457200" y="2898457"/>
             <a:ext cx="329184" cy="329184"/>
           </a:xfrm>
           <a:prstGeom prst="ellipse">
@@ -12542,7 +12542,7 @@
         </p:nvSpPr>
         <p:spPr>
           <a:xfrm>
-            <a:off x="457200" y="2697480"/>
+            <a:off x="457200" y="2898457"/>
             <a:ext cx="329184" cy="329184"/>
           </a:xfrm>
           <a:prstGeom prst="rect">
@@ -12559,14 +12559,14 @@
               <a:buNone/>
             </a:pPr>
             <a:r>
-              <a:rPr lang="en-US" sz="1300" b="1" dirty="0">
+              <a:rPr lang="en-US" sz="1750" b="1" dirty="0">
                 <a:solidFill>
                   <a:schemeClr val="bg1"/>
                 </a:solidFill>
               </a:rPr>
               <a:t>3</a:t>
             </a:r>
-            <a:endParaRPr lang="en-US" sz="1300" dirty="0"/>
+            <a:endParaRPr lang="en-US" sz="1750" dirty="0"/>
           </a:p>
         </p:txBody>
       </p:sp>
@@ -12578,8 +12578,8 @@
         </p:nvSpPr>
         <p:spPr>
           <a:xfrm>
-            <a:off x="932688" y="2670048"/>
-            <a:ext cx="6108192" cy="658368"/>
+            <a:off x="932688" y="2871026"/>
+            <a:ext cx="6108192" cy="792353"/>
           </a:xfrm>
           <a:prstGeom prst="rect">
             <a:avLst/>
@@ -12595,7 +12595,7 @@
               <a:buNone/>
             </a:pPr>
             <a:r>
-              <a:rPr lang="en-US" sz="1600" dirty="0">
+              <a:rPr lang="en-US" sz="2150" dirty="0">
                 <a:solidFill>
                   <a:schemeClr val="tx1"/>
                 </a:solidFill>
@@ -12606,7 +12606,7 @@
               <a:buNone/>
             </a:pPr>
             <a:r>
-              <a:rPr lang="en-US" sz="1600" b="1" dirty="0">
+              <a:rPr lang="en-US" sz="2150" b="1" dirty="0">
                 <a:solidFill>
                   <a:schemeClr val="tx2"/>
                 </a:solidFill>
@@ -12617,14 +12617,14 @@
               <a:buNone/>
             </a:pPr>
             <a:r>
-              <a:rPr lang="en-US" sz="1600" dirty="0">
+              <a:rPr lang="en-US" sz="2150" dirty="0">
                 <a:solidFill>
                   <a:schemeClr val="tx1"/>
                 </a:solidFill>
               </a:rPr>
               <a:t> ไปเว็บ</a:t>
             </a:r>
-            <a:endParaRPr lang="en-US" sz="1600" dirty="0"/>
+            <a:endParaRPr lang="en-US" sz="2150" dirty="0"/>
           </a:p>
         </p:txBody>
       </p:sp>
@@ -12636,7 +12636,7 @@
         </p:nvSpPr>
         <p:spPr>
           <a:xfrm>
-            <a:off x="457200" y="3483864"/>
+            <a:off x="457200" y="3818827"/>
             <a:ext cx="329184" cy="329184"/>
           </a:xfrm>
           <a:prstGeom prst="ellipse">
@@ -12661,7 +12661,7 @@
         </p:nvSpPr>
         <p:spPr>
           <a:xfrm>
-            <a:off x="457200" y="3483864"/>
+            <a:off x="457200" y="3818827"/>
             <a:ext cx="329184" cy="329184"/>
           </a:xfrm>
           <a:prstGeom prst="rect">
@@ -12678,14 +12678,14 @@
               <a:buNone/>
             </a:pPr>
             <a:r>
-              <a:rPr lang="en-US" sz="1300" b="1" dirty="0">
+              <a:rPr lang="en-US" sz="1750" b="1" dirty="0">
                 <a:solidFill>
                   <a:schemeClr val="bg1"/>
                 </a:solidFill>
               </a:rPr>
               <a:t>4</a:t>
             </a:r>
-            <a:endParaRPr lang="en-US" sz="1300" dirty="0"/>
+            <a:endParaRPr lang="en-US" sz="1750" dirty="0"/>
           </a:p>
         </p:txBody>
       </p:sp>
@@ -12697,8 +12697,8 @@
         </p:nvSpPr>
         <p:spPr>
           <a:xfrm>
-            <a:off x="932688" y="3456432"/>
-            <a:ext cx="6108192" cy="658368"/>
+            <a:off x="932688" y="3791394"/>
+            <a:ext cx="6108192" cy="792353"/>
           </a:xfrm>
           <a:prstGeom prst="rect">
             <a:avLst/>
@@ -12714,7 +12714,7 @@
               <a:buNone/>
             </a:pPr>
             <a:r>
-              <a:rPr lang="en-US" sz="1600" dirty="0">
+              <a:rPr lang="en-US" sz="2150" dirty="0">
                 <a:solidFill>
                   <a:schemeClr val="tx1"/>
                 </a:solidFill>
@@ -12725,7 +12725,7 @@
               <a:buNone/>
             </a:pPr>
             <a:r>
-              <a:rPr lang="en-US" sz="1600" b="1" dirty="0">
+              <a:rPr lang="en-US" sz="2150" b="1" dirty="0">
                 <a:solidFill>
                   <a:schemeClr val="tx2"/>
                 </a:solidFill>
@@ -12736,14 +12736,14 @@
               <a:buNone/>
             </a:pPr>
             <a:r>
-              <a:rPr lang="en-US" sz="1600" dirty="0">
+              <a:rPr lang="en-US" sz="2150" dirty="0">
                 <a:solidFill>
                   <a:schemeClr val="tx1"/>
                 </a:solidFill>
               </a:rPr>
               <a:t> · พิมพ์เหตุผลใน Comments</a:t>
             </a:r>
-            <a:endParaRPr lang="en-US" sz="1600" dirty="0"/>
+            <a:endParaRPr lang="en-US" sz="2150" dirty="0"/>
           </a:p>
         </p:txBody>
       </p:sp>
@@ -12755,7 +12755,7 @@
         </p:nvSpPr>
         <p:spPr>
           <a:xfrm>
-            <a:off x="457200" y="4270248"/>
+            <a:off x="457200" y="4739196"/>
             <a:ext cx="329184" cy="329184"/>
           </a:xfrm>
           <a:prstGeom prst="ellipse">
@@ -12780,7 +12780,7 @@
         </p:nvSpPr>
         <p:spPr>
           <a:xfrm>
-            <a:off x="457200" y="4270248"/>
+            <a:off x="457200" y="4739196"/>
             <a:ext cx="329184" cy="329184"/>
           </a:xfrm>
           <a:prstGeom prst="rect">
@@ -12797,14 +12797,14 @@
               <a:buNone/>
             </a:pPr>
             <a:r>
-              <a:rPr lang="en-US" sz="1300" b="1" dirty="0">
+              <a:rPr lang="en-US" sz="1750" b="1" dirty="0">
                 <a:solidFill>
                   <a:schemeClr val="bg1"/>
                 </a:solidFill>
               </a:rPr>
               <a:t>5</a:t>
             </a:r>
-            <a:endParaRPr lang="en-US" sz="1300" dirty="0"/>
+            <a:endParaRPr lang="en-US" sz="1750" dirty="0"/>
           </a:p>
         </p:txBody>
       </p:sp>
@@ -12816,8 +12816,8 @@
         </p:nvSpPr>
         <p:spPr>
           <a:xfrm>
-            <a:off x="932688" y="4242816"/>
-            <a:ext cx="6108192" cy="384048"/>
+            <a:off x="932688" y="4711764"/>
+            <a:ext cx="6108192" cy="451041"/>
           </a:xfrm>
           <a:prstGeom prst="rect">
             <a:avLst/>
@@ -12833,7 +12833,7 @@
               <a:buNone/>
             </a:pPr>
             <a:r>
-              <a:rPr lang="en-US" sz="1600" dirty="0">
+              <a:rPr lang="en-US" sz="2150" dirty="0">
                 <a:solidFill>
                   <a:schemeClr val="tx1"/>
                 </a:solidFill>
@@ -12844,7 +12844,7 @@
               <a:buNone/>
             </a:pPr>
             <a:r>
-              <a:rPr lang="en-US" sz="1600" b="1" dirty="0">
+              <a:rPr lang="en-US" sz="2150" b="1" dirty="0">
                 <a:solidFill>
                   <a:schemeClr val="tx2"/>
                 </a:solidFill>
@@ -12855,14 +12855,14 @@
               <a:buNone/>
             </a:pPr>
             <a:r>
-              <a:rPr lang="en-US" sz="1600" dirty="0">
+              <a:rPr lang="en-US" sz="2150" dirty="0">
                 <a:solidFill>
                   <a:schemeClr val="tx1"/>
                 </a:solidFill>
               </a:rPr>
               <a:t> · สถานะในเว็บเปลี่ยนภายในไม่กี่นาที</a:t>
             </a:r>
-            <a:endParaRPr lang="en-US" sz="1600" dirty="0"/>
+            <a:endParaRPr lang="en-US" sz="2150" dirty="0"/>
           </a:p>
         </p:txBody>
       </p:sp>
@@ -12918,7 +12918,7 @@
               <a:buNone/>
             </a:pPr>
             <a:r>
-              <a:rPr lang="en-US" sz="1400" dirty="0">
+              <a:rPr lang="en-US" sz="1900" dirty="0">
                 <a:solidFill>
                   <a:schemeClr val="tx1"/>
                 </a:solidFill>
@@ -12929,7 +12929,7 @@
               <a:buNone/>
             </a:pPr>
             <a:r>
-              <a:rPr lang="en-US" sz="1400" dirty="0">
+              <a:rPr lang="en-US" sz="1900" dirty="0">
                 <a:solidFill>
                   <a:schemeClr val="tx1"/>
                 </a:solidFill>
@@ -12940,14 +12940,14 @@
               <a:buNone/>
             </a:pPr>
             <a:r>
-              <a:rPr lang="en-US" sz="1400" b="1" dirty="0">
+              <a:rPr lang="en-US" sz="1900" b="1" dirty="0">
                 <a:solidFill>
                   <a:schemeClr val="tx2"/>
                 </a:solidFill>
               </a:rPr>
               <a:t>ใบล่าสุด</a:t>
             </a:r>
-            <a:endParaRPr lang="en-US" sz="1400" dirty="0"/>
+            <a:endParaRPr lang="en-US" sz="1900" dirty="0"/>
           </a:p>
         </p:txBody>
       </p:sp>
@@ -13003,7 +13003,7 @@
               <a:buNone/>
             </a:pPr>
             <a:r>
-              <a:rPr lang="en-US" sz="1400" dirty="0">
+              <a:rPr lang="en-US" sz="1900" dirty="0">
                 <a:solidFill>
                   <a:schemeClr val="tx1"/>
                 </a:solidFill>
@@ -13014,7 +13014,7 @@
               <a:buNone/>
             </a:pPr>
             <a:r>
-              <a:rPr lang="en-US" sz="1400" dirty="0">
+              <a:rPr lang="en-US" sz="1900" dirty="0">
                 <a:solidFill>
                   <a:schemeClr val="tx1"/>
                 </a:solidFill>
@@ -13025,7 +13025,7 @@
               <a:buNone/>
             </a:pPr>
             <a:r>
-              <a:rPr lang="en-US" sz="1400" b="1" dirty="0">
+              <a:rPr lang="en-US" sz="1900" b="1" dirty="0">
                 <a:solidFill>
                   <a:schemeClr val="tx2"/>
                 </a:solidFill>
@@ -13036,14 +13036,14 @@
               <a:buNone/>
             </a:pPr>
             <a:r>
-              <a:rPr lang="en-US" sz="1400" dirty="0">
+              <a:rPr lang="en-US" sz="1900" dirty="0">
                 <a:solidFill>
                   <a:schemeClr val="tx1"/>
                 </a:solidFill>
               </a:rPr>
               <a:t> ไม่ต้องกดซ้ำ</a:t>
             </a:r>
-            <a:endParaRPr lang="en-US" sz="1400" dirty="0"/>
+            <a:endParaRPr lang="en-US" sz="1900" dirty="0"/>
           </a:p>
         </p:txBody>
       </p:sp>
@@ -13099,7 +13099,7 @@
               <a:buNone/>
             </a:pPr>
             <a:r>
-              <a:rPr lang="en-US" sz="1400" dirty="0">
+              <a:rPr lang="en-US" sz="1900" dirty="0">
                 <a:solidFill>
                   <a:schemeClr val="tx1"/>
                 </a:solidFill>
@@ -13110,14 +13110,14 @@
               <a:buNone/>
             </a:pPr>
             <a:r>
-              <a:rPr lang="en-US" sz="1400" dirty="0">
+              <a:rPr lang="en-US" sz="1900" dirty="0">
                 <a:solidFill>
                   <a:schemeClr val="tx1"/>
                 </a:solidFill>
               </a:rPr>
               <a:t>เกิน 10 นาทีเว็บยังไม่เปลี่ยน ให้อนุมัติในเว็บและแจ้งผู้ดูแลระบบ</a:t>
             </a:r>
-            <a:endParaRPr lang="en-US" sz="1400" dirty="0"/>
+            <a:endParaRPr lang="en-US" sz="1900" dirty="0"/>
           </a:p>
         </p:txBody>
       </p:sp>
@@ -13149,7 +13149,7 @@
           <a:bodyPr/>
           <a:lstStyle>
             <a:lvl1pPr>
-              <a:defRPr sz="1000">
+              <a:defRPr sz="1350">
                 <a:solidFill>
                   <a:schemeClr val="accent5"/>
                 </a:solidFill>
@@ -13218,14 +13218,14 @@
               <a:buNone/>
             </a:pPr>
             <a:r>
-              <a:rPr lang="en-US" sz="3000" b="1" dirty="0">
+              <a:rPr lang="en-US" sz="4050" b="1" dirty="0">
                 <a:solidFill>
                   <a:schemeClr val="tx2"/>
                 </a:solidFill>
               </a:rPr>
               <a:t>การเงิน: อนุมัติโอนเงิน + แนบสลิป</a:t>
             </a:r>
-            <a:endParaRPr lang="en-US" sz="3000" dirty="0"/>
+            <a:endParaRPr lang="en-US" sz="4050" dirty="0"/>
           </a:p>
         </p:txBody>
       </p:sp>
@@ -13391,14 +13391,14 @@
               <a:buNone/>
             </a:pPr>
             <a:r>
-              <a:rPr lang="en-US" sz="1300" b="1" dirty="0">
+              <a:rPr lang="en-US" sz="1750" b="1" dirty="0">
                 <a:solidFill>
                   <a:schemeClr val="bg1"/>
                 </a:solidFill>
               </a:rPr>
               <a:t>1</a:t>
             </a:r>
-            <a:endParaRPr lang="en-US" sz="1300" dirty="0"/>
+            <a:endParaRPr lang="en-US" sz="1750" dirty="0"/>
           </a:p>
         </p:txBody>
       </p:sp>
@@ -13411,7 +13411,7 @@
         <p:spPr>
           <a:xfrm>
             <a:off x="8842248" y="1371600"/>
-            <a:ext cx="2907792" cy="384048"/>
+            <a:ext cx="2907792" cy="712978"/>
           </a:xfrm>
           <a:prstGeom prst="rect">
             <a:avLst/>
@@ -13427,7 +13427,7 @@
               <a:buNone/>
             </a:pPr>
             <a:r>
-              <a:rPr lang="en-US" sz="1400" dirty="0">
+              <a:rPr lang="en-US" sz="1900" dirty="0">
                 <a:solidFill>
                   <a:schemeClr val="tx1"/>
                 </a:solidFill>
@@ -13438,14 +13438,14 @@
               <a:buNone/>
             </a:pPr>
             <a:r>
-              <a:rPr lang="en-US" sz="1400" b="1" dirty="0">
+              <a:rPr lang="en-US" sz="1900" b="1" dirty="0">
                 <a:solidFill>
                   <a:schemeClr val="tx2"/>
                 </a:solidFill>
               </a:rPr>
               <a:t>✓ อนุมัติ (แนบสลิปโอนเงิน)</a:t>
             </a:r>
-            <a:endParaRPr lang="en-US" sz="1400" dirty="0"/>
+            <a:endParaRPr lang="en-US" sz="1900" dirty="0"/>
           </a:p>
         </p:txBody>
       </p:sp>
@@ -13457,7 +13457,7 @@
         </p:nvSpPr>
         <p:spPr>
           <a:xfrm>
-            <a:off x="8366760" y="1911096"/>
+            <a:off x="8366760" y="2240026"/>
             <a:ext cx="329184" cy="329184"/>
           </a:xfrm>
           <a:prstGeom prst="ellipse">
@@ -13482,7 +13482,7 @@
         </p:nvSpPr>
         <p:spPr>
           <a:xfrm>
-            <a:off x="8366760" y="1911096"/>
+            <a:off x="8366760" y="2240026"/>
             <a:ext cx="329184" cy="329184"/>
           </a:xfrm>
           <a:prstGeom prst="rect">
@@ -13499,14 +13499,14 @@
               <a:buNone/>
             </a:pPr>
             <a:r>
-              <a:rPr lang="en-US" sz="1300" b="1" dirty="0">
+              <a:rPr lang="en-US" sz="1750" b="1" dirty="0">
                 <a:solidFill>
                   <a:schemeClr val="bg1"/>
                 </a:solidFill>
               </a:rPr>
               <a:t>2</a:t>
             </a:r>
-            <a:endParaRPr lang="en-US" sz="1300" dirty="0"/>
+            <a:endParaRPr lang="en-US" sz="1750" dirty="0"/>
           </a:p>
         </p:txBody>
       </p:sp>
@@ -13518,8 +13518,8 @@
         </p:nvSpPr>
         <p:spPr>
           <a:xfrm>
-            <a:off x="8842248" y="1883664"/>
-            <a:ext cx="2907792" cy="589788"/>
+            <a:off x="8842248" y="2212594"/>
+            <a:ext cx="2907792" cy="712978"/>
           </a:xfrm>
           <a:prstGeom prst="rect">
             <a:avLst/>
@@ -13535,7 +13535,7 @@
               <a:buNone/>
             </a:pPr>
             <a:r>
-              <a:rPr lang="en-US" sz="1400" dirty="0">
+              <a:rPr lang="en-US" sz="1900" dirty="0">
                 <a:solidFill>
                   <a:schemeClr val="tx1"/>
                 </a:solidFill>
@@ -13546,14 +13546,14 @@
               <a:buNone/>
             </a:pPr>
             <a:r>
-              <a:rPr lang="en-US" sz="1400" b="1" dirty="0">
+              <a:rPr lang="en-US" sz="1900" b="1" dirty="0">
                 <a:solidFill>
                   <a:schemeClr val="tx2"/>
                 </a:solidFill>
               </a:rPr>
               <a:t>คลิกเลือกไฟล์ · ลากวาง · Ctrl+V</a:t>
             </a:r>
-            <a:endParaRPr lang="en-US" sz="1400" dirty="0"/>
+            <a:endParaRPr lang="en-US" sz="1900" dirty="0"/>
           </a:p>
         </p:txBody>
       </p:sp>
@@ -13565,7 +13565,7 @@
         </p:nvSpPr>
         <p:spPr>
           <a:xfrm>
-            <a:off x="8366760" y="2628900"/>
+            <a:off x="8366760" y="3081020"/>
             <a:ext cx="329184" cy="329184"/>
           </a:xfrm>
           <a:prstGeom prst="ellipse">
@@ -13590,7 +13590,7 @@
         </p:nvSpPr>
         <p:spPr>
           <a:xfrm>
-            <a:off x="8366760" y="2628900"/>
+            <a:off x="8366760" y="3081020"/>
             <a:ext cx="329184" cy="329184"/>
           </a:xfrm>
           <a:prstGeom prst="rect">
@@ -13607,14 +13607,14 @@
               <a:buNone/>
             </a:pPr>
             <a:r>
-              <a:rPr lang="en-US" sz="1300" b="1" dirty="0">
+              <a:rPr lang="en-US" sz="1750" b="1" dirty="0">
                 <a:solidFill>
                   <a:schemeClr val="bg1"/>
                 </a:solidFill>
               </a:rPr>
               <a:t>3</a:t>
             </a:r>
-            <a:endParaRPr lang="en-US" sz="1300" dirty="0"/>
+            <a:endParaRPr lang="en-US" sz="1750" dirty="0"/>
           </a:p>
         </p:txBody>
       </p:sp>
@@ -13626,8 +13626,8 @@
         </p:nvSpPr>
         <p:spPr>
           <a:xfrm>
-            <a:off x="8842248" y="2601468"/>
-            <a:ext cx="2907792" cy="589788"/>
+            <a:off x="8842248" y="3053588"/>
+            <a:ext cx="2907792" cy="712978"/>
           </a:xfrm>
           <a:prstGeom prst="rect">
             <a:avLst/>
@@ -13643,7 +13643,7 @@
               <a:buNone/>
             </a:pPr>
             <a:r>
-              <a:rPr lang="en-US" sz="1400" dirty="0">
+              <a:rPr lang="en-US" sz="1900" dirty="0">
                 <a:solidFill>
                   <a:schemeClr val="tx1"/>
                 </a:solidFill>
@@ -13654,14 +13654,14 @@
               <a:buNone/>
             </a:pPr>
             <a:r>
-              <a:rPr lang="en-US" sz="1400" b="1" dirty="0">
+              <a:rPr lang="en-US" sz="1900" b="1" dirty="0">
                 <a:solidFill>
                   <a:schemeClr val="tx2"/>
                 </a:solidFill>
               </a:rPr>
               <a:t>ยืนยันอนุมัติและปิดงาน</a:t>
             </a:r>
-            <a:endParaRPr lang="en-US" sz="1400" dirty="0"/>
+            <a:endParaRPr lang="en-US" sz="1900" dirty="0"/>
           </a:p>
         </p:txBody>
       </p:sp>
@@ -13673,7 +13673,7 @@
         </p:nvSpPr>
         <p:spPr>
           <a:xfrm>
-            <a:off x="8366760" y="3346704"/>
+            <a:off x="8366760" y="3922014"/>
             <a:ext cx="329184" cy="329184"/>
           </a:xfrm>
           <a:prstGeom prst="ellipse">
@@ -13698,7 +13698,7 @@
         </p:nvSpPr>
         <p:spPr>
           <a:xfrm>
-            <a:off x="8366760" y="3346704"/>
+            <a:off x="8366760" y="3922014"/>
             <a:ext cx="329184" cy="329184"/>
           </a:xfrm>
           <a:prstGeom prst="rect">
@@ -13715,14 +13715,14 @@
               <a:buNone/>
             </a:pPr>
             <a:r>
-              <a:rPr lang="en-US" sz="1300" b="1" dirty="0">
+              <a:rPr lang="en-US" sz="1750" b="1" dirty="0">
                 <a:solidFill>
                   <a:schemeClr val="bg1"/>
                 </a:solidFill>
               </a:rPr>
               <a:t>4</a:t>
             </a:r>
-            <a:endParaRPr lang="en-US" sz="1300" dirty="0"/>
+            <a:endParaRPr lang="en-US" sz="1750" dirty="0"/>
           </a:p>
         </p:txBody>
       </p:sp>
@@ -13734,8 +13734,8 @@
         </p:nvSpPr>
         <p:spPr>
           <a:xfrm>
-            <a:off x="8842248" y="3319272"/>
-            <a:ext cx="2907792" cy="589788"/>
+            <a:off x="8842248" y="3894582"/>
+            <a:ext cx="2907792" cy="712978"/>
           </a:xfrm>
           <a:prstGeom prst="rect">
             <a:avLst/>
@@ -13751,7 +13751,7 @@
               <a:buNone/>
             </a:pPr>
             <a:r>
-              <a:rPr lang="en-US" sz="1400" dirty="0">
+              <a:rPr lang="en-US" sz="1900" dirty="0">
                 <a:solidFill>
                   <a:schemeClr val="tx1"/>
                 </a:solidFill>
@@ -13762,14 +13762,14 @@
               <a:buNone/>
             </a:pPr>
             <a:r>
-              <a:rPr lang="en-US" sz="1400" b="1" dirty="0">
+              <a:rPr lang="en-US" sz="1900" b="1" dirty="0">
                 <a:solidFill>
                   <a:schemeClr val="tx2"/>
                 </a:solidFill>
               </a:rPr>
               <a:t>แจ้งผู้ยื่นทาง Teams พร้อมรูปสลิป</a:t>
             </a:r>
-            <a:endParaRPr lang="en-US" sz="1400" dirty="0"/>
+            <a:endParaRPr lang="en-US" sz="1900" dirty="0"/>
           </a:p>
         </p:txBody>
       </p:sp>
@@ -13825,7 +13825,7 @@
               <a:buNone/>
             </a:pPr>
             <a:r>
-              <a:rPr lang="en-US" sz="1400" dirty="0">
+              <a:rPr lang="en-US" sz="1900" dirty="0">
                 <a:solidFill>
                   <a:schemeClr val="tx1"/>
                 </a:solidFill>
@@ -13836,7 +13836,7 @@
               <a:buNone/>
             </a:pPr>
             <a:r>
-              <a:rPr lang="en-US" sz="1400" dirty="0">
+              <a:rPr lang="en-US" sz="1900" dirty="0">
                 <a:solidFill>
                   <a:schemeClr val="tx1"/>
                 </a:solidFill>
@@ -13847,7 +13847,7 @@
               <a:buNone/>
             </a:pPr>
             <a:r>
-              <a:rPr lang="en-US" sz="1400" b="1" dirty="0">
+              <a:rPr lang="en-US" sz="1900" b="1" dirty="0">
                 <a:solidFill>
                   <a:schemeClr val="tx2"/>
                 </a:solidFill>
@@ -13858,7 +13858,7 @@
               <a:buNone/>
             </a:pPr>
             <a:r>
-              <a:rPr lang="en-US" sz="1400" dirty="0">
+              <a:rPr lang="en-US" sz="1900" dirty="0">
                 <a:solidFill>
                   <a:schemeClr val="tx1"/>
                 </a:solidFill>
@@ -13869,7 +13869,7 @@
               <a:buNone/>
             </a:pPr>
             <a:r>
-              <a:rPr lang="en-US" sz="1400" b="1" dirty="0">
+              <a:rPr lang="en-US" sz="1900" b="1" dirty="0">
                 <a:solidFill>
                   <a:schemeClr val="tx2"/>
                 </a:solidFill>
@@ -13880,14 +13880,14 @@
               <a:buNone/>
             </a:pPr>
             <a:r>
-              <a:rPr lang="en-US" sz="1400" dirty="0">
+              <a:rPr lang="en-US" sz="1900" dirty="0">
                 <a:solidFill>
                   <a:schemeClr val="tx1"/>
                 </a:solidFill>
               </a:rPr>
               <a:t> · กดยกเลิก = ยังไม่อนุมัติ</a:t>
             </a:r>
-            <a:endParaRPr lang="en-US" sz="1400" dirty="0"/>
+            <a:endParaRPr lang="en-US" sz="1900" dirty="0"/>
           </a:p>
         </p:txBody>
       </p:sp>
@@ -13919,7 +13919,7 @@
           <a:bodyPr/>
           <a:lstStyle>
             <a:lvl1pPr>
-              <a:defRPr sz="1000">
+              <a:defRPr sz="1350">
                 <a:solidFill>
                   <a:schemeClr val="accent5"/>
                 </a:solidFill>
@@ -13988,14 +13988,14 @@
               <a:buNone/>
             </a:pPr>
             <a:r>
-              <a:rPr lang="en-US" sz="3000" b="1" dirty="0">
+              <a:rPr lang="en-US" sz="4050" b="1" dirty="0">
                 <a:solidFill>
                   <a:schemeClr val="tx2"/>
                 </a:solidFill>
               </a:rPr>
               <a:t>ผู้ยื่นเห็นผล: ความเห็นกรอบแดงและสลิป</a:t>
             </a:r>
-            <a:endParaRPr lang="en-US" sz="3000" dirty="0"/>
+            <a:endParaRPr lang="en-US" sz="4050" dirty="0"/>
           </a:p>
         </p:txBody>
       </p:sp>
@@ -14105,14 +14105,14 @@
               <a:buNone/>
             </a:pPr>
             <a:r>
-              <a:rPr lang="en-US" sz="1300" b="1" dirty="0">
+              <a:rPr lang="en-US" sz="1750" b="1" dirty="0">
                 <a:solidFill>
                   <a:schemeClr val="bg1"/>
                 </a:solidFill>
               </a:rPr>
               <a:t>1</a:t>
             </a:r>
-            <a:endParaRPr lang="en-US" sz="1300" dirty="0"/>
+            <a:endParaRPr lang="en-US" sz="1750" dirty="0"/>
           </a:p>
         </p:txBody>
       </p:sp>
@@ -14125,7 +14125,7 @@
         <p:spPr>
           <a:xfrm>
             <a:off x="7607808" y="1371600"/>
-            <a:ext cx="4142232" cy="624078"/>
+            <a:ext cx="4142232" cy="760603"/>
           </a:xfrm>
           <a:prstGeom prst="rect">
             <a:avLst/>
@@ -14141,14 +14141,14 @@
               <a:buNone/>
             </a:pPr>
             <a:r>
-              <a:rPr lang="en-US" sz="1500" dirty="0">
+              <a:rPr lang="en-US" sz="2050" dirty="0">
                 <a:solidFill>
                   <a:schemeClr val="tx1"/>
                 </a:solidFill>
               </a:rPr>
               <a:t>ทุกลำดับเป็นจุดเขียว พร้อมชื่อ เวลา และเวลาที่ใช้</a:t>
             </a:r>
-            <a:endParaRPr lang="en-US" sz="1500" dirty="0"/>
+            <a:endParaRPr lang="en-US" sz="2050" dirty="0"/>
           </a:p>
         </p:txBody>
       </p:sp>
@@ -14160,7 +14160,7 @@
         </p:nvSpPr>
         <p:spPr>
           <a:xfrm>
-            <a:off x="7132320" y="2151126"/>
+            <a:off x="7132320" y="2287651"/>
             <a:ext cx="329184" cy="329184"/>
           </a:xfrm>
           <a:prstGeom prst="ellipse">
@@ -14185,7 +14185,7 @@
         </p:nvSpPr>
         <p:spPr>
           <a:xfrm>
-            <a:off x="7132320" y="2151126"/>
+            <a:off x="7132320" y="2287651"/>
             <a:ext cx="329184" cy="329184"/>
           </a:xfrm>
           <a:prstGeom prst="rect">
@@ -14202,14 +14202,14 @@
               <a:buNone/>
             </a:pPr>
             <a:r>
-              <a:rPr lang="en-US" sz="1300" b="1" dirty="0">
+              <a:rPr lang="en-US" sz="1750" b="1" dirty="0">
                 <a:solidFill>
                   <a:schemeClr val="bg1"/>
                 </a:solidFill>
               </a:rPr>
               <a:t>2</a:t>
             </a:r>
-            <a:endParaRPr lang="en-US" sz="1300" dirty="0"/>
+            <a:endParaRPr lang="en-US" sz="1750" dirty="0"/>
           </a:p>
         </p:txBody>
       </p:sp>
@@ -14221,8 +14221,8 @@
         </p:nvSpPr>
         <p:spPr>
           <a:xfrm>
-            <a:off x="7607808" y="2123694"/>
-            <a:ext cx="4142232" cy="624078"/>
+            <a:off x="7607808" y="2260219"/>
+            <a:ext cx="4142232" cy="760603"/>
           </a:xfrm>
           <a:prstGeom prst="rect">
             <a:avLst/>
@@ -14238,7 +14238,7 @@
               <a:buNone/>
             </a:pPr>
             <a:r>
-              <a:rPr lang="en-US" sz="1500" b="1" dirty="0">
+              <a:rPr lang="en-US" sz="2050" b="1" dirty="0">
                 <a:solidFill>
                   <a:schemeClr val="tx2"/>
                 </a:solidFill>
@@ -14249,14 +14249,14 @@
               <a:buNone/>
             </a:pPr>
             <a:r>
-              <a:rPr lang="en-US" sz="1500" dirty="0">
+              <a:rPr lang="en-US" sz="2050" dirty="0">
                 <a:solidFill>
                   <a:schemeClr val="tx1"/>
                 </a:solidFill>
               </a:rPr>
               <a:t> ในกรอบสีแดง อ่านทุกครั้ง</a:t>
             </a:r>
-            <a:endParaRPr lang="en-US" sz="1500" dirty="0"/>
+            <a:endParaRPr lang="en-US" sz="2050" dirty="0"/>
           </a:p>
         </p:txBody>
       </p:sp>
@@ -14312,7 +14312,7 @@
               <a:buNone/>
             </a:pPr>
             <a:r>
-              <a:rPr lang="en-US" sz="1400" dirty="0">
+              <a:rPr lang="en-US" sz="1900" dirty="0">
                 <a:solidFill>
                   <a:schemeClr val="tx1"/>
                 </a:solidFill>
@@ -14323,7 +14323,7 @@
               <a:buNone/>
             </a:pPr>
             <a:r>
-              <a:rPr lang="en-US" sz="1400" dirty="0">
+              <a:rPr lang="en-US" sz="1900" dirty="0">
                 <a:solidFill>
                   <a:schemeClr val="tx1"/>
                 </a:solidFill>
@@ -14334,7 +14334,7 @@
               <a:buNone/>
             </a:pPr>
             <a:r>
-              <a:rPr lang="en-US" sz="1400" b="1" dirty="0">
+              <a:rPr lang="en-US" sz="1900" b="1" dirty="0">
                 <a:solidFill>
                   <a:schemeClr val="tx2"/>
                 </a:solidFill>
@@ -14345,14 +14345,14 @@
               <a:buNone/>
             </a:pPr>
             <a:r>
-              <a:rPr lang="en-US" sz="1400" dirty="0">
+              <a:rPr lang="en-US" sz="1900" dirty="0">
                 <a:solidFill>
                   <a:schemeClr val="tx1"/>
                 </a:solidFill>
               </a:rPr>
               <a:t> บอกว่าคำขอมีความเคลื่อนไหว เปิดดูแล้วป้ายจะหายไป</a:t>
             </a:r>
-            <a:endParaRPr lang="en-US" sz="1400" dirty="0"/>
+            <a:endParaRPr lang="en-US" sz="1900" dirty="0"/>
           </a:p>
         </p:txBody>
       </p:sp>
@@ -14408,7 +14408,7 @@
               <a:buNone/>
             </a:pPr>
             <a:r>
-              <a:rPr lang="en-US" sz="1400" dirty="0">
+              <a:rPr lang="en-US" sz="1900" dirty="0">
                 <a:solidFill>
                   <a:schemeClr val="tx1"/>
                 </a:solidFill>
@@ -14419,7 +14419,7 @@
               <a:buNone/>
             </a:pPr>
             <a:r>
-              <a:rPr lang="en-US" sz="1400" dirty="0">
+              <a:rPr lang="en-US" sz="1900" dirty="0">
                 <a:solidFill>
                   <a:schemeClr val="tx1"/>
                 </a:solidFill>
@@ -14430,7 +14430,7 @@
               <a:buNone/>
             </a:pPr>
             <a:r>
-              <a:rPr lang="en-US" sz="1400" b="1" dirty="0">
+              <a:rPr lang="en-US" sz="1900" b="1" dirty="0">
                 <a:solidFill>
                   <a:schemeClr val="tx2"/>
                 </a:solidFill>
@@ -14441,14 +14441,14 @@
               <a:buNone/>
             </a:pPr>
             <a:r>
-              <a:rPr lang="en-US" sz="1400" dirty="0">
+              <a:rPr lang="en-US" sz="1900" dirty="0">
                 <a:solidFill>
                   <a:schemeClr val="tx1"/>
                 </a:solidFill>
               </a:rPr>
               <a:t> กดรูปดูขนาดเต็ม</a:t>
             </a:r>
-            <a:endParaRPr lang="en-US" sz="1400" dirty="0"/>
+            <a:endParaRPr lang="en-US" sz="1900" dirty="0"/>
           </a:p>
         </p:txBody>
       </p:sp>
@@ -14480,7 +14480,7 @@
           <a:bodyPr/>
           <a:lstStyle>
             <a:lvl1pPr>
-              <a:defRPr sz="1000">
+              <a:defRPr sz="1350">
                 <a:solidFill>
                   <a:schemeClr val="accent5"/>
                 </a:solidFill>
@@ -14549,14 +14549,14 @@
               <a:buNone/>
             </a:pPr>
             <a:r>
-              <a:rPr lang="en-US" sz="3000" b="1" dirty="0">
+              <a:rPr lang="en-US" sz="4050" b="1" dirty="0">
                 <a:solidFill>
                   <a:schemeClr val="tx2"/>
                 </a:solidFill>
               </a:rPr>
               <a:t>ส่งออกเอกสาร PDF</a:t>
             </a:r>
-            <a:endParaRPr lang="en-US" sz="3000" dirty="0"/>
+            <a:endParaRPr lang="en-US" sz="4050" dirty="0"/>
           </a:p>
         </p:txBody>
       </p:sp>
@@ -14666,14 +14666,14 @@
               <a:buNone/>
             </a:pPr>
             <a:r>
-              <a:rPr lang="en-US" sz="1300" b="1" dirty="0">
+              <a:rPr lang="en-US" sz="1750" b="1" dirty="0">
                 <a:solidFill>
                   <a:schemeClr val="bg1"/>
                 </a:solidFill>
               </a:rPr>
               <a:t>1</a:t>
             </a:r>
-            <a:endParaRPr lang="en-US" sz="1300" dirty="0"/>
+            <a:endParaRPr lang="en-US" sz="1750" dirty="0"/>
           </a:p>
         </p:txBody>
       </p:sp>
@@ -14686,7 +14686,7 @@
         <p:spPr>
           <a:xfrm>
             <a:off x="7607808" y="1371600"/>
-            <a:ext cx="4142232" cy="624078"/>
+            <a:ext cx="4142232" cy="760603"/>
           </a:xfrm>
           <a:prstGeom prst="rect">
             <a:avLst/>
@@ -14702,7 +14702,7 @@
               <a:buNone/>
             </a:pPr>
             <a:r>
-              <a:rPr lang="en-US" sz="1500" dirty="0">
+              <a:rPr lang="en-US" sz="2050" dirty="0">
                 <a:solidFill>
                   <a:schemeClr val="tx1"/>
                 </a:solidFill>
@@ -14713,14 +14713,14 @@
               <a:buNone/>
             </a:pPr>
             <a:r>
-              <a:rPr lang="en-US" sz="1500" b="1" dirty="0">
+              <a:rPr lang="en-US" sz="2050" b="1" dirty="0">
                 <a:solidFill>
                   <a:schemeClr val="tx2"/>
                 </a:solidFill>
               </a:rPr>
               <a:t>ใส่ลายเซ็นนี้ในเอกสาร</a:t>
             </a:r>
-            <a:endParaRPr lang="en-US" sz="1500" dirty="0"/>
+            <a:endParaRPr lang="en-US" sz="2050" dirty="0"/>
           </a:p>
         </p:txBody>
       </p:sp>
@@ -14732,7 +14732,7 @@
         </p:nvSpPr>
         <p:spPr>
           <a:xfrm>
-            <a:off x="7132320" y="2151126"/>
+            <a:off x="7132320" y="2287651"/>
             <a:ext cx="329184" cy="329184"/>
           </a:xfrm>
           <a:prstGeom prst="ellipse">
@@ -14757,7 +14757,7 @@
         </p:nvSpPr>
         <p:spPr>
           <a:xfrm>
-            <a:off x="7132320" y="2151126"/>
+            <a:off x="7132320" y="2287651"/>
             <a:ext cx="329184" cy="329184"/>
           </a:xfrm>
           <a:prstGeom prst="rect">
@@ -14774,14 +14774,14 @@
               <a:buNone/>
             </a:pPr>
             <a:r>
-              <a:rPr lang="en-US" sz="1300" b="1" dirty="0">
+              <a:rPr lang="en-US" sz="1750" b="1" dirty="0">
                 <a:solidFill>
                   <a:schemeClr val="bg1"/>
                 </a:solidFill>
               </a:rPr>
               <a:t>2</a:t>
             </a:r>
-            <a:endParaRPr lang="en-US" sz="1300" dirty="0"/>
+            <a:endParaRPr lang="en-US" sz="1750" dirty="0"/>
           </a:p>
         </p:txBody>
       </p:sp>
@@ -14793,8 +14793,8 @@
         </p:nvSpPr>
         <p:spPr>
           <a:xfrm>
-            <a:off x="7607808" y="2123694"/>
-            <a:ext cx="4142232" cy="624078"/>
+            <a:off x="7607808" y="2260219"/>
+            <a:ext cx="4142232" cy="760603"/>
           </a:xfrm>
           <a:prstGeom prst="rect">
             <a:avLst/>
@@ -14810,14 +14810,14 @@
               <a:buNone/>
             </a:pPr>
             <a:r>
-              <a:rPr lang="en-US" sz="1500" dirty="0">
+              <a:rPr lang="en-US" sz="2050" dirty="0">
                 <a:solidFill>
                   <a:schemeClr val="tx1"/>
                 </a:solidFill>
               </a:rPr>
               <a:t>ตัวอย่างเอกสารมีหัวกระดาษ ข้อมูล และผลอนุมัติจากระบบ</a:t>
             </a:r>
-            <a:endParaRPr lang="en-US" sz="1500" dirty="0"/>
+            <a:endParaRPr lang="en-US" sz="2050" dirty="0"/>
           </a:p>
         </p:txBody>
       </p:sp>
@@ -14829,7 +14829,7 @@
         </p:nvSpPr>
         <p:spPr>
           <a:xfrm>
-            <a:off x="7132320" y="2903220"/>
+            <a:off x="7132320" y="3176270"/>
             <a:ext cx="329184" cy="329184"/>
           </a:xfrm>
           <a:prstGeom prst="ellipse">
@@ -14854,7 +14854,7 @@
         </p:nvSpPr>
         <p:spPr>
           <a:xfrm>
-            <a:off x="7132320" y="2903220"/>
+            <a:off x="7132320" y="3176270"/>
             <a:ext cx="329184" cy="329184"/>
           </a:xfrm>
           <a:prstGeom prst="rect">
@@ -14871,14 +14871,14 @@
               <a:buNone/>
             </a:pPr>
             <a:r>
-              <a:rPr lang="en-US" sz="1300" b="1" dirty="0">
+              <a:rPr lang="en-US" sz="1750" b="1" dirty="0">
                 <a:solidFill>
                   <a:schemeClr val="bg1"/>
                 </a:solidFill>
               </a:rPr>
               <a:t>3</a:t>
             </a:r>
-            <a:endParaRPr lang="en-US" sz="1300" dirty="0"/>
+            <a:endParaRPr lang="en-US" sz="1750" dirty="0"/>
           </a:p>
         </p:txBody>
       </p:sp>
@@ -14890,8 +14890,8 @@
         </p:nvSpPr>
         <p:spPr>
           <a:xfrm>
-            <a:off x="7607808" y="2875788"/>
-            <a:ext cx="4142232" cy="624078"/>
+            <a:off x="7607808" y="3148838"/>
+            <a:ext cx="4142232" cy="760603"/>
           </a:xfrm>
           <a:prstGeom prst="rect">
             <a:avLst/>
@@ -14907,7 +14907,7 @@
               <a:buNone/>
             </a:pPr>
             <a:r>
-              <a:rPr lang="en-US" sz="1500" b="1" dirty="0">
+              <a:rPr lang="en-US" sz="2050" b="1" dirty="0">
                 <a:solidFill>
                   <a:schemeClr val="tx2"/>
                 </a:solidFill>
@@ -14918,14 +14918,14 @@
               <a:buNone/>
             </a:pPr>
             <a:r>
-              <a:rPr lang="en-US" sz="1500" dirty="0">
+              <a:rPr lang="en-US" sz="2050" dirty="0">
                 <a:solidFill>
                   <a:schemeClr val="tx1"/>
                 </a:solidFill>
               </a:rPr>
               <a:t> → เลือก Save as PDF</a:t>
             </a:r>
-            <a:endParaRPr lang="en-US" sz="1500" dirty="0"/>
+            <a:endParaRPr lang="en-US" sz="2050" dirty="0"/>
           </a:p>
         </p:txBody>
       </p:sp>
@@ -14981,7 +14981,7 @@
               <a:buNone/>
             </a:pPr>
             <a:r>
-              <a:rPr lang="en-US" sz="1400" dirty="0">
+              <a:rPr lang="en-US" sz="1900" dirty="0">
                 <a:solidFill>
                   <a:schemeClr val="tx1"/>
                 </a:solidFill>
@@ -14992,14 +14992,14 @@
               <a:buNone/>
             </a:pPr>
             <a:r>
-              <a:rPr lang="en-US" sz="1400" dirty="0">
+              <a:rPr lang="en-US" sz="1900" dirty="0">
                 <a:solidFill>
                   <a:schemeClr val="tx1"/>
                 </a:solidFill>
               </a:rPr>
               <a:t>ฟอร์ม PR, Memo, เบิกค่าเดินทาง และใบรับรองแทนใบเสร็จ ส่งออกเหมือนต้นฉบับกระดาษ ISO</a:t>
             </a:r>
-            <a:endParaRPr lang="en-US" sz="1400" dirty="0"/>
+            <a:endParaRPr lang="en-US" sz="1900" dirty="0"/>
           </a:p>
         </p:txBody>
       </p:sp>
@@ -15031,7 +15031,7 @@
           <a:bodyPr/>
           <a:lstStyle>
             <a:lvl1pPr>
-              <a:defRPr sz="1000">
+              <a:defRPr sz="1350">
                 <a:solidFill>
                   <a:schemeClr val="accent5"/>
                 </a:solidFill>
@@ -15123,14 +15123,14 @@
               <a:buNone/>
             </a:pPr>
             <a:r>
-              <a:rPr lang="en-US" sz="4000" b="1" dirty="0">
+              <a:rPr lang="en-US" sz="5400" b="1" dirty="0">
                 <a:solidFill>
                   <a:schemeClr val="bg1"/>
                 </a:solidFill>
               </a:rPr>
               <a:t>4</a:t>
             </a:r>
-            <a:endParaRPr lang="en-US" sz="4000" dirty="0"/>
+            <a:endParaRPr lang="en-US" sz="5400" dirty="0"/>
           </a:p>
         </p:txBody>
       </p:sp>
@@ -15161,14 +15161,14 @@
               <a:buNone/>
             </a:pPr>
             <a:r>
-              <a:rPr lang="en-US" sz="3800" b="1" dirty="0">
+              <a:rPr lang="en-US" sz="5150" b="1" dirty="0">
                 <a:solidFill>
                   <a:schemeClr val="bg1"/>
                 </a:solidFill>
               </a:rPr>
               <a:t>เมนูอื่น ๆ ที่ใช้ทุกวัน</a:t>
             </a:r>
-            <a:endParaRPr lang="en-US" sz="3800" dirty="0"/>
+            <a:endParaRPr lang="en-US" sz="5150" dirty="0"/>
           </a:p>
         </p:txBody>
       </p:sp>
@@ -15199,14 +15199,14 @@
               <a:buNone/>
             </a:pPr>
             <a:r>
-              <a:rPr lang="en-US" sz="1800" dirty="0">
+              <a:rPr lang="en-US" sz="2450" dirty="0">
                 <a:solidFill>
                   <a:schemeClr val="bg1"/>
                 </a:solidFill>
               </a:rPr>
               <a:t>ห้องประชุม · ประเมินผล · บุคลากร · ติดต่อ · มือถือ</a:t>
             </a:r>
-            <a:endParaRPr lang="en-US" sz="1800" dirty="0"/>
+            <a:endParaRPr lang="en-US" sz="2450" dirty="0"/>
           </a:p>
         </p:txBody>
       </p:sp>
@@ -15262,14 +15262,14 @@
               <a:buNone/>
             </a:pPr>
             <a:r>
-              <a:rPr lang="en-US" sz="3000" b="1" dirty="0">
+              <a:rPr lang="en-US" sz="4050" b="1" dirty="0">
                 <a:solidFill>
                   <a:schemeClr val="tx2"/>
                 </a:solidFill>
               </a:rPr>
               <a:t>จองห้องประชุม: นัดใน Outlook อัตโนมัติ</a:t>
             </a:r>
-            <a:endParaRPr lang="en-US" sz="3000" dirty="0"/>
+            <a:endParaRPr lang="en-US" sz="4050" dirty="0"/>
           </a:p>
         </p:txBody>
       </p:sp>
@@ -15379,14 +15379,14 @@
               <a:buNone/>
             </a:pPr>
             <a:r>
-              <a:rPr lang="en-US" sz="1300" b="1" dirty="0">
+              <a:rPr lang="en-US" sz="1750" b="1" dirty="0">
                 <a:solidFill>
                   <a:schemeClr val="bg1"/>
                 </a:solidFill>
               </a:rPr>
               <a:t>1</a:t>
             </a:r>
-            <a:endParaRPr lang="en-US" sz="1300" dirty="0"/>
+            <a:endParaRPr lang="en-US" sz="1750" dirty="0"/>
           </a:p>
         </p:txBody>
       </p:sp>
@@ -15399,7 +15399,7 @@
         <p:spPr>
           <a:xfrm>
             <a:off x="8842248" y="1371600"/>
-            <a:ext cx="2907792" cy="384048"/>
+            <a:ext cx="2907792" cy="435166"/>
           </a:xfrm>
           <a:prstGeom prst="rect">
             <a:avLst/>
@@ -15415,14 +15415,14 @@
               <a:buNone/>
             </a:pPr>
             <a:r>
-              <a:rPr lang="en-US" sz="1500" dirty="0">
+              <a:rPr lang="en-US" sz="2050" dirty="0">
                 <a:solidFill>
                   <a:schemeClr val="tx1"/>
                 </a:solidFill>
               </a:rPr>
               <a:t>เลือกห้อง</a:t>
             </a:r>
-            <a:endParaRPr lang="en-US" sz="1500" dirty="0"/>
+            <a:endParaRPr lang="en-US" sz="2050" dirty="0"/>
           </a:p>
         </p:txBody>
       </p:sp>
@@ -15434,7 +15434,7 @@
         </p:nvSpPr>
         <p:spPr>
           <a:xfrm>
-            <a:off x="8366760" y="1856232"/>
+            <a:off x="8366760" y="1907350"/>
             <a:ext cx="329184" cy="329184"/>
           </a:xfrm>
           <a:prstGeom prst="ellipse">
@@ -15459,7 +15459,7 @@
         </p:nvSpPr>
         <p:spPr>
           <a:xfrm>
-            <a:off x="8366760" y="1856232"/>
+            <a:off x="8366760" y="1907350"/>
             <a:ext cx="329184" cy="329184"/>
           </a:xfrm>
           <a:prstGeom prst="rect">
@@ -15476,14 +15476,14 @@
               <a:buNone/>
             </a:pPr>
             <a:r>
-              <a:rPr lang="en-US" sz="1300" b="1" dirty="0">
+              <a:rPr lang="en-US" sz="1750" b="1" dirty="0">
                 <a:solidFill>
                   <a:schemeClr val="bg1"/>
                 </a:solidFill>
               </a:rPr>
               <a:t>2</a:t>
             </a:r>
-            <a:endParaRPr lang="en-US" sz="1300" dirty="0"/>
+            <a:endParaRPr lang="en-US" sz="1750" dirty="0"/>
           </a:p>
         </p:txBody>
       </p:sp>
@@ -15495,8 +15495,8 @@
         </p:nvSpPr>
         <p:spPr>
           <a:xfrm>
-            <a:off x="8842248" y="1828800"/>
-            <a:ext cx="2907792" cy="384048"/>
+            <a:off x="8842248" y="1879918"/>
+            <a:ext cx="2907792" cy="435166"/>
           </a:xfrm>
           <a:prstGeom prst="rect">
             <a:avLst/>
@@ -15512,14 +15512,14 @@
               <a:buNone/>
             </a:pPr>
             <a:r>
-              <a:rPr lang="en-US" sz="1500" dirty="0">
+              <a:rPr lang="en-US" sz="2050" dirty="0">
                 <a:solidFill>
                   <a:schemeClr val="tx1"/>
                 </a:solidFill>
               </a:rPr>
               <a:t>หัวข้อการประชุม</a:t>
             </a:r>
-            <a:endParaRPr lang="en-US" sz="1500" dirty="0"/>
+            <a:endParaRPr lang="en-US" sz="2050" dirty="0"/>
           </a:p>
         </p:txBody>
       </p:sp>
@@ -15531,7 +15531,7 @@
         </p:nvSpPr>
         <p:spPr>
           <a:xfrm>
-            <a:off x="8366760" y="2313432"/>
+            <a:off x="8366760" y="2415667"/>
             <a:ext cx="329184" cy="329184"/>
           </a:xfrm>
           <a:prstGeom prst="ellipse">
@@ -15556,7 +15556,7 @@
         </p:nvSpPr>
         <p:spPr>
           <a:xfrm>
-            <a:off x="8366760" y="2313432"/>
+            <a:off x="8366760" y="2415667"/>
             <a:ext cx="329184" cy="329184"/>
           </a:xfrm>
           <a:prstGeom prst="rect">
@@ -15573,14 +15573,14 @@
               <a:buNone/>
             </a:pPr>
             <a:r>
-              <a:rPr lang="en-US" sz="1300" b="1" dirty="0">
+              <a:rPr lang="en-US" sz="1750" b="1" dirty="0">
                 <a:solidFill>
                   <a:schemeClr val="bg1"/>
                 </a:solidFill>
               </a:rPr>
               <a:t>3</a:t>
             </a:r>
-            <a:endParaRPr lang="en-US" sz="1300" dirty="0"/>
+            <a:endParaRPr lang="en-US" sz="1750" dirty="0"/>
           </a:p>
         </p:txBody>
       </p:sp>
@@ -15592,8 +15592,8 @@
         </p:nvSpPr>
         <p:spPr>
           <a:xfrm>
-            <a:off x="8842248" y="2286000"/>
-            <a:ext cx="2907792" cy="384048"/>
+            <a:off x="8842248" y="2388235"/>
+            <a:ext cx="2907792" cy="435166"/>
           </a:xfrm>
           <a:prstGeom prst="rect">
             <a:avLst/>
@@ -15609,14 +15609,14 @@
               <a:buNone/>
             </a:pPr>
             <a:r>
-              <a:rPr lang="en-US" sz="1500" dirty="0">
+              <a:rPr lang="en-US" sz="2050" dirty="0">
                 <a:solidFill>
                   <a:schemeClr val="tx1"/>
                 </a:solidFill>
               </a:rPr>
               <a:t>วันที่</a:t>
             </a:r>
-            <a:endParaRPr lang="en-US" sz="1500" dirty="0"/>
+            <a:endParaRPr lang="en-US" sz="2050" dirty="0"/>
           </a:p>
         </p:txBody>
       </p:sp>
@@ -15628,7 +15628,7 @@
         </p:nvSpPr>
         <p:spPr>
           <a:xfrm>
-            <a:off x="8366760" y="2770632"/>
+            <a:off x="8366760" y="2923985"/>
             <a:ext cx="329184" cy="329184"/>
           </a:xfrm>
           <a:prstGeom prst="ellipse">
@@ -15653,7 +15653,7 @@
         </p:nvSpPr>
         <p:spPr>
           <a:xfrm>
-            <a:off x="8366760" y="2770632"/>
+            <a:off x="8366760" y="2923985"/>
             <a:ext cx="329184" cy="329184"/>
           </a:xfrm>
           <a:prstGeom prst="rect">
@@ -15670,14 +15670,14 @@
               <a:buNone/>
             </a:pPr>
             <a:r>
-              <a:rPr lang="en-US" sz="1300" b="1" dirty="0">
+              <a:rPr lang="en-US" sz="1750" b="1" dirty="0">
                 <a:solidFill>
                   <a:schemeClr val="bg1"/>
                 </a:solidFill>
               </a:rPr>
               <a:t>4</a:t>
             </a:r>
-            <a:endParaRPr lang="en-US" sz="1300" dirty="0"/>
+            <a:endParaRPr lang="en-US" sz="1750" dirty="0"/>
           </a:p>
         </p:txBody>
       </p:sp>
@@ -15689,8 +15689,8 @@
         </p:nvSpPr>
         <p:spPr>
           <a:xfrm>
-            <a:off x="8842248" y="2743200"/>
-            <a:ext cx="2907792" cy="384048"/>
+            <a:off x="8842248" y="2896553"/>
+            <a:ext cx="2907792" cy="435166"/>
           </a:xfrm>
           <a:prstGeom prst="rect">
             <a:avLst/>
@@ -15706,14 +15706,14 @@
               <a:buNone/>
             </a:pPr>
             <a:r>
-              <a:rPr lang="en-US" sz="1500" dirty="0">
+              <a:rPr lang="en-US" sz="2050" dirty="0">
                 <a:solidFill>
                   <a:schemeClr val="tx1"/>
                 </a:solidFill>
               </a:rPr>
               <a:t>เวลาเริ่ม–สิ้นสุด</a:t>
             </a:r>
-            <a:endParaRPr lang="en-US" sz="1500" dirty="0"/>
+            <a:endParaRPr lang="en-US" sz="2050" dirty="0"/>
           </a:p>
         </p:txBody>
       </p:sp>
@@ -15725,7 +15725,7 @@
         </p:nvSpPr>
         <p:spPr>
           <a:xfrm>
-            <a:off x="8366760" y="3227832"/>
+            <a:off x="8366760" y="3432302"/>
             <a:ext cx="329184" cy="329184"/>
           </a:xfrm>
           <a:prstGeom prst="ellipse">
@@ -15750,7 +15750,7 @@
         </p:nvSpPr>
         <p:spPr>
           <a:xfrm>
-            <a:off x="8366760" y="3227832"/>
+            <a:off x="8366760" y="3432302"/>
             <a:ext cx="329184" cy="329184"/>
           </a:xfrm>
           <a:prstGeom prst="rect">
@@ -15767,14 +15767,14 @@
               <a:buNone/>
             </a:pPr>
             <a:r>
-              <a:rPr lang="en-US" sz="1300" b="1" dirty="0">
+              <a:rPr lang="en-US" sz="1750" b="1" dirty="0">
                 <a:solidFill>
                   <a:schemeClr val="bg1"/>
                 </a:solidFill>
               </a:rPr>
               <a:t>5</a:t>
             </a:r>
-            <a:endParaRPr lang="en-US" sz="1300" dirty="0"/>
+            <a:endParaRPr lang="en-US" sz="1750" dirty="0"/>
           </a:p>
         </p:txBody>
       </p:sp>
@@ -15786,8 +15786,8 @@
         </p:nvSpPr>
         <p:spPr>
           <a:xfrm>
-            <a:off x="8842248" y="3200400"/>
-            <a:ext cx="2907792" cy="384048"/>
+            <a:off x="8842248" y="3404870"/>
+            <a:ext cx="2907792" cy="760603"/>
           </a:xfrm>
           <a:prstGeom prst="rect">
             <a:avLst/>
@@ -15803,14 +15803,14 @@
               <a:buNone/>
             </a:pPr>
             <a:r>
-              <a:rPr lang="en-US" sz="1500" dirty="0">
+              <a:rPr lang="en-US" sz="2050" dirty="0">
                 <a:solidFill>
                   <a:schemeClr val="tx1"/>
                 </a:solidFill>
               </a:rPr>
               <a:t>อีเมลผู้เข้าร่วม คั่นด้วย ,</a:t>
             </a:r>
-            <a:endParaRPr lang="en-US" sz="1500" dirty="0"/>
+            <a:endParaRPr lang="en-US" sz="2050" dirty="0"/>
           </a:p>
         </p:txBody>
       </p:sp>
@@ -15822,7 +15822,7 @@
         </p:nvSpPr>
         <p:spPr>
           <a:xfrm>
-            <a:off x="8366760" y="3685032"/>
+            <a:off x="8366760" y="4266057"/>
             <a:ext cx="329184" cy="329184"/>
           </a:xfrm>
           <a:prstGeom prst="ellipse">
@@ -15847,7 +15847,7 @@
         </p:nvSpPr>
         <p:spPr>
           <a:xfrm>
-            <a:off x="8366760" y="3685032"/>
+            <a:off x="8366760" y="4266057"/>
             <a:ext cx="329184" cy="329184"/>
           </a:xfrm>
           <a:prstGeom prst="rect">
@@ -15864,14 +15864,14 @@
               <a:buNone/>
             </a:pPr>
             <a:r>
-              <a:rPr lang="en-US" sz="1300" b="1" dirty="0">
+              <a:rPr lang="en-US" sz="1750" b="1" dirty="0">
                 <a:solidFill>
                   <a:schemeClr val="bg1"/>
                 </a:solidFill>
               </a:rPr>
               <a:t>6</a:t>
             </a:r>
-            <a:endParaRPr lang="en-US" sz="1300" dirty="0"/>
+            <a:endParaRPr lang="en-US" sz="1750" dirty="0"/>
           </a:p>
         </p:txBody>
       </p:sp>
@@ -15883,8 +15883,8 @@
         </p:nvSpPr>
         <p:spPr>
           <a:xfrm>
-            <a:off x="8842248" y="3657600"/>
-            <a:ext cx="2907792" cy="384048"/>
+            <a:off x="8842248" y="4238625"/>
+            <a:ext cx="2907792" cy="435166"/>
           </a:xfrm>
           <a:prstGeom prst="rect">
             <a:avLst/>
@@ -15900,7 +15900,7 @@
               <a:buNone/>
             </a:pPr>
             <a:r>
-              <a:rPr lang="en-US" sz="1500" dirty="0">
+              <a:rPr lang="en-US" sz="2050" dirty="0">
                 <a:solidFill>
                   <a:schemeClr val="tx1"/>
                 </a:solidFill>
@@ -15911,14 +15911,14 @@
               <a:buNone/>
             </a:pPr>
             <a:r>
-              <a:rPr lang="en-US" sz="1500" b="1" dirty="0">
+              <a:rPr lang="en-US" sz="2050" b="1" dirty="0">
                 <a:solidFill>
                   <a:schemeClr val="tx2"/>
                 </a:solidFill>
               </a:rPr>
               <a:t>จองห้อง</a:t>
             </a:r>
-            <a:endParaRPr lang="en-US" sz="1500" dirty="0"/>
+            <a:endParaRPr lang="en-US" sz="2050" dirty="0"/>
           </a:p>
         </p:txBody>
       </p:sp>
@@ -15974,7 +15974,7 @@
               <a:buNone/>
             </a:pPr>
             <a:r>
-              <a:rPr lang="en-US" sz="1400" dirty="0">
+              <a:rPr lang="en-US" sz="1900" dirty="0">
                 <a:solidFill>
                   <a:schemeClr val="tx1"/>
                 </a:solidFill>
@@ -15985,14 +15985,14 @@
               <a:buNone/>
             </a:pPr>
             <a:r>
-              <a:rPr lang="en-US" sz="1400" dirty="0">
+              <a:rPr lang="en-US" sz="1900" dirty="0">
                 <a:solidFill>
                   <a:schemeClr val="tx1"/>
                 </a:solidFill>
               </a:rPr>
               <a:t>ครั้งแรกอาจขออนุญาตปฏิทิน กดยอมรับ · ยกเลิก/เลื่อนนัดทำใน Outlook</a:t>
             </a:r>
-            <a:endParaRPr lang="en-US" sz="1400" dirty="0"/>
+            <a:endParaRPr lang="en-US" sz="1900" dirty="0"/>
           </a:p>
         </p:txBody>
       </p:sp>
@@ -16024,7 +16024,7 @@
           <a:bodyPr/>
           <a:lstStyle>
             <a:lvl1pPr>
-              <a:defRPr sz="1000">
+              <a:defRPr sz="1350">
                 <a:solidFill>
                   <a:schemeClr val="accent5"/>
                 </a:solidFill>
@@ -16093,14 +16093,14 @@
               <a:buNone/>
             </a:pPr>
             <a:r>
-              <a:rPr lang="en-US" sz="3000" b="1" dirty="0">
+              <a:rPr lang="en-US" sz="4050" b="1" dirty="0">
                 <a:solidFill>
                   <a:schemeClr val="tx2"/>
                 </a:solidFill>
               </a:rPr>
               <a:t>ประเมินผลบุคลากร: หัวหน้าประเมิน</a:t>
             </a:r>
-            <a:endParaRPr lang="en-US" sz="3000" dirty="0"/>
+            <a:endParaRPr lang="en-US" sz="4050" dirty="0"/>
           </a:p>
         </p:txBody>
       </p:sp>
@@ -16268,14 +16268,14 @@
               <a:buNone/>
             </a:pPr>
             <a:r>
-              <a:rPr lang="en-US" sz="1300" b="1" dirty="0">
+              <a:rPr lang="en-US" sz="1750" b="1" dirty="0">
                 <a:solidFill>
                   <a:schemeClr val="bg1"/>
                 </a:solidFill>
               </a:rPr>
               <a:t>1. หัวหน้าประเมินและลงนาม</a:t>
             </a:r>
-            <a:endParaRPr lang="en-US" sz="1300" dirty="0"/>
+            <a:endParaRPr lang="en-US" sz="1750" dirty="0"/>
           </a:p>
         </p:txBody>
       </p:sp>
@@ -16331,14 +16331,14 @@
               <a:buNone/>
             </a:pPr>
             <a:r>
-              <a:rPr lang="en-US" sz="1300" dirty="0">
+              <a:rPr lang="en-US" sz="1750" dirty="0">
                 <a:solidFill>
                   <a:schemeClr val="tx2"/>
                 </a:solidFill>
               </a:rPr>
               <a:t>2. พนักงานรับทราบ</a:t>
             </a:r>
-            <a:endParaRPr lang="en-US" sz="1300" dirty="0"/>
+            <a:endParaRPr lang="en-US" sz="1750" dirty="0"/>
           </a:p>
         </p:txBody>
       </p:sp>
@@ -16394,14 +16394,14 @@
               <a:buNone/>
             </a:pPr>
             <a:r>
-              <a:rPr lang="en-US" sz="1300" dirty="0">
+              <a:rPr lang="en-US" sz="1750" dirty="0">
                 <a:solidFill>
                   <a:schemeClr val="tx2"/>
                 </a:solidFill>
               </a:rPr>
               <a:t>3. ฝ่ายบุคคลตรวจสอบ</a:t>
             </a:r>
-            <a:endParaRPr lang="en-US" sz="1300" dirty="0"/>
+            <a:endParaRPr lang="en-US" sz="1750" dirty="0"/>
           </a:p>
         </p:txBody>
       </p:sp>
@@ -16457,14 +16457,14 @@
               <a:buNone/>
             </a:pPr>
             <a:r>
-              <a:rPr lang="en-US" sz="1300" dirty="0">
+              <a:rPr lang="en-US" sz="1750" dirty="0">
                 <a:solidFill>
                   <a:schemeClr val="tx2"/>
                 </a:solidFill>
               </a:rPr>
               <a:t>4. ส่งผู้บริหาร</a:t>
             </a:r>
-            <a:endParaRPr lang="en-US" sz="1300" dirty="0"/>
+            <a:endParaRPr lang="en-US" sz="1750" dirty="0"/>
           </a:p>
         </p:txBody>
       </p:sp>
@@ -16520,14 +16520,14 @@
               <a:buNone/>
             </a:pPr>
             <a:r>
-              <a:rPr lang="en-US" sz="1300" dirty="0">
+              <a:rPr lang="en-US" sz="1750" dirty="0">
                 <a:solidFill>
                   <a:schemeClr val="tx2"/>
                 </a:solidFill>
               </a:rPr>
               <a:t>5. ผู้บริหารรับทราบ</a:t>
             </a:r>
-            <a:endParaRPr lang="en-US" sz="1300" dirty="0"/>
+            <a:endParaRPr lang="en-US" sz="1750" dirty="0"/>
           </a:p>
         </p:txBody>
       </p:sp>
@@ -16559,7 +16559,7 @@
           <a:bodyPr/>
           <a:lstStyle>
             <a:lvl1pPr>
-              <a:defRPr sz="1000">
+              <a:defRPr sz="1350">
                 <a:solidFill>
                   <a:schemeClr val="accent5"/>
                 </a:solidFill>
@@ -16628,14 +16628,14 @@
               <a:buNone/>
             </a:pPr>
             <a:r>
-              <a:rPr lang="en-US" sz="3000" b="1" dirty="0">
+              <a:rPr lang="en-US" sz="4050" b="1" dirty="0">
                 <a:solidFill>
                   <a:schemeClr val="tx2"/>
                 </a:solidFill>
               </a:rPr>
-              <a:t>ประเมินผลบุคลากร: พนักงานรับทราบและลงนาม</a:t>
-            </a:r>
-            <a:endParaRPr lang="en-US" sz="3000" dirty="0"/>
+              <a:t>ประเมินผล: พนักงานรับทราบและลงนาม</a:t>
+            </a:r>
+            <a:endParaRPr lang="en-US" sz="4050" dirty="0"/>
           </a:p>
         </p:txBody>
       </p:sp>
@@ -16745,14 +16745,14 @@
               <a:buNone/>
             </a:pPr>
             <a:r>
-              <a:rPr lang="en-US" sz="1300" b="1" dirty="0">
+              <a:rPr lang="en-US" sz="1750" b="1" dirty="0">
                 <a:solidFill>
                   <a:schemeClr val="bg1"/>
                 </a:solidFill>
               </a:rPr>
               <a:t>1</a:t>
             </a:r>
-            <a:endParaRPr lang="en-US" sz="1300" dirty="0"/>
+            <a:endParaRPr lang="en-US" sz="1750" dirty="0"/>
           </a:p>
         </p:txBody>
       </p:sp>
@@ -16765,7 +16765,7 @@
         <p:spPr>
           <a:xfrm>
             <a:off x="7607808" y="1371600"/>
-            <a:ext cx="4142232" cy="384048"/>
+            <a:ext cx="4142232" cy="760603"/>
           </a:xfrm>
           <a:prstGeom prst="rect">
             <a:avLst/>
@@ -16781,7 +16781,7 @@
               <a:buNone/>
             </a:pPr>
             <a:r>
-              <a:rPr lang="en-US" sz="1500" dirty="0">
+              <a:rPr lang="en-US" sz="2050" dirty="0">
                 <a:solidFill>
                   <a:schemeClr val="tx1"/>
                 </a:solidFill>
@@ -16792,7 +16792,7 @@
               <a:buNone/>
             </a:pPr>
             <a:r>
-              <a:rPr lang="en-US" sz="1500" b="1" dirty="0">
+              <a:rPr lang="en-US" sz="2050" b="1" dirty="0">
                 <a:solidFill>
                   <a:schemeClr val="tx2"/>
                 </a:solidFill>
@@ -16803,14 +16803,14 @@
               <a:buNone/>
             </a:pPr>
             <a:r>
-              <a:rPr lang="en-US" sz="1500" dirty="0">
+              <a:rPr lang="en-US" sz="2050" dirty="0">
                 <a:solidFill>
                   <a:schemeClr val="tx1"/>
                 </a:solidFill>
               </a:rPr>
               <a:t> · เห็นคะแนนและเกรด</a:t>
             </a:r>
-            <a:endParaRPr lang="en-US" sz="1500" dirty="0"/>
+            <a:endParaRPr lang="en-US" sz="2050" dirty="0"/>
           </a:p>
         </p:txBody>
       </p:sp>
@@ -16822,7 +16822,7 @@
         </p:nvSpPr>
         <p:spPr>
           <a:xfrm>
-            <a:off x="7132320" y="1911096"/>
+            <a:off x="7132320" y="2287651"/>
             <a:ext cx="329184" cy="329184"/>
           </a:xfrm>
           <a:prstGeom prst="ellipse">
@@ -16847,7 +16847,7 @@
         </p:nvSpPr>
         <p:spPr>
           <a:xfrm>
-            <a:off x="7132320" y="1911096"/>
+            <a:off x="7132320" y="2287651"/>
             <a:ext cx="329184" cy="329184"/>
           </a:xfrm>
           <a:prstGeom prst="rect">
@@ -16864,14 +16864,14 @@
               <a:buNone/>
             </a:pPr>
             <a:r>
-              <a:rPr lang="en-US" sz="1300" b="1" dirty="0">
+              <a:rPr lang="en-US" sz="1750" b="1" dirty="0">
                 <a:solidFill>
                   <a:schemeClr val="bg1"/>
                 </a:solidFill>
               </a:rPr>
               <a:t>2</a:t>
             </a:r>
-            <a:endParaRPr lang="en-US" sz="1300" dirty="0"/>
+            <a:endParaRPr lang="en-US" sz="1750" dirty="0"/>
           </a:p>
         </p:txBody>
       </p:sp>
@@ -16883,8 +16883,8 @@
         </p:nvSpPr>
         <p:spPr>
           <a:xfrm>
-            <a:off x="7607808" y="1883664"/>
-            <a:ext cx="4142232" cy="384048"/>
+            <a:off x="7607808" y="2260219"/>
+            <a:ext cx="4142232" cy="435166"/>
           </a:xfrm>
           <a:prstGeom prst="rect">
             <a:avLst/>
@@ -16900,7 +16900,7 @@
               <a:buNone/>
             </a:pPr>
             <a:r>
-              <a:rPr lang="en-US" sz="1500" dirty="0">
+              <a:rPr lang="en-US" sz="2050" dirty="0">
                 <a:solidFill>
                   <a:schemeClr val="tx1"/>
                 </a:solidFill>
@@ -16911,14 +16911,14 @@
               <a:buNone/>
             </a:pPr>
             <a:r>
-              <a:rPr lang="en-US" sz="1500" b="1" dirty="0">
+              <a:rPr lang="en-US" sz="2050" b="1" dirty="0">
                 <a:solidFill>
                   <a:schemeClr val="tx2"/>
                 </a:solidFill>
               </a:rPr>
               <a:t>เปิดใบเพื่อลงนามรับทราบ</a:t>
             </a:r>
-            <a:endParaRPr lang="en-US" sz="1500" dirty="0"/>
+            <a:endParaRPr lang="en-US" sz="2050" dirty="0"/>
           </a:p>
         </p:txBody>
       </p:sp>
@@ -16930,7 +16930,7 @@
         </p:nvSpPr>
         <p:spPr>
           <a:xfrm>
-            <a:off x="7132320" y="2423160"/>
+            <a:off x="7132320" y="2850833"/>
             <a:ext cx="329184" cy="329184"/>
           </a:xfrm>
           <a:prstGeom prst="ellipse">
@@ -16955,7 +16955,7 @@
         </p:nvSpPr>
         <p:spPr>
           <a:xfrm>
-            <a:off x="7132320" y="2423160"/>
+            <a:off x="7132320" y="2850833"/>
             <a:ext cx="329184" cy="329184"/>
           </a:xfrm>
           <a:prstGeom prst="rect">
@@ -16972,14 +16972,14 @@
               <a:buNone/>
             </a:pPr>
             <a:r>
-              <a:rPr lang="en-US" sz="1300" b="1" dirty="0">
+              <a:rPr lang="en-US" sz="1750" b="1" dirty="0">
                 <a:solidFill>
                   <a:schemeClr val="bg1"/>
                 </a:solidFill>
               </a:rPr>
               <a:t>3</a:t>
             </a:r>
-            <a:endParaRPr lang="en-US" sz="1300" dirty="0"/>
+            <a:endParaRPr lang="en-US" sz="1750" dirty="0"/>
           </a:p>
         </p:txBody>
       </p:sp>
@@ -16991,8 +16991,8 @@
         </p:nvSpPr>
         <p:spPr>
           <a:xfrm>
-            <a:off x="7607808" y="2395728"/>
-            <a:ext cx="4142232" cy="384048"/>
+            <a:off x="7607808" y="2823401"/>
+            <a:ext cx="4142232" cy="435166"/>
           </a:xfrm>
           <a:prstGeom prst="rect">
             <a:avLst/>
@@ -17008,7 +17008,7 @@
               <a:buNone/>
             </a:pPr>
             <a:r>
-              <a:rPr lang="en-US" sz="1500" dirty="0">
+              <a:rPr lang="en-US" sz="2050" dirty="0">
                 <a:solidFill>
                   <a:schemeClr val="tx1"/>
                 </a:solidFill>
@@ -17019,14 +17019,14 @@
               <a:buNone/>
             </a:pPr>
             <a:r>
-              <a:rPr lang="en-US" sz="1500" b="1" dirty="0">
+              <a:rPr lang="en-US" sz="2050" b="1" dirty="0">
                 <a:solidFill>
                   <a:schemeClr val="tx2"/>
                 </a:solidFill>
               </a:rPr>
               <a:t>เซ็นในกรอบ</a:t>
             </a:r>
-            <a:endParaRPr lang="en-US" sz="1500" dirty="0"/>
+            <a:endParaRPr lang="en-US" sz="2050" dirty="0"/>
           </a:p>
         </p:txBody>
       </p:sp>
@@ -17038,7 +17038,7 @@
         </p:nvSpPr>
         <p:spPr>
           <a:xfrm>
-            <a:off x="7132320" y="2935224"/>
+            <a:off x="7132320" y="3414014"/>
             <a:ext cx="329184" cy="329184"/>
           </a:xfrm>
           <a:prstGeom prst="ellipse">
@@ -17063,7 +17063,7 @@
         </p:nvSpPr>
         <p:spPr>
           <a:xfrm>
-            <a:off x="7132320" y="2935224"/>
+            <a:off x="7132320" y="3414014"/>
             <a:ext cx="329184" cy="329184"/>
           </a:xfrm>
           <a:prstGeom prst="rect">
@@ -17080,14 +17080,14 @@
               <a:buNone/>
             </a:pPr>
             <a:r>
-              <a:rPr lang="en-US" sz="1300" b="1" dirty="0">
+              <a:rPr lang="en-US" sz="1750" b="1" dirty="0">
                 <a:solidFill>
                   <a:schemeClr val="bg1"/>
                 </a:solidFill>
               </a:rPr>
               <a:t>4</a:t>
             </a:r>
-            <a:endParaRPr lang="en-US" sz="1300" dirty="0"/>
+            <a:endParaRPr lang="en-US" sz="1750" dirty="0"/>
           </a:p>
         </p:txBody>
       </p:sp>
@@ -17099,8 +17099,8 @@
         </p:nvSpPr>
         <p:spPr>
           <a:xfrm>
-            <a:off x="7607808" y="2907792"/>
-            <a:ext cx="4142232" cy="384048"/>
+            <a:off x="7607808" y="3386582"/>
+            <a:ext cx="4142232" cy="435166"/>
           </a:xfrm>
           <a:prstGeom prst="rect">
             <a:avLst/>
@@ -17116,7 +17116,7 @@
               <a:buNone/>
             </a:pPr>
             <a:r>
-              <a:rPr lang="en-US" sz="1500" dirty="0">
+              <a:rPr lang="en-US" sz="2050" dirty="0">
                 <a:solidFill>
                   <a:schemeClr val="tx1"/>
                 </a:solidFill>
@@ -17127,14 +17127,14 @@
               <a:buNone/>
             </a:pPr>
             <a:r>
-              <a:rPr lang="en-US" sz="1500" b="1" dirty="0">
+              <a:rPr lang="en-US" sz="2050" b="1" dirty="0">
                 <a:solidFill>
                   <a:schemeClr val="tx2"/>
                 </a:solidFill>
               </a:rPr>
               <a:t>ลงนามรับทราบ</a:t>
             </a:r>
-            <a:endParaRPr lang="en-US" sz="1500" dirty="0"/>
+            <a:endParaRPr lang="en-US" sz="2050" dirty="0"/>
           </a:p>
         </p:txBody>
       </p:sp>
@@ -17190,7 +17190,7 @@
               <a:buNone/>
             </a:pPr>
             <a:r>
-              <a:rPr lang="en-US" sz="1400" dirty="0">
+              <a:rPr lang="en-US" sz="1900" dirty="0">
                 <a:solidFill>
                   <a:schemeClr val="tx1"/>
                 </a:solidFill>
@@ -17201,7 +17201,7 @@
               <a:buNone/>
             </a:pPr>
             <a:r>
-              <a:rPr lang="en-US" sz="1400" dirty="0">
+              <a:rPr lang="en-US" sz="1900" dirty="0">
                 <a:solidFill>
                   <a:schemeClr val="tx1"/>
                 </a:solidFill>
@@ -17212,7 +17212,7 @@
               <a:buNone/>
             </a:pPr>
             <a:r>
-              <a:rPr lang="en-US" sz="1400" b="1" dirty="0">
+              <a:rPr lang="en-US" sz="1900" b="1" dirty="0">
                 <a:solidFill>
                   <a:schemeClr val="tx2"/>
                 </a:solidFill>
@@ -17223,14 +17223,14 @@
               <a:buNone/>
             </a:pPr>
             <a:r>
-              <a:rPr lang="en-US" sz="1400" dirty="0">
+              <a:rPr lang="en-US" sz="1900" dirty="0">
                 <a:solidFill>
                   <a:schemeClr val="tx1"/>
                 </a:solidFill>
               </a:rPr>
               <a:t> เขียนความเห็นได้ · ดาวน์โหลดใบประเมินและดูประวัติได้ทุกเมื่อ</a:t>
             </a:r>
-            <a:endParaRPr lang="en-US" sz="1400" dirty="0"/>
+            <a:endParaRPr lang="en-US" sz="1900" dirty="0"/>
           </a:p>
         </p:txBody>
       </p:sp>
@@ -17262,7 +17262,7 @@
           <a:bodyPr/>
           <a:lstStyle>
             <a:lvl1pPr>
-              <a:defRPr sz="1000">
+              <a:defRPr sz="1350">
                 <a:solidFill>
                   <a:schemeClr val="accent5"/>
                 </a:solidFill>
@@ -17331,14 +17331,14 @@
               <a:buNone/>
             </a:pPr>
             <a:r>
-              <a:rPr lang="en-US" sz="3000" b="1" dirty="0">
+              <a:rPr lang="en-US" sz="4050" b="1" dirty="0">
                 <a:solidFill>
                   <a:schemeClr val="tx2"/>
                 </a:solidFill>
               </a:rPr>
               <a:t>บุคลากรและแผนผังองค์กร</a:t>
             </a:r>
-            <a:endParaRPr lang="en-US" sz="3000" dirty="0"/>
+            <a:endParaRPr lang="en-US" sz="4050" dirty="0"/>
           </a:p>
         </p:txBody>
       </p:sp>
@@ -17479,14 +17479,14 @@
               <a:buNone/>
             </a:pPr>
             <a:r>
-              <a:rPr lang="en-US" sz="1400" dirty="0">
+              <a:rPr lang="en-US" sz="1900" dirty="0">
                 <a:solidFill>
                   <a:schemeClr val="tx1"/>
                 </a:solidFill>
               </a:rPr>
               <a:t>ค้นหาชื่อจริง ชื่อเล่น ตำแหน่ง ฝ่าย · กดการ์ดดูข้อมูลเต็ม · กดอีเมลเพื่อส่งเมล</a:t>
             </a:r>
-            <a:endParaRPr lang="en-US" sz="1400" dirty="0"/>
+            <a:endParaRPr lang="en-US" sz="1900" dirty="0"/>
           </a:p>
         </p:txBody>
       </p:sp>
@@ -17515,14 +17515,14 @@
               <a:buNone/>
             </a:pPr>
             <a:r>
-              <a:rPr lang="en-US" sz="1400" dirty="0">
+              <a:rPr lang="en-US" sz="1900" dirty="0">
                 <a:solidFill>
                   <a:schemeClr val="tx1"/>
                 </a:solidFill>
               </a:rPr>
               <a:t>แท็บแผนผังองค์กร ตามฉบับประกาศ · กดฝ่าย/แผนกเพื่อดูรายชื่อคนในหน่วย</a:t>
             </a:r>
-            <a:endParaRPr lang="en-US" sz="1400" dirty="0"/>
+            <a:endParaRPr lang="en-US" sz="1900" dirty="0"/>
           </a:p>
         </p:txBody>
       </p:sp>
@@ -17554,7 +17554,7 @@
           <a:bodyPr/>
           <a:lstStyle>
             <a:lvl1pPr>
-              <a:defRPr sz="1000">
+              <a:defRPr sz="1350">
                 <a:solidFill>
                   <a:schemeClr val="accent5"/>
                 </a:solidFill>
@@ -17623,14 +17623,14 @@
               <a:buNone/>
             </a:pPr>
             <a:r>
-              <a:rPr lang="en-US" sz="3000" b="1" dirty="0">
+              <a:rPr lang="en-US" sz="4050" b="1" dirty="0">
                 <a:solidFill>
                   <a:schemeClr val="tx2"/>
                 </a:solidFill>
               </a:rPr>
               <a:t>ติดต่อและกล่องรับฟังความคิดเห็น</a:t>
             </a:r>
-            <a:endParaRPr lang="en-US" sz="3000" dirty="0"/>
+            <a:endParaRPr lang="en-US" sz="4050" dirty="0"/>
           </a:p>
         </p:txBody>
       </p:sp>
@@ -17740,14 +17740,14 @@
               <a:buNone/>
             </a:pPr>
             <a:r>
-              <a:rPr lang="en-US" sz="1300" b="1" dirty="0">
+              <a:rPr lang="en-US" sz="1750" b="1" dirty="0">
                 <a:solidFill>
                   <a:schemeClr val="bg1"/>
                 </a:solidFill>
               </a:rPr>
               <a:t>3</a:t>
             </a:r>
-            <a:endParaRPr lang="en-US" sz="1300" dirty="0"/>
+            <a:endParaRPr lang="en-US" sz="1750" dirty="0"/>
           </a:p>
         </p:txBody>
       </p:sp>
@@ -17760,7 +17760,7 @@
         <p:spPr>
           <a:xfrm>
             <a:off x="8842248" y="1371600"/>
-            <a:ext cx="2907792" cy="384048"/>
+            <a:ext cx="2907792" cy="435166"/>
           </a:xfrm>
           <a:prstGeom prst="rect">
             <a:avLst/>
@@ -17776,14 +17776,14 @@
               <a:buNone/>
             </a:pPr>
             <a:r>
-              <a:rPr lang="en-US" sz="1500" dirty="0">
+              <a:rPr lang="en-US" sz="2050" dirty="0">
                 <a:solidFill>
                   <a:schemeClr val="tx1"/>
                 </a:solidFill>
               </a:rPr>
               <a:t>เลือกเรื่องที่เสนอ</a:t>
             </a:r>
-            <a:endParaRPr lang="en-US" sz="1500" dirty="0"/>
+            <a:endParaRPr lang="en-US" sz="2050" dirty="0"/>
           </a:p>
         </p:txBody>
       </p:sp>
@@ -17795,7 +17795,7 @@
         </p:nvSpPr>
         <p:spPr>
           <a:xfrm>
-            <a:off x="8366760" y="1911096"/>
+            <a:off x="8366760" y="1962214"/>
             <a:ext cx="329184" cy="329184"/>
           </a:xfrm>
           <a:prstGeom prst="ellipse">
@@ -17820,7 +17820,7 @@
         </p:nvSpPr>
         <p:spPr>
           <a:xfrm>
-            <a:off x="8366760" y="1911096"/>
+            <a:off x="8366760" y="1962214"/>
             <a:ext cx="329184" cy="329184"/>
           </a:xfrm>
           <a:prstGeom prst="rect">
@@ -17837,14 +17837,14 @@
               <a:buNone/>
             </a:pPr>
             <a:r>
-              <a:rPr lang="en-US" sz="1300" b="1" dirty="0">
+              <a:rPr lang="en-US" sz="1750" b="1" dirty="0">
                 <a:solidFill>
                   <a:schemeClr val="bg1"/>
                 </a:solidFill>
               </a:rPr>
               <a:t>4</a:t>
             </a:r>
-            <a:endParaRPr lang="en-US" sz="1300" dirty="0"/>
+            <a:endParaRPr lang="en-US" sz="1750" dirty="0"/>
           </a:p>
         </p:txBody>
       </p:sp>
@@ -17856,8 +17856,8 @@
         </p:nvSpPr>
         <p:spPr>
           <a:xfrm>
-            <a:off x="8842248" y="1883664"/>
-            <a:ext cx="2907792" cy="384048"/>
+            <a:off x="8842248" y="1934782"/>
+            <a:ext cx="2907792" cy="435166"/>
           </a:xfrm>
           <a:prstGeom prst="rect">
             <a:avLst/>
@@ -17873,14 +17873,14 @@
               <a:buNone/>
             </a:pPr>
             <a:r>
-              <a:rPr lang="en-US" sz="1500" dirty="0">
+              <a:rPr lang="en-US" sz="2050" dirty="0">
                 <a:solidFill>
                   <a:schemeClr val="tx1"/>
                 </a:solidFill>
               </a:rPr>
               <a:t>เล่ารายละเอียด</a:t>
             </a:r>
-            <a:endParaRPr lang="en-US" sz="1500" dirty="0"/>
+            <a:endParaRPr lang="en-US" sz="2050" dirty="0"/>
           </a:p>
         </p:txBody>
       </p:sp>
@@ -17892,7 +17892,7 @@
         </p:nvSpPr>
         <p:spPr>
           <a:xfrm>
-            <a:off x="8366760" y="2423160"/>
+            <a:off x="8366760" y="2525395"/>
             <a:ext cx="329184" cy="329184"/>
           </a:xfrm>
           <a:prstGeom prst="ellipse">
@@ -17917,7 +17917,7 @@
         </p:nvSpPr>
         <p:spPr>
           <a:xfrm>
-            <a:off x="8366760" y="2423160"/>
+            <a:off x="8366760" y="2525395"/>
             <a:ext cx="329184" cy="329184"/>
           </a:xfrm>
           <a:prstGeom prst="rect">
@@ -17934,14 +17934,14 @@
               <a:buNone/>
             </a:pPr>
             <a:r>
-              <a:rPr lang="en-US" sz="1300" b="1" dirty="0">
+              <a:rPr lang="en-US" sz="1750" b="1" dirty="0">
                 <a:solidFill>
                   <a:schemeClr val="bg1"/>
                 </a:solidFill>
               </a:rPr>
               <a:t>5</a:t>
             </a:r>
-            <a:endParaRPr lang="en-US" sz="1300" dirty="0"/>
+            <a:endParaRPr lang="en-US" sz="1750" dirty="0"/>
           </a:p>
         </p:txBody>
       </p:sp>
@@ -17953,8 +17953,8 @@
         </p:nvSpPr>
         <p:spPr>
           <a:xfrm>
-            <a:off x="8842248" y="2395728"/>
-            <a:ext cx="2907792" cy="384048"/>
+            <a:off x="8842248" y="2497963"/>
+            <a:ext cx="2907792" cy="435166"/>
           </a:xfrm>
           <a:prstGeom prst="rect">
             <a:avLst/>
@@ -17970,7 +17970,7 @@
               <a:buNone/>
             </a:pPr>
             <a:r>
-              <a:rPr lang="en-US" sz="1500" dirty="0">
+              <a:rPr lang="en-US" sz="2050" dirty="0">
                 <a:solidFill>
                   <a:schemeClr val="tx1"/>
                 </a:solidFill>
@@ -17981,14 +17981,14 @@
               <a:buNone/>
             </a:pPr>
             <a:r>
-              <a:rPr lang="en-US" sz="1500" b="1" dirty="0">
+              <a:rPr lang="en-US" sz="2050" b="1" dirty="0">
                 <a:solidFill>
                   <a:schemeClr val="tx2"/>
                 </a:solidFill>
               </a:rPr>
               <a:t>ไม่ต้องการระบุชื่อ</a:t>
             </a:r>
-            <a:endParaRPr lang="en-US" sz="1500" dirty="0"/>
+            <a:endParaRPr lang="en-US" sz="2050" dirty="0"/>
           </a:p>
         </p:txBody>
       </p:sp>
@@ -18000,7 +18000,7 @@
         </p:nvSpPr>
         <p:spPr>
           <a:xfrm>
-            <a:off x="8366760" y="2935224"/>
+            <a:off x="8366760" y="3088577"/>
             <a:ext cx="329184" cy="329184"/>
           </a:xfrm>
           <a:prstGeom prst="ellipse">
@@ -18025,7 +18025,7 @@
         </p:nvSpPr>
         <p:spPr>
           <a:xfrm>
-            <a:off x="8366760" y="2935224"/>
+            <a:off x="8366760" y="3088577"/>
             <a:ext cx="329184" cy="329184"/>
           </a:xfrm>
           <a:prstGeom prst="rect">
@@ -18042,14 +18042,14 @@
               <a:buNone/>
             </a:pPr>
             <a:r>
-              <a:rPr lang="en-US" sz="1300" b="1" dirty="0">
+              <a:rPr lang="en-US" sz="1750" b="1" dirty="0">
                 <a:solidFill>
                   <a:schemeClr val="bg1"/>
                 </a:solidFill>
               </a:rPr>
               <a:t>6</a:t>
             </a:r>
-            <a:endParaRPr lang="en-US" sz="1300" dirty="0"/>
+            <a:endParaRPr lang="en-US" sz="1750" dirty="0"/>
           </a:p>
         </p:txBody>
       </p:sp>
@@ -18061,8 +18061,8 @@
         </p:nvSpPr>
         <p:spPr>
           <a:xfrm>
-            <a:off x="8842248" y="2907792"/>
-            <a:ext cx="2907792" cy="384048"/>
+            <a:off x="8842248" y="3061145"/>
+            <a:ext cx="2907792" cy="435166"/>
           </a:xfrm>
           <a:prstGeom prst="rect">
             <a:avLst/>
@@ -18078,7 +18078,7 @@
               <a:buNone/>
             </a:pPr>
             <a:r>
-              <a:rPr lang="en-US" sz="1500" dirty="0">
+              <a:rPr lang="en-US" sz="2050" dirty="0">
                 <a:solidFill>
                   <a:schemeClr val="tx1"/>
                 </a:solidFill>
@@ -18089,14 +18089,14 @@
               <a:buNone/>
             </a:pPr>
             <a:r>
-              <a:rPr lang="en-US" sz="1500" b="1" dirty="0">
+              <a:rPr lang="en-US" sz="2050" b="1" dirty="0">
                 <a:solidFill>
                   <a:schemeClr val="tx2"/>
                 </a:solidFill>
               </a:rPr>
               <a:t>ส่งความคิดเห็น</a:t>
             </a:r>
-            <a:endParaRPr lang="en-US" sz="1500" dirty="0"/>
+            <a:endParaRPr lang="en-US" sz="2050" dirty="0"/>
           </a:p>
         </p:txBody>
       </p:sp>
@@ -18152,7 +18152,7 @@
               <a:buNone/>
             </a:pPr>
             <a:r>
-              <a:rPr lang="en-US" sz="1400" dirty="0">
+              <a:rPr lang="en-US" sz="1900" dirty="0">
                 <a:solidFill>
                   <a:schemeClr val="tx1"/>
                 </a:solidFill>
@@ -18163,14 +18163,14 @@
               <a:buNone/>
             </a:pPr>
             <a:r>
-              <a:rPr lang="en-US" sz="1400" dirty="0">
+              <a:rPr lang="en-US" sz="1900" dirty="0">
                 <a:solidFill>
                   <a:schemeClr val="tx1"/>
                 </a:solidFill>
               </a:rPr>
               <a:t>หน้าติดต่อมีสมุดโทรศัพท์ทุกหน่วยงาน และผู้ดูแลระบบ ต่อ 216</a:t>
             </a:r>
-            <a:endParaRPr lang="en-US" sz="1400" dirty="0"/>
+            <a:endParaRPr lang="en-US" sz="1900" dirty="0"/>
           </a:p>
         </p:txBody>
       </p:sp>
@@ -18202,7 +18202,7 @@
           <a:bodyPr/>
           <a:lstStyle>
             <a:lvl1pPr>
-              <a:defRPr sz="1000">
+              <a:defRPr sz="1350">
                 <a:solidFill>
                   <a:schemeClr val="accent5"/>
                 </a:solidFill>
@@ -18271,14 +18271,14 @@
               <a:buNone/>
             </a:pPr>
             <a:r>
-              <a:rPr lang="en-US" sz="3000" b="1" dirty="0">
+              <a:rPr lang="en-US" sz="4050" b="1" dirty="0">
                 <a:solidFill>
                   <a:schemeClr val="tx2"/>
                 </a:solidFill>
               </a:rPr>
               <a:t>Intranet: ทำงานเอกสารครบในที่เดียว</a:t>
             </a:r>
-            <a:endParaRPr lang="en-US" sz="3000" dirty="0"/>
+            <a:endParaRPr lang="en-US" sz="4050" dirty="0"/>
           </a:p>
         </p:txBody>
       </p:sp>
@@ -18359,14 +18359,14 @@
               <a:buNone/>
             </a:pPr>
             <a:r>
-              <a:rPr lang="en-US" sz="2400" dirty="0">
+              <a:rPr lang="en-US" sz="3250" dirty="0">
                 <a:solidFill>
                   <a:srgbClr val="000000"/>
                 </a:solidFill>
               </a:rPr>
               <a:t>📋</a:t>
             </a:r>
-            <a:endParaRPr lang="en-US" sz="2400" dirty="0"/>
+            <a:endParaRPr lang="en-US" sz="3250" dirty="0"/>
           </a:p>
         </p:txBody>
       </p:sp>
@@ -18395,14 +18395,14 @@
               <a:buNone/>
             </a:pPr>
             <a:r>
-              <a:rPr lang="en-US" sz="1700" b="1" dirty="0">
+              <a:rPr lang="en-US" sz="2300" b="1" dirty="0">
                 <a:solidFill>
                   <a:schemeClr val="tx2"/>
                 </a:solidFill>
               </a:rPr>
               <a:t>แบบฟอร์มทั้งหมด</a:t>
             </a:r>
-            <a:endParaRPr lang="en-US" sz="1700" dirty="0"/>
+            <a:endParaRPr lang="en-US" sz="2300" dirty="0"/>
           </a:p>
         </p:txBody>
       </p:sp>
@@ -18431,14 +18431,14 @@
               <a:buNone/>
             </a:pPr>
             <a:r>
-              <a:rPr lang="en-US" sz="1350" dirty="0">
+              <a:rPr lang="en-US" sz="1800" dirty="0">
                 <a:solidFill>
                   <a:schemeClr val="accent5"/>
                 </a:solidFill>
               </a:rPr>
               <a:t>ยื่นคำขอแทนกระดาษ</a:t>
             </a:r>
-            <a:endParaRPr lang="en-US" sz="1350" dirty="0"/>
+            <a:endParaRPr lang="en-US" sz="1800" dirty="0"/>
           </a:p>
         </p:txBody>
       </p:sp>
@@ -18519,14 +18519,14 @@
               <a:buNone/>
             </a:pPr>
             <a:r>
-              <a:rPr lang="en-US" sz="2400" dirty="0">
+              <a:rPr lang="en-US" sz="3250" dirty="0">
                 <a:solidFill>
                   <a:srgbClr val="000000"/>
                 </a:solidFill>
               </a:rPr>
               <a:t>🔎</a:t>
             </a:r>
-            <a:endParaRPr lang="en-US" sz="2400" dirty="0"/>
+            <a:endParaRPr lang="en-US" sz="3250" dirty="0"/>
           </a:p>
         </p:txBody>
       </p:sp>
@@ -18555,14 +18555,14 @@
               <a:buNone/>
             </a:pPr>
             <a:r>
-              <a:rPr lang="en-US" sz="1700" b="1" dirty="0">
+              <a:rPr lang="en-US" sz="2300" b="1" dirty="0">
                 <a:solidFill>
                   <a:schemeClr val="tx2"/>
                 </a:solidFill>
               </a:rPr>
               <a:t>ติดตามสถานะ</a:t>
             </a:r>
-            <a:endParaRPr lang="en-US" sz="1700" dirty="0"/>
+            <a:endParaRPr lang="en-US" sz="2300" dirty="0"/>
           </a:p>
         </p:txBody>
       </p:sp>
@@ -18591,14 +18591,14 @@
               <a:buNone/>
             </a:pPr>
             <a:r>
-              <a:rPr lang="en-US" sz="1350" dirty="0">
+              <a:rPr lang="en-US" sz="1800" dirty="0">
                 <a:solidFill>
                   <a:schemeClr val="accent5"/>
                 </a:solidFill>
               </a:rPr>
               <a:t>ดูว่าคำขอถึงใคร · อนุมัติ</a:t>
             </a:r>
-            <a:endParaRPr lang="en-US" sz="1350" dirty="0"/>
+            <a:endParaRPr lang="en-US" sz="1800" dirty="0"/>
           </a:p>
         </p:txBody>
       </p:sp>
@@ -18679,14 +18679,14 @@
               <a:buNone/>
             </a:pPr>
             <a:r>
-              <a:rPr lang="en-US" sz="2400" dirty="0">
+              <a:rPr lang="en-US" sz="3250" dirty="0">
                 <a:solidFill>
                   <a:srgbClr val="000000"/>
                 </a:solidFill>
               </a:rPr>
               <a:t>📜</a:t>
             </a:r>
-            <a:endParaRPr lang="en-US" sz="2400" dirty="0"/>
+            <a:endParaRPr lang="en-US" sz="3250" dirty="0"/>
           </a:p>
         </p:txBody>
       </p:sp>
@@ -18715,14 +18715,14 @@
               <a:buNone/>
             </a:pPr>
             <a:r>
-              <a:rPr lang="en-US" sz="1700" b="1" dirty="0">
+              <a:rPr lang="en-US" sz="2300" b="1" dirty="0">
                 <a:solidFill>
                   <a:schemeClr val="tx2"/>
                 </a:solidFill>
               </a:rPr>
               <a:t>นโยบายบริษัท</a:t>
             </a:r>
-            <a:endParaRPr lang="en-US" sz="1700" dirty="0"/>
+            <a:endParaRPr lang="en-US" sz="2300" dirty="0"/>
           </a:p>
         </p:txBody>
       </p:sp>
@@ -18751,14 +18751,14 @@
               <a:buNone/>
             </a:pPr>
             <a:r>
-              <a:rPr lang="en-US" sz="1350" dirty="0">
+              <a:rPr lang="en-US" sz="1800" dirty="0">
                 <a:solidFill>
                   <a:schemeClr val="accent5"/>
                 </a:solidFill>
               </a:rPr>
               <a:t>ระเบียบที่บังคับใช้</a:t>
             </a:r>
-            <a:endParaRPr lang="en-US" sz="1350" dirty="0"/>
+            <a:endParaRPr lang="en-US" sz="1800" dirty="0"/>
           </a:p>
         </p:txBody>
       </p:sp>
@@ -18839,14 +18839,14 @@
               <a:buNone/>
             </a:pPr>
             <a:r>
-              <a:rPr lang="en-US" sz="2400" dirty="0">
+              <a:rPr lang="en-US" sz="3250" dirty="0">
                 <a:solidFill>
                   <a:srgbClr val="000000"/>
                 </a:solidFill>
               </a:rPr>
               <a:t>📅</a:t>
             </a:r>
-            <a:endParaRPr lang="en-US" sz="2400" dirty="0"/>
+            <a:endParaRPr lang="en-US" sz="3250" dirty="0"/>
           </a:p>
         </p:txBody>
       </p:sp>
@@ -18875,14 +18875,14 @@
               <a:buNone/>
             </a:pPr>
             <a:r>
-              <a:rPr lang="en-US" sz="1700" b="1" dirty="0">
+              <a:rPr lang="en-US" sz="2300" b="1" dirty="0">
                 <a:solidFill>
                   <a:schemeClr val="tx2"/>
                 </a:solidFill>
               </a:rPr>
               <a:t>จองห้องประชุม</a:t>
             </a:r>
-            <a:endParaRPr lang="en-US" sz="1700" dirty="0"/>
+            <a:endParaRPr lang="en-US" sz="2300" dirty="0"/>
           </a:p>
         </p:txBody>
       </p:sp>
@@ -18911,14 +18911,14 @@
               <a:buNone/>
             </a:pPr>
             <a:r>
-              <a:rPr lang="en-US" sz="1350" dirty="0">
+              <a:rPr lang="en-US" sz="1800" dirty="0">
                 <a:solidFill>
                   <a:schemeClr val="accent5"/>
                 </a:solidFill>
               </a:rPr>
               <a:t>นัดใน Outlook อัตโนมัติ</a:t>
             </a:r>
-            <a:endParaRPr lang="en-US" sz="1350" dirty="0"/>
+            <a:endParaRPr lang="en-US" sz="1800" dirty="0"/>
           </a:p>
         </p:txBody>
       </p:sp>
@@ -18999,14 +18999,14 @@
               <a:buNone/>
             </a:pPr>
             <a:r>
-              <a:rPr lang="en-US" sz="2400" dirty="0">
+              <a:rPr lang="en-US" sz="3250" dirty="0">
                 <a:solidFill>
                   <a:srgbClr val="000000"/>
                 </a:solidFill>
               </a:rPr>
               <a:t>📚</a:t>
             </a:r>
-            <a:endParaRPr lang="en-US" sz="2400" dirty="0"/>
+            <a:endParaRPr lang="en-US" sz="3250" dirty="0"/>
           </a:p>
         </p:txBody>
       </p:sp>
@@ -19035,14 +19035,14 @@
               <a:buNone/>
             </a:pPr>
             <a:r>
-              <a:rPr lang="en-US" sz="1700" b="1" dirty="0">
+              <a:rPr lang="en-US" sz="2300" b="1" dirty="0">
                 <a:solidFill>
                   <a:schemeClr val="tx2"/>
                 </a:solidFill>
               </a:rPr>
               <a:t>เอกสาร/คู่มือ</a:t>
             </a:r>
-            <a:endParaRPr lang="en-US" sz="1700" dirty="0"/>
+            <a:endParaRPr lang="en-US" sz="2300" dirty="0"/>
           </a:p>
         </p:txBody>
       </p:sp>
@@ -19071,14 +19071,14 @@
               <a:buNone/>
             </a:pPr>
             <a:r>
-              <a:rPr lang="en-US" sz="1350" dirty="0">
+              <a:rPr lang="en-US" sz="1800" dirty="0">
                 <a:solidFill>
                   <a:schemeClr val="accent5"/>
                 </a:solidFill>
               </a:rPr>
               <a:t>คู่มือ ISO ไฟล์ต้นแบบ</a:t>
             </a:r>
-            <a:endParaRPr lang="en-US" sz="1350" dirty="0"/>
+            <a:endParaRPr lang="en-US" sz="1800" dirty="0"/>
           </a:p>
         </p:txBody>
       </p:sp>
@@ -19159,14 +19159,14 @@
               <a:buNone/>
             </a:pPr>
             <a:r>
-              <a:rPr lang="en-US" sz="2400" dirty="0">
+              <a:rPr lang="en-US" sz="3250" dirty="0">
                 <a:solidFill>
                   <a:srgbClr val="000000"/>
                 </a:solidFill>
               </a:rPr>
               <a:t>⭐</a:t>
             </a:r>
-            <a:endParaRPr lang="en-US" sz="2400" dirty="0"/>
+            <a:endParaRPr lang="en-US" sz="3250" dirty="0"/>
           </a:p>
         </p:txBody>
       </p:sp>
@@ -19195,14 +19195,14 @@
               <a:buNone/>
             </a:pPr>
             <a:r>
-              <a:rPr lang="en-US" sz="1700" b="1" dirty="0">
+              <a:rPr lang="en-US" sz="2300" b="1" dirty="0">
                 <a:solidFill>
                   <a:schemeClr val="tx2"/>
                 </a:solidFill>
               </a:rPr>
               <a:t>ประเมินผลบุคลากร</a:t>
             </a:r>
-            <a:endParaRPr lang="en-US" sz="1700" dirty="0"/>
+            <a:endParaRPr lang="en-US" sz="2300" dirty="0"/>
           </a:p>
         </p:txBody>
       </p:sp>
@@ -19231,14 +19231,14 @@
               <a:buNone/>
             </a:pPr>
             <a:r>
-              <a:rPr lang="en-US" sz="1350" dirty="0">
+              <a:rPr lang="en-US" sz="1800" dirty="0">
                 <a:solidFill>
                   <a:schemeClr val="accent5"/>
                 </a:solidFill>
               </a:rPr>
               <a:t>ประเมิน ลงนาม ดูประวัติ</a:t>
             </a:r>
-            <a:endParaRPr lang="en-US" sz="1350" dirty="0"/>
+            <a:endParaRPr lang="en-US" sz="1800" dirty="0"/>
           </a:p>
         </p:txBody>
       </p:sp>
@@ -19319,14 +19319,14 @@
               <a:buNone/>
             </a:pPr>
             <a:r>
-              <a:rPr lang="en-US" sz="2400" dirty="0">
+              <a:rPr lang="en-US" sz="3250" dirty="0">
                 <a:solidFill>
                   <a:srgbClr val="000000"/>
                 </a:solidFill>
               </a:rPr>
               <a:t>👥</a:t>
             </a:r>
-            <a:endParaRPr lang="en-US" sz="2400" dirty="0"/>
+            <a:endParaRPr lang="en-US" sz="3250" dirty="0"/>
           </a:p>
         </p:txBody>
       </p:sp>
@@ -19355,14 +19355,14 @@
               <a:buNone/>
             </a:pPr>
             <a:r>
-              <a:rPr lang="en-US" sz="1700" b="1" dirty="0">
+              <a:rPr lang="en-US" sz="2300" b="1" dirty="0">
                 <a:solidFill>
                   <a:schemeClr val="tx2"/>
                 </a:solidFill>
               </a:rPr>
               <a:t>บุคลากร</a:t>
             </a:r>
-            <a:endParaRPr lang="en-US" sz="1700" dirty="0"/>
+            <a:endParaRPr lang="en-US" sz="2300" dirty="0"/>
           </a:p>
         </p:txBody>
       </p:sp>
@@ -19391,14 +19391,14 @@
               <a:buNone/>
             </a:pPr>
             <a:r>
-              <a:rPr lang="en-US" sz="1350" dirty="0">
+              <a:rPr lang="en-US" sz="1800" dirty="0">
                 <a:solidFill>
                   <a:schemeClr val="accent5"/>
                 </a:solidFill>
               </a:rPr>
               <a:t>เบอร์ต่อ อีเมล ผังองค์กร</a:t>
             </a:r>
-            <a:endParaRPr lang="en-US" sz="1350" dirty="0"/>
+            <a:endParaRPr lang="en-US" sz="1800" dirty="0"/>
           </a:p>
         </p:txBody>
       </p:sp>
@@ -19479,14 +19479,14 @@
               <a:buNone/>
             </a:pPr>
             <a:r>
-              <a:rPr lang="en-US" sz="2400" dirty="0">
+              <a:rPr lang="en-US" sz="3250" dirty="0">
                 <a:solidFill>
                   <a:srgbClr val="000000"/>
                 </a:solidFill>
               </a:rPr>
               <a:t>☎️</a:t>
             </a:r>
-            <a:endParaRPr lang="en-US" sz="2400" dirty="0"/>
+            <a:endParaRPr lang="en-US" sz="3250" dirty="0"/>
           </a:p>
         </p:txBody>
       </p:sp>
@@ -19515,14 +19515,14 @@
               <a:buNone/>
             </a:pPr>
             <a:r>
-              <a:rPr lang="en-US" sz="1700" b="1" dirty="0">
+              <a:rPr lang="en-US" sz="2300" b="1" dirty="0">
                 <a:solidFill>
                   <a:schemeClr val="tx2"/>
                 </a:solidFill>
               </a:rPr>
               <a:t>ติดต่อ</a:t>
             </a:r>
-            <a:endParaRPr lang="en-US" sz="1700" dirty="0"/>
+            <a:endParaRPr lang="en-US" sz="2300" dirty="0"/>
           </a:p>
         </p:txBody>
       </p:sp>
@@ -19551,14 +19551,14 @@
               <a:buNone/>
             </a:pPr>
             <a:r>
-              <a:rPr lang="en-US" sz="1350" dirty="0">
+              <a:rPr lang="en-US" sz="1800" dirty="0">
                 <a:solidFill>
                   <a:schemeClr val="accent5"/>
                 </a:solidFill>
               </a:rPr>
               <a:t>สมุดโทรศัพท์ · ความคิดเห็น</a:t>
             </a:r>
-            <a:endParaRPr lang="en-US" sz="1350" dirty="0"/>
+            <a:endParaRPr lang="en-US" sz="1800" dirty="0"/>
           </a:p>
         </p:txBody>
       </p:sp>
@@ -19590,7 +19590,7 @@
           <a:bodyPr/>
           <a:lstStyle>
             <a:lvl1pPr>
-              <a:defRPr sz="1000">
+              <a:defRPr sz="1350">
                 <a:solidFill>
                   <a:schemeClr val="accent5"/>
                 </a:solidFill>
@@ -19659,14 +19659,14 @@
               <a:buNone/>
             </a:pPr>
             <a:r>
-              <a:rPr lang="en-US" sz="3000" b="1" dirty="0">
+              <a:rPr lang="en-US" sz="4050" b="1" dirty="0">
                 <a:solidFill>
                   <a:schemeClr val="tx2"/>
                 </a:solidFill>
               </a:rPr>
               <a:t>ใช้งานบนมือถือ</a:t>
             </a:r>
-            <a:endParaRPr lang="en-US" sz="3000" dirty="0"/>
+            <a:endParaRPr lang="en-US" sz="4050" dirty="0"/>
           </a:p>
         </p:txBody>
       </p:sp>
@@ -19888,14 +19888,14 @@
               <a:buNone/>
             </a:pPr>
             <a:r>
-              <a:rPr lang="en-US" sz="1300" b="1" dirty="0">
+              <a:rPr lang="en-US" sz="1750" b="1" dirty="0">
                 <a:solidFill>
                   <a:schemeClr val="bg1"/>
                 </a:solidFill>
               </a:rPr>
               <a:t>1</a:t>
             </a:r>
-            <a:endParaRPr lang="en-US" sz="1300" dirty="0"/>
+            <a:endParaRPr lang="en-US" sz="1750" dirty="0"/>
           </a:p>
         </p:txBody>
       </p:sp>
@@ -19908,7 +19908,7 @@
         <p:spPr>
           <a:xfrm>
             <a:off x="8156448" y="1371600"/>
-            <a:ext cx="3593592" cy="624078"/>
+            <a:ext cx="3593592" cy="760603"/>
           </a:xfrm>
           <a:prstGeom prst="rect">
             <a:avLst/>
@@ -19924,14 +19924,14 @@
               <a:buNone/>
             </a:pPr>
             <a:r>
-              <a:rPr lang="en-US" sz="1500" dirty="0">
+              <a:rPr lang="en-US" sz="2050" dirty="0">
                 <a:solidFill>
                   <a:schemeClr val="tx1"/>
                 </a:solidFill>
               </a:rPr>
               <a:t>เปิดลิงก์ด้วย Safari / Chrome แล้วเข้าสู่ระบบ</a:t>
             </a:r>
-            <a:endParaRPr lang="en-US" sz="1500" dirty="0"/>
+            <a:endParaRPr lang="en-US" sz="2050" dirty="0"/>
           </a:p>
         </p:txBody>
       </p:sp>
@@ -19943,7 +19943,7 @@
         </p:nvSpPr>
         <p:spPr>
           <a:xfrm>
-            <a:off x="7680960" y="2151126"/>
+            <a:off x="7680960" y="2287651"/>
             <a:ext cx="329184" cy="329184"/>
           </a:xfrm>
           <a:prstGeom prst="ellipse">
@@ -19968,7 +19968,7 @@
         </p:nvSpPr>
         <p:spPr>
           <a:xfrm>
-            <a:off x="7680960" y="2151126"/>
+            <a:off x="7680960" y="2287651"/>
             <a:ext cx="329184" cy="329184"/>
           </a:xfrm>
           <a:prstGeom prst="rect">
@@ -19985,14 +19985,14 @@
               <a:buNone/>
             </a:pPr>
             <a:r>
-              <a:rPr lang="en-US" sz="1300" b="1" dirty="0">
+              <a:rPr lang="en-US" sz="1750" b="1" dirty="0">
                 <a:solidFill>
                   <a:schemeClr val="bg1"/>
                 </a:solidFill>
               </a:rPr>
               <a:t>2</a:t>
             </a:r>
-            <a:endParaRPr lang="en-US" sz="1300" dirty="0"/>
+            <a:endParaRPr lang="en-US" sz="1750" dirty="0"/>
           </a:p>
         </p:txBody>
       </p:sp>
@@ -20004,8 +20004,8 @@
         </p:nvSpPr>
         <p:spPr>
           <a:xfrm>
-            <a:off x="8156448" y="2123694"/>
-            <a:ext cx="3593592" cy="624078"/>
+            <a:off x="8156448" y="2260219"/>
+            <a:ext cx="3593592" cy="760603"/>
           </a:xfrm>
           <a:prstGeom prst="rect">
             <a:avLst/>
@@ -20021,7 +20021,7 @@
               <a:buNone/>
             </a:pPr>
             <a:r>
-              <a:rPr lang="en-US" sz="1500" b="1" dirty="0">
+              <a:rPr lang="en-US" sz="2050" b="1" dirty="0">
                 <a:solidFill>
                   <a:schemeClr val="tx2"/>
                 </a:solidFill>
@@ -20032,14 +20032,14 @@
               <a:buNone/>
             </a:pPr>
             <a:r>
-              <a:rPr lang="en-US" sz="1500" dirty="0">
+              <a:rPr lang="en-US" sz="2050" dirty="0">
                 <a:solidFill>
                   <a:schemeClr val="tx1"/>
                 </a:solidFill>
               </a:rPr>
               <a:t> ได้ไอคอนเหมือนแอป</a:t>
             </a:r>
-            <a:endParaRPr lang="en-US" sz="1500" dirty="0"/>
+            <a:endParaRPr lang="en-US" sz="2050" dirty="0"/>
           </a:p>
         </p:txBody>
       </p:sp>
@@ -20051,7 +20051,7 @@
         </p:nvSpPr>
         <p:spPr>
           <a:xfrm>
-            <a:off x="7680960" y="2903220"/>
+            <a:off x="7680960" y="3176270"/>
             <a:ext cx="329184" cy="329184"/>
           </a:xfrm>
           <a:prstGeom prst="ellipse">
@@ -20076,7 +20076,7 @@
         </p:nvSpPr>
         <p:spPr>
           <a:xfrm>
-            <a:off x="7680960" y="2903220"/>
+            <a:off x="7680960" y="3176270"/>
             <a:ext cx="329184" cy="329184"/>
           </a:xfrm>
           <a:prstGeom prst="rect">
@@ -20093,14 +20093,14 @@
               <a:buNone/>
             </a:pPr>
             <a:r>
-              <a:rPr lang="en-US" sz="1300" b="1" dirty="0">
+              <a:rPr lang="en-US" sz="1750" b="1" dirty="0">
                 <a:solidFill>
                   <a:schemeClr val="bg1"/>
                 </a:solidFill>
               </a:rPr>
               <a:t>3</a:t>
             </a:r>
-            <a:endParaRPr lang="en-US" sz="1300" dirty="0"/>
+            <a:endParaRPr lang="en-US" sz="1750" dirty="0"/>
           </a:p>
         </p:txBody>
       </p:sp>
@@ -20112,8 +20112,8 @@
         </p:nvSpPr>
         <p:spPr>
           <a:xfrm>
-            <a:off x="8156448" y="2875788"/>
-            <a:ext cx="3593592" cy="384048"/>
+            <a:off x="8156448" y="3148838"/>
+            <a:ext cx="3593592" cy="435166"/>
           </a:xfrm>
           <a:prstGeom prst="rect">
             <a:avLst/>
@@ -20129,7 +20129,7 @@
               <a:buNone/>
             </a:pPr>
             <a:r>
-              <a:rPr lang="en-US" sz="1500" dirty="0">
+              <a:rPr lang="en-US" sz="2050" dirty="0">
                 <a:solidFill>
                   <a:schemeClr val="tx1"/>
                 </a:solidFill>
@@ -20140,7 +20140,7 @@
               <a:buNone/>
             </a:pPr>
             <a:r>
-              <a:rPr lang="en-US" sz="1500" b="1" dirty="0">
+              <a:rPr lang="en-US" sz="2050" b="1" dirty="0">
                 <a:solidFill>
                   <a:schemeClr val="tx2"/>
                 </a:solidFill>
@@ -20151,14 +20151,14 @@
               <a:buNone/>
             </a:pPr>
             <a:r>
-              <a:rPr lang="en-US" sz="1500" dirty="0">
+              <a:rPr lang="en-US" sz="2050" dirty="0">
                 <a:solidFill>
                   <a:schemeClr val="tx1"/>
                 </a:solidFill>
               </a:rPr>
               <a:t> มุมขวาบน</a:t>
             </a:r>
-            <a:endParaRPr lang="en-US" sz="1500" dirty="0"/>
+            <a:endParaRPr lang="en-US" sz="2050" dirty="0"/>
           </a:p>
         </p:txBody>
       </p:sp>
@@ -20170,7 +20170,7 @@
         </p:nvSpPr>
         <p:spPr>
           <a:xfrm>
-            <a:off x="7680960" y="3415284"/>
+            <a:off x="7680960" y="3739452"/>
             <a:ext cx="329184" cy="329184"/>
           </a:xfrm>
           <a:prstGeom prst="ellipse">
@@ -20195,7 +20195,7 @@
         </p:nvSpPr>
         <p:spPr>
           <a:xfrm>
-            <a:off x="7680960" y="3415284"/>
+            <a:off x="7680960" y="3739452"/>
             <a:ext cx="329184" cy="329184"/>
           </a:xfrm>
           <a:prstGeom prst="rect">
@@ -20212,14 +20212,14 @@
               <a:buNone/>
             </a:pPr>
             <a:r>
-              <a:rPr lang="en-US" sz="1300" b="1" dirty="0">
+              <a:rPr lang="en-US" sz="1750" b="1" dirty="0">
                 <a:solidFill>
                   <a:schemeClr val="bg1"/>
                 </a:solidFill>
               </a:rPr>
               <a:t>4</a:t>
             </a:r>
-            <a:endParaRPr lang="en-US" sz="1300" dirty="0"/>
+            <a:endParaRPr lang="en-US" sz="1750" dirty="0"/>
           </a:p>
         </p:txBody>
       </p:sp>
@@ -20231,8 +20231,8 @@
         </p:nvSpPr>
         <p:spPr>
           <a:xfrm>
-            <a:off x="8156448" y="3387852"/>
-            <a:ext cx="3593592" cy="624078"/>
+            <a:off x="8156448" y="3712020"/>
+            <a:ext cx="3593592" cy="760603"/>
           </a:xfrm>
           <a:prstGeom prst="rect">
             <a:avLst/>
@@ -20248,14 +20248,14 @@
               <a:buNone/>
             </a:pPr>
             <a:r>
-              <a:rPr lang="en-US" sz="1500" dirty="0">
+              <a:rPr lang="en-US" sz="2050" dirty="0">
                 <a:solidFill>
                   <a:schemeClr val="tx1"/>
                 </a:solidFill>
               </a:rPr>
               <a:t>แนบไฟล์เลือก “ถ่ายรูป” · เซ็นด้วยนิ้ว</a:t>
             </a:r>
-            <a:endParaRPr lang="en-US" sz="1500" dirty="0"/>
+            <a:endParaRPr lang="en-US" sz="2050" dirty="0"/>
           </a:p>
         </p:txBody>
       </p:sp>
@@ -20287,7 +20287,7 @@
           <a:bodyPr/>
           <a:lstStyle>
             <a:lvl1pPr>
-              <a:defRPr sz="1000">
+              <a:defRPr sz="1350">
                 <a:solidFill>
                   <a:schemeClr val="accent5"/>
                 </a:solidFill>
@@ -20379,14 +20379,14 @@
               <a:buNone/>
             </a:pPr>
             <a:r>
-              <a:rPr lang="en-US" sz="4000" b="1" dirty="0">
+              <a:rPr lang="en-US" sz="5400" b="1" dirty="0">
                 <a:solidFill>
                   <a:schemeClr val="bg1"/>
                 </a:solidFill>
               </a:rPr>
               <a:t>5</a:t>
             </a:r>
-            <a:endParaRPr lang="en-US" sz="4000" dirty="0"/>
+            <a:endParaRPr lang="en-US" sz="5400" dirty="0"/>
           </a:p>
         </p:txBody>
       </p:sp>
@@ -20417,14 +20417,14 @@
               <a:buNone/>
             </a:pPr>
             <a:r>
-              <a:rPr lang="en-US" sz="3800" b="1" dirty="0">
+              <a:rPr lang="en-US" sz="5150" b="1" dirty="0">
                 <a:solidFill>
                   <a:schemeClr val="bg1"/>
                 </a:solidFill>
               </a:rPr>
               <a:t>ฝึกปฏิบัติและทดสอบ</a:t>
             </a:r>
-            <a:endParaRPr lang="en-US" sz="3800" dirty="0"/>
+            <a:endParaRPr lang="en-US" sz="5150" dirty="0"/>
           </a:p>
         </p:txBody>
       </p:sp>
@@ -20455,14 +20455,14 @@
               <a:buNone/>
             </a:pPr>
             <a:r>
-              <a:rPr lang="en-US" sz="1800" dirty="0">
+              <a:rPr lang="en-US" sz="2450" dirty="0">
                 <a:solidFill>
                   <a:schemeClr val="bg1"/>
                 </a:solidFill>
               </a:rPr>
               <a:t>แบบฝึก 3 ชุด · ปัญหาที่พบบ่อย · แบบทดสอบ 5 ข้อ</a:t>
             </a:r>
-            <a:endParaRPr lang="en-US" sz="1800" dirty="0"/>
+            <a:endParaRPr lang="en-US" sz="2450" dirty="0"/>
           </a:p>
         </p:txBody>
       </p:sp>
@@ -20518,14 +20518,14 @@
               <a:buNone/>
             </a:pPr>
             <a:r>
-              <a:rPr lang="en-US" sz="3000" b="1" dirty="0">
+              <a:rPr lang="en-US" sz="4050" b="1" dirty="0">
                 <a:solidFill>
                   <a:schemeClr val="tx2"/>
                 </a:solidFill>
               </a:rPr>
               <a:t>แบบฝึกปฏิบัติ 3 ชุด</a:t>
             </a:r>
-            <a:endParaRPr lang="en-US" sz="3000" dirty="0"/>
+            <a:endParaRPr lang="en-US" sz="4050" dirty="0"/>
           </a:p>
         </p:txBody>
       </p:sp>
@@ -20606,14 +20606,14 @@
               <a:buNone/>
             </a:pPr>
             <a:r>
-              <a:rPr lang="en-US" sz="2600" b="1" dirty="0">
+              <a:rPr lang="en-US" sz="3500" b="1" dirty="0">
                 <a:solidFill>
                   <a:schemeClr val="bg1"/>
                 </a:solidFill>
               </a:rPr>
               <a:t>1</a:t>
             </a:r>
-            <a:endParaRPr lang="en-US" sz="2600" dirty="0"/>
+            <a:endParaRPr lang="en-US" sz="3500" dirty="0"/>
           </a:p>
         </p:txBody>
       </p:sp>
@@ -20642,14 +20642,14 @@
               <a:buNone/>
             </a:pPr>
             <a:r>
-              <a:rPr lang="en-US" sz="1900" b="1" dirty="0">
+              <a:rPr lang="en-US" sz="2550" b="1" dirty="0">
                 <a:solidFill>
                   <a:schemeClr val="tx2"/>
                 </a:solidFill>
               </a:rPr>
               <a:t>ยื่นคำขอ</a:t>
             </a:r>
-            <a:endParaRPr lang="en-US" sz="1900" dirty="0"/>
+            <a:endParaRPr lang="en-US" sz="2550" dirty="0"/>
           </a:p>
         </p:txBody>
       </p:sp>
@@ -20678,14 +20678,14 @@
               <a:buNone/>
             </a:pPr>
             <a:r>
-              <a:rPr lang="en-US" sz="1500" dirty="0">
+              <a:rPr lang="en-US" sz="2050" dirty="0">
                 <a:solidFill>
                   <a:schemeClr val="tx1"/>
                 </a:solidFill>
               </a:rPr>
               <a:t>ยื่น Memo บันทึกข้อความภายใน เรื่อง “ทดสอบการใช้งานระบบ – ชื่อคุณ” แนบรูป 1 รูป ลงลายเซ็น จดเลขที่คำขอ</a:t>
             </a:r>
-            <a:endParaRPr lang="en-US" sz="1500" dirty="0"/>
+            <a:endParaRPr lang="en-US" sz="2050" dirty="0"/>
           </a:p>
         </p:txBody>
       </p:sp>
@@ -20766,14 +20766,14 @@
               <a:buNone/>
             </a:pPr>
             <a:r>
-              <a:rPr lang="en-US" sz="2600" b="1" dirty="0">
+              <a:rPr lang="en-US" sz="3500" b="1" dirty="0">
                 <a:solidFill>
                   <a:schemeClr val="bg1"/>
                 </a:solidFill>
               </a:rPr>
               <a:t>2</a:t>
             </a:r>
-            <a:endParaRPr lang="en-US" sz="2600" dirty="0"/>
+            <a:endParaRPr lang="en-US" sz="3500" dirty="0"/>
           </a:p>
         </p:txBody>
       </p:sp>
@@ -20802,14 +20802,14 @@
               <a:buNone/>
             </a:pPr>
             <a:r>
-              <a:rPr lang="en-US" sz="1900" b="1" dirty="0">
+              <a:rPr lang="en-US" sz="2550" b="1" dirty="0">
                 <a:solidFill>
                   <a:schemeClr val="tx2"/>
                 </a:solidFill>
               </a:rPr>
               <a:t>ติดตามและแก้ไข</a:t>
             </a:r>
-            <a:endParaRPr lang="en-US" sz="1900" dirty="0"/>
+            <a:endParaRPr lang="en-US" sz="2550" dirty="0"/>
           </a:p>
         </p:txBody>
       </p:sp>
@@ -20838,14 +20838,14 @@
               <a:buNone/>
             </a:pPr>
             <a:r>
-              <a:rPr lang="en-US" sz="1500" dirty="0">
+              <a:rPr lang="en-US" sz="2050" dirty="0">
                 <a:solidFill>
                   <a:schemeClr val="tx1"/>
                 </a:solidFill>
               </a:rPr>
               <a:t>ผู้สอนส่งกลับแก้ไข → อ่านเหตุผล แก้ชื่อเรื่องเป็น “(แก้ไขแล้ว)” ยื่นใหม่ → ส่งออกเป็น PDF</a:t>
             </a:r>
-            <a:endParaRPr lang="en-US" sz="1500" dirty="0"/>
+            <a:endParaRPr lang="en-US" sz="2050" dirty="0"/>
           </a:p>
         </p:txBody>
       </p:sp>
@@ -20926,14 +20926,14 @@
               <a:buNone/>
             </a:pPr>
             <a:r>
-              <a:rPr lang="en-US" sz="2600" b="1" dirty="0">
+              <a:rPr lang="en-US" sz="3500" b="1" dirty="0">
                 <a:solidFill>
                   <a:schemeClr val="bg1"/>
                 </a:solidFill>
               </a:rPr>
               <a:t>3</a:t>
             </a:r>
-            <a:endParaRPr lang="en-US" sz="2600" dirty="0"/>
+            <a:endParaRPr lang="en-US" sz="3500" dirty="0"/>
           </a:p>
         </p:txBody>
       </p:sp>
@@ -20962,14 +20962,14 @@
               <a:buNone/>
             </a:pPr>
             <a:r>
-              <a:rPr lang="en-US" sz="1900" b="1" dirty="0">
+              <a:rPr lang="en-US" sz="2550" b="1" dirty="0">
                 <a:solidFill>
                   <a:schemeClr val="tx2"/>
                 </a:solidFill>
               </a:rPr>
               <a:t>ค้นหาข้อมูล</a:t>
             </a:r>
-            <a:endParaRPr lang="en-US" sz="1900" dirty="0"/>
+            <a:endParaRPr lang="en-US" sz="2550" dirty="0"/>
           </a:p>
         </p:txBody>
       </p:sp>
@@ -20998,14 +20998,14 @@
               <a:buNone/>
             </a:pPr>
             <a:r>
-              <a:rPr lang="en-US" sz="1500" dirty="0">
+              <a:rPr lang="en-US" sz="2050" dirty="0">
                 <a:solidFill>
                   <a:schemeClr val="tx1"/>
                 </a:solidFill>
               </a:rPr>
               <a:t>หาเบอร์ต่อ HR · หาหัวหน้าแผนกตัวเองในผังองค์กร · เปิดนโยบาย PDPA บอกวันที่ประกาศ</a:t>
             </a:r>
-            <a:endParaRPr lang="en-US" sz="1500" dirty="0"/>
+            <a:endParaRPr lang="en-US" sz="2050" dirty="0"/>
           </a:p>
         </p:txBody>
       </p:sp>
@@ -21061,7 +21061,7 @@
               <a:buNone/>
             </a:pPr>
             <a:r>
-              <a:rPr lang="en-US" sz="1400" dirty="0">
+              <a:rPr lang="en-US" sz="1900" dirty="0">
                 <a:solidFill>
                   <a:schemeClr val="tx1"/>
                 </a:solidFill>
@@ -21072,7 +21072,7 @@
               <a:buNone/>
             </a:pPr>
             <a:r>
-              <a:rPr lang="en-US" sz="1400" dirty="0">
+              <a:rPr lang="en-US" sz="1900" dirty="0">
                 <a:solidFill>
                   <a:schemeClr val="tx1"/>
                 </a:solidFill>
@@ -21083,7 +21083,7 @@
               <a:buNone/>
             </a:pPr>
             <a:r>
-              <a:rPr lang="en-US" sz="1400" b="1" dirty="0">
+              <a:rPr lang="en-US" sz="1900" b="1" dirty="0">
                 <a:solidFill>
                   <a:schemeClr val="tx2"/>
                 </a:solidFill>
@@ -21094,14 +21094,14 @@
               <a:buNone/>
             </a:pPr>
             <a:r>
-              <a:rPr lang="en-US" sz="1400" dirty="0">
+              <a:rPr lang="en-US" sz="1900" dirty="0">
                 <a:solidFill>
                   <a:schemeClr val="tx1"/>
                 </a:solidFill>
               </a:rPr>
               <a:t> ทุกใบ เพื่อไม่ให้ปนกับรายงานจริง</a:t>
             </a:r>
-            <a:endParaRPr lang="en-US" sz="1400" dirty="0"/>
+            <a:endParaRPr lang="en-US" sz="1900" dirty="0"/>
           </a:p>
         </p:txBody>
       </p:sp>
@@ -21133,7 +21133,7 @@
           <a:bodyPr/>
           <a:lstStyle>
             <a:lvl1pPr>
-              <a:defRPr sz="1000">
+              <a:defRPr sz="1350">
                 <a:solidFill>
                   <a:schemeClr val="accent5"/>
                 </a:solidFill>
@@ -21202,14 +21202,14 @@
               <a:buNone/>
             </a:pPr>
             <a:r>
-              <a:rPr lang="en-US" sz="3000" b="1" dirty="0">
+              <a:rPr lang="en-US" sz="4050" b="1" dirty="0">
                 <a:solidFill>
                   <a:schemeClr val="tx2"/>
                 </a:solidFill>
               </a:rPr>
               <a:t>ปัญหาที่พบบ่อยและวิธีแก้</a:t>
             </a:r>
-            <a:endParaRPr lang="en-US" sz="3000" dirty="0"/>
+            <a:endParaRPr lang="en-US" sz="4050" dirty="0"/>
           </a:p>
         </p:txBody>
       </p:sp>
@@ -21268,14 +21268,14 @@
               <a:buNone/>
             </a:pPr>
             <a:r>
-              <a:rPr lang="en-US" sz="1600" b="1" dirty="0">
+              <a:rPr lang="en-US" sz="2150" b="1" dirty="0">
                 <a:solidFill>
                   <a:schemeClr val="tx2"/>
                 </a:solidFill>
               </a:rPr>
               <a:t>❓ หน้าเว็บไม่อัปเดต ไม่เห็นปุ่มใหม่</a:t>
             </a:r>
-            <a:endParaRPr lang="en-US" sz="1600" dirty="0"/>
+            <a:endParaRPr lang="en-US" sz="2150" dirty="0"/>
           </a:p>
           <a:p>
             <a:pPr indent="0" marL="0">
@@ -21285,14 +21285,14 @@
               <a:buNone/>
             </a:pPr>
             <a:r>
-              <a:rPr lang="en-US" sz="1400" dirty="0">
+              <a:rPr lang="en-US" sz="1900" dirty="0">
                 <a:solidFill>
                   <a:schemeClr val="tx1"/>
                 </a:solidFill>
               </a:rPr>
               <a:t>กด Ctrl + F5 · มือถือปิดแท็บแล้วเปิดใหม่</a:t>
             </a:r>
-            <a:endParaRPr lang="en-US" sz="1600" dirty="0"/>
+            <a:endParaRPr lang="en-US" sz="2150" dirty="0"/>
           </a:p>
         </p:txBody>
       </p:sp>
@@ -21351,14 +21351,14 @@
               <a:buNone/>
             </a:pPr>
             <a:r>
-              <a:rPr lang="en-US" sz="1600" b="1" dirty="0">
+              <a:rPr lang="en-US" sz="2150" b="1" dirty="0">
                 <a:solidFill>
                   <a:schemeClr val="tx2"/>
                 </a:solidFill>
               </a:rPr>
               <a:t>❓ ส่งคำขอไม่ได้ ขึ้นข้อความแดง</a:t>
             </a:r>
-            <a:endParaRPr lang="en-US" sz="1600" dirty="0"/>
+            <a:endParaRPr lang="en-US" sz="2150" dirty="0"/>
           </a:p>
           <a:p>
             <a:pPr indent="0" marL="0">
@@ -21368,14 +21368,14 @@
               <a:buNone/>
             </a:pPr>
             <a:r>
-              <a:rPr lang="en-US" sz="1400" dirty="0">
+              <a:rPr lang="en-US" sz="1900" dirty="0">
                 <a:solidFill>
                   <a:schemeClr val="tx1"/>
                 </a:solidFill>
               </a:rPr>
               <a:t>ข้อความบอกว่า “ยังขาด” ช่องไหน กรอกช่องที่มี * ให้ครบ</a:t>
             </a:r>
-            <a:endParaRPr lang="en-US" sz="1600" dirty="0"/>
+            <a:endParaRPr lang="en-US" sz="2150" dirty="0"/>
           </a:p>
         </p:txBody>
       </p:sp>
@@ -21434,14 +21434,14 @@
               <a:buNone/>
             </a:pPr>
             <a:r>
-              <a:rPr lang="en-US" sz="1600" b="1" dirty="0">
+              <a:rPr lang="en-US" sz="2150" b="1" dirty="0">
                 <a:solidFill>
                   <a:schemeClr val="tx2"/>
                 </a:solidFill>
               </a:rPr>
               <a:t>❓ คำขอค้างที่ผู้อนุมัติหลายวัน</a:t>
             </a:r>
-            <a:endParaRPr lang="en-US" sz="1600" dirty="0"/>
+            <a:endParaRPr lang="en-US" sz="2150" dirty="0"/>
           </a:p>
           <a:p>
             <a:pPr indent="0" marL="0">
@@ -21451,14 +21451,14 @@
               <a:buNone/>
             </a:pPr>
             <a:r>
-              <a:rPr lang="en-US" sz="1400" dirty="0">
+              <a:rPr lang="en-US" sz="1900" dirty="0">
                 <a:solidFill>
                   <a:schemeClr val="tx1"/>
                 </a:solidFill>
               </a:rPr>
               <a:t>ดูชื่อในเส้นทางอนุมัติ แล้วติดต่อผู้อนุมัติโดยตรง</a:t>
             </a:r>
-            <a:endParaRPr lang="en-US" sz="1600" dirty="0"/>
+            <a:endParaRPr lang="en-US" sz="2150" dirty="0"/>
           </a:p>
         </p:txBody>
       </p:sp>
@@ -21517,14 +21517,14 @@
               <a:buNone/>
             </a:pPr>
             <a:r>
-              <a:rPr lang="en-US" sz="1600" b="1" dirty="0">
+              <a:rPr lang="en-US" sz="2150" b="1" dirty="0">
                 <a:solidFill>
                   <a:schemeClr val="tx2"/>
                 </a:solidFill>
               </a:rPr>
               <a:t>❓ คำขอไปหาผู้อนุมัติผิดคน</a:t>
             </a:r>
-            <a:endParaRPr lang="en-US" sz="1600" dirty="0"/>
+            <a:endParaRPr lang="en-US" sz="2150" dirty="0"/>
           </a:p>
           <a:p>
             <a:pPr indent="0" marL="0">
@@ -21534,14 +21534,14 @@
               <a:buNone/>
             </a:pPr>
             <a:r>
-              <a:rPr lang="en-US" sz="1400" dirty="0">
+              <a:rPr lang="en-US" sz="1900" dirty="0">
                 <a:solidFill>
                   <a:schemeClr val="tx1"/>
                 </a:solidFill>
               </a:rPr>
               <a:t>ข้อมูลหัวหน้าในทะเบียนไม่ถูก แจ้ง HR พร้อมเลขที่คำขอ</a:t>
             </a:r>
-            <a:endParaRPr lang="en-US" sz="1600" dirty="0"/>
+            <a:endParaRPr lang="en-US" sz="2150" dirty="0"/>
           </a:p>
         </p:txBody>
       </p:sp>
@@ -21600,14 +21600,14 @@
               <a:buNone/>
             </a:pPr>
             <a:r>
-              <a:rPr lang="en-US" sz="1600" b="1" dirty="0">
+              <a:rPr lang="en-US" sz="2150" b="1" dirty="0">
                 <a:solidFill>
                   <a:schemeClr val="tx2"/>
                 </a:solidFill>
               </a:rPr>
               <a:t>❓ อนุมัติใน Teams แล้วเว็บไม่เปลี่ยน</a:t>
             </a:r>
-            <a:endParaRPr lang="en-US" sz="1600" dirty="0"/>
+            <a:endParaRPr lang="en-US" sz="2150" dirty="0"/>
           </a:p>
           <a:p>
             <a:pPr indent="0" marL="0">
@@ -21617,14 +21617,14 @@
               <a:buNone/>
             </a:pPr>
             <a:r>
-              <a:rPr lang="en-US" sz="1400" dirty="0">
+              <a:rPr lang="en-US" sz="1900" dirty="0">
                 <a:solidFill>
                   <a:schemeClr val="tx1"/>
                 </a:solidFill>
               </a:rPr>
               <a:t>รอไม่เกิน 10 นาที แล้วอนุมัติในเว็บแทน</a:t>
             </a:r>
-            <a:endParaRPr lang="en-US" sz="1600" dirty="0"/>
+            <a:endParaRPr lang="en-US" sz="2150" dirty="0"/>
           </a:p>
         </p:txBody>
       </p:sp>
@@ -21683,14 +21683,14 @@
               <a:buNone/>
             </a:pPr>
             <a:r>
-              <a:rPr lang="en-US" sz="1600" b="1" dirty="0">
+              <a:rPr lang="en-US" sz="2150" b="1" dirty="0">
                 <a:solidFill>
                   <a:schemeClr val="tx2"/>
                 </a:solidFill>
               </a:rPr>
               <a:t>❓ ถูกออกจากระบบเอง</a:t>
             </a:r>
-            <a:endParaRPr lang="en-US" sz="1600" dirty="0"/>
+            <a:endParaRPr lang="en-US" sz="2150" dirty="0"/>
           </a:p>
           <a:p>
             <a:pPr indent="0" marL="0">
@@ -21700,14 +21700,14 @@
               <a:buNone/>
             </a:pPr>
             <a:r>
-              <a:rPr lang="en-US" sz="1400" dirty="0">
+              <a:rPr lang="en-US" sz="1900" dirty="0">
                 <a:solidFill>
                   <a:schemeClr val="tx1"/>
                 </a:solidFill>
               </a:rPr>
               <a:t>ไม่ได้ใช้งาน 60 นาที เข้าสู่ระบบใหม่ได้ทันที</a:t>
             </a:r>
-            <a:endParaRPr lang="en-US" sz="1600" dirty="0"/>
+            <a:endParaRPr lang="en-US" sz="2150" dirty="0"/>
           </a:p>
         </p:txBody>
       </p:sp>
@@ -21739,7 +21739,7 @@
           <a:bodyPr/>
           <a:lstStyle>
             <a:lvl1pPr>
-              <a:defRPr sz="1000">
+              <a:defRPr sz="1350">
                 <a:solidFill>
                   <a:schemeClr val="accent5"/>
                 </a:solidFill>
@@ -21808,14 +21808,14 @@
               <a:buNone/>
             </a:pPr>
             <a:r>
-              <a:rPr lang="en-US" sz="3000" b="1" dirty="0">
+              <a:rPr lang="en-US" sz="4050" b="1" dirty="0">
                 <a:solidFill>
                   <a:schemeClr val="tx2"/>
                 </a:solidFill>
               </a:rPr>
               <a:t>แบบทดสอบท้ายการอบรม</a:t>
             </a:r>
-            <a:endParaRPr lang="en-US" sz="3000" dirty="0"/>
+            <a:endParaRPr lang="en-US" sz="4050" dirty="0"/>
           </a:p>
         </p:txBody>
       </p:sp>
@@ -21869,14 +21869,14 @@
               <a:buNone/>
             </a:pPr>
             <a:r>
-              <a:rPr lang="en-US" sz="1300" b="1" dirty="0">
+              <a:rPr lang="en-US" sz="1750" b="1" dirty="0">
                 <a:solidFill>
                   <a:schemeClr val="bg1"/>
                 </a:solidFill>
               </a:rPr>
               <a:t>1</a:t>
             </a:r>
-            <a:endParaRPr lang="en-US" sz="1300" dirty="0"/>
+            <a:endParaRPr lang="en-US" sz="1750" dirty="0"/>
           </a:p>
         </p:txBody>
       </p:sp>
@@ -21889,7 +21889,7 @@
         <p:spPr>
           <a:xfrm>
             <a:off x="932688" y="1417320"/>
-            <a:ext cx="6382512" cy="418338"/>
+            <a:ext cx="6382512" cy="498666"/>
           </a:xfrm>
           <a:prstGeom prst="rect">
             <a:avLst/>
@@ -21905,14 +21905,14 @@
               <a:buNone/>
             </a:pPr>
             <a:r>
-              <a:rPr lang="en-US" sz="1800" dirty="0">
+              <a:rPr lang="en-US" sz="2450" dirty="0">
                 <a:solidFill>
                   <a:schemeClr val="tx1"/>
                 </a:solidFill>
               </a:rPr>
               <a:t>เข้าสู่ระบบต้องใช้บัญชีใด</a:t>
             </a:r>
-            <a:endParaRPr lang="en-US" sz="1800" dirty="0"/>
+            <a:endParaRPr lang="en-US" sz="2450" dirty="0"/>
           </a:p>
         </p:txBody>
       </p:sp>
@@ -21924,7 +21924,7 @@
         </p:nvSpPr>
         <p:spPr>
           <a:xfrm>
-            <a:off x="457200" y="2137410"/>
+            <a:off x="457200" y="2217737"/>
             <a:ext cx="329184" cy="329184"/>
           </a:xfrm>
           <a:prstGeom prst="ellipse">
@@ -21949,7 +21949,7 @@
         </p:nvSpPr>
         <p:spPr>
           <a:xfrm>
-            <a:off x="457200" y="2137410"/>
+            <a:off x="457200" y="2217737"/>
             <a:ext cx="329184" cy="329184"/>
           </a:xfrm>
           <a:prstGeom prst="rect">
@@ -21966,14 +21966,14 @@
               <a:buNone/>
             </a:pPr>
             <a:r>
-              <a:rPr lang="en-US" sz="1300" b="1" dirty="0">
+              <a:rPr lang="en-US" sz="1750" b="1" dirty="0">
                 <a:solidFill>
                   <a:schemeClr val="bg1"/>
                 </a:solidFill>
               </a:rPr>
               <a:t>2</a:t>
             </a:r>
-            <a:endParaRPr lang="en-US" sz="1300" dirty="0"/>
+            <a:endParaRPr lang="en-US" sz="1750" dirty="0"/>
           </a:p>
         </p:txBody>
       </p:sp>
@@ -21985,8 +21985,8 @@
         </p:nvSpPr>
         <p:spPr>
           <a:xfrm>
-            <a:off x="932688" y="2109978"/>
-            <a:ext cx="6382512" cy="418338"/>
+            <a:off x="932688" y="2190306"/>
+            <a:ext cx="6382512" cy="498666"/>
           </a:xfrm>
           <a:prstGeom prst="rect">
             <a:avLst/>
@@ -22002,14 +22002,14 @@
               <a:buNone/>
             </a:pPr>
             <a:r>
-              <a:rPr lang="en-US" sz="1800" dirty="0">
+              <a:rPr lang="en-US" sz="2450" dirty="0">
                 <a:solidFill>
                   <a:schemeClr val="tx1"/>
                 </a:solidFill>
               </a:rPr>
               <a:t>ตัวเลขแดงบนเมนู “ติดตามสถานะ” หมายถึงอะไร</a:t>
             </a:r>
-            <a:endParaRPr lang="en-US" sz="1800" dirty="0"/>
+            <a:endParaRPr lang="en-US" sz="2450" dirty="0"/>
           </a:p>
         </p:txBody>
       </p:sp>
@@ -22021,7 +22021,7 @@
         </p:nvSpPr>
         <p:spPr>
           <a:xfrm>
-            <a:off x="457200" y="2830068"/>
+            <a:off x="457200" y="2990723"/>
             <a:ext cx="329184" cy="329184"/>
           </a:xfrm>
           <a:prstGeom prst="ellipse">
@@ -22046,7 +22046,7 @@
         </p:nvSpPr>
         <p:spPr>
           <a:xfrm>
-            <a:off x="457200" y="2830068"/>
+            <a:off x="457200" y="2990723"/>
             <a:ext cx="329184" cy="329184"/>
           </a:xfrm>
           <a:prstGeom prst="rect">
@@ -22063,14 +22063,14 @@
               <a:buNone/>
             </a:pPr>
             <a:r>
-              <a:rPr lang="en-US" sz="1300" b="1" dirty="0">
+              <a:rPr lang="en-US" sz="1750" b="1" dirty="0">
                 <a:solidFill>
                   <a:schemeClr val="bg1"/>
                 </a:solidFill>
               </a:rPr>
               <a:t>3</a:t>
             </a:r>
-            <a:endParaRPr lang="en-US" sz="1300" dirty="0"/>
+            <a:endParaRPr lang="en-US" sz="1750" dirty="0"/>
           </a:p>
         </p:txBody>
       </p:sp>
@@ -22082,8 +22082,8 @@
         </p:nvSpPr>
         <p:spPr>
           <a:xfrm>
-            <a:off x="932688" y="2802636"/>
-            <a:ext cx="6382512" cy="418338"/>
+            <a:off x="932688" y="2963291"/>
+            <a:ext cx="6382512" cy="498666"/>
           </a:xfrm>
           <a:prstGeom prst="rect">
             <a:avLst/>
@@ -22099,14 +22099,14 @@
               <a:buNone/>
             </a:pPr>
             <a:r>
-              <a:rPr lang="en-US" sz="1800" dirty="0">
+              <a:rPr lang="en-US" sz="2450" dirty="0">
                 <a:solidFill>
                   <a:schemeClr val="tx1"/>
                 </a:solidFill>
               </a:rPr>
               <a:t>คำขอถูก “ส่งกลับแก้ไข” ต้องทำอย่างไร</a:t>
             </a:r>
-            <a:endParaRPr lang="en-US" sz="1800" dirty="0"/>
+            <a:endParaRPr lang="en-US" sz="2450" dirty="0"/>
           </a:p>
         </p:txBody>
       </p:sp>
@@ -22118,7 +22118,7 @@
         </p:nvSpPr>
         <p:spPr>
           <a:xfrm>
-            <a:off x="457200" y="3522726"/>
+            <a:off x="457200" y="3763709"/>
             <a:ext cx="329184" cy="329184"/>
           </a:xfrm>
           <a:prstGeom prst="ellipse">
@@ -22143,7 +22143,7 @@
         </p:nvSpPr>
         <p:spPr>
           <a:xfrm>
-            <a:off x="457200" y="3522726"/>
+            <a:off x="457200" y="3763709"/>
             <a:ext cx="329184" cy="329184"/>
           </a:xfrm>
           <a:prstGeom prst="rect">
@@ -22160,14 +22160,14 @@
               <a:buNone/>
             </a:pPr>
             <a:r>
-              <a:rPr lang="en-US" sz="1300" b="1" dirty="0">
+              <a:rPr lang="en-US" sz="1750" b="1" dirty="0">
                 <a:solidFill>
                   <a:schemeClr val="bg1"/>
                 </a:solidFill>
               </a:rPr>
               <a:t>4</a:t>
             </a:r>
-            <a:endParaRPr lang="en-US" sz="1300" dirty="0"/>
+            <a:endParaRPr lang="en-US" sz="1750" dirty="0"/>
           </a:p>
         </p:txBody>
       </p:sp>
@@ -22179,8 +22179,8 @@
         </p:nvSpPr>
         <p:spPr>
           <a:xfrm>
-            <a:off x="932688" y="3495294"/>
-            <a:ext cx="6382512" cy="418338"/>
+            <a:off x="932688" y="3736277"/>
+            <a:ext cx="6382512" cy="498666"/>
           </a:xfrm>
           <a:prstGeom prst="rect">
             <a:avLst/>
@@ -22196,14 +22196,14 @@
               <a:buNone/>
             </a:pPr>
             <a:r>
-              <a:rPr lang="en-US" sz="1800" dirty="0">
+              <a:rPr lang="en-US" sz="2450" dirty="0">
                 <a:solidFill>
                   <a:schemeClr val="tx1"/>
                 </a:solidFill>
               </a:rPr>
               <a:t>ผู้อนุมัติอนุมัติได้ทางใดบ้าง</a:t>
             </a:r>
-            <a:endParaRPr lang="en-US" sz="1800" dirty="0"/>
+            <a:endParaRPr lang="en-US" sz="2450" dirty="0"/>
           </a:p>
         </p:txBody>
       </p:sp>
@@ -22215,7 +22215,7 @@
         </p:nvSpPr>
         <p:spPr>
           <a:xfrm>
-            <a:off x="457200" y="4215384"/>
+            <a:off x="457200" y="4536694"/>
             <a:ext cx="329184" cy="329184"/>
           </a:xfrm>
           <a:prstGeom prst="ellipse">
@@ -22240,7 +22240,7 @@
         </p:nvSpPr>
         <p:spPr>
           <a:xfrm>
-            <a:off x="457200" y="4215384"/>
+            <a:off x="457200" y="4536694"/>
             <a:ext cx="329184" cy="329184"/>
           </a:xfrm>
           <a:prstGeom prst="rect">
@@ -22257,14 +22257,14 @@
               <a:buNone/>
             </a:pPr>
             <a:r>
-              <a:rPr lang="en-US" sz="1300" b="1" dirty="0">
+              <a:rPr lang="en-US" sz="1750" b="1" dirty="0">
                 <a:solidFill>
                   <a:schemeClr val="bg1"/>
                 </a:solidFill>
               </a:rPr>
               <a:t>5</a:t>
             </a:r>
-            <a:endParaRPr lang="en-US" sz="1300" dirty="0"/>
+            <a:endParaRPr lang="en-US" sz="1750" dirty="0"/>
           </a:p>
         </p:txBody>
       </p:sp>
@@ -22276,8 +22276,8 @@
         </p:nvSpPr>
         <p:spPr>
           <a:xfrm>
-            <a:off x="932688" y="4187952"/>
-            <a:ext cx="6382512" cy="418338"/>
+            <a:off x="932688" y="4509262"/>
+            <a:ext cx="6382512" cy="498666"/>
           </a:xfrm>
           <a:prstGeom prst="rect">
             <a:avLst/>
@@ -22293,14 +22293,14 @@
               <a:buNone/>
             </a:pPr>
             <a:r>
-              <a:rPr lang="en-US" sz="1800" dirty="0">
+              <a:rPr lang="en-US" sz="2450" dirty="0">
                 <a:solidFill>
                   <a:schemeClr val="tx1"/>
                 </a:solidFill>
               </a:rPr>
               <a:t>การเงินแนบสลิปได้กี่วิธี อะไรบ้าง</a:t>
             </a:r>
-            <a:endParaRPr lang="en-US" sz="1800" dirty="0"/>
+            <a:endParaRPr lang="en-US" sz="2450" dirty="0"/>
           </a:p>
         </p:txBody>
       </p:sp>
@@ -22356,56 +22356,56 @@
               <a:buNone/>
             </a:pPr>
             <a:r>
-              <a:rPr lang="en-US" sz="1500" dirty="0">
+              <a:rPr lang="en-US" sz="2050" dirty="0">
                 <a:solidFill>
                   <a:srgbClr val="B9CDE6"/>
                 </a:solidFill>
               </a:rPr>
               <a:t>10 ข้อเต็ม</a:t>
             </a:r>
-            <a:endParaRPr lang="en-US" sz="1500" dirty="0"/>
-          </a:p>
-          <a:p>
-            <a:pPr indent="0" marL="0">
-              <a:buNone/>
-            </a:pPr>
-            <a:r>
-              <a:rPr lang="en-US" sz="2200" b="1" dirty="0">
+            <a:endParaRPr lang="en-US" sz="2050" dirty="0"/>
+          </a:p>
+          <a:p>
+            <a:pPr indent="0" marL="0">
+              <a:buNone/>
+            </a:pPr>
+            <a:r>
+              <a:rPr lang="en-US" sz="2950" b="1" dirty="0">
                 <a:solidFill>
                   <a:schemeClr val="bg1"/>
                 </a:solidFill>
               </a:rPr>
               <a:t>อยู่ในคู่มือบทที่ 20</a:t>
             </a:r>
-            <a:endParaRPr lang="en-US" sz="1500" dirty="0"/>
-          </a:p>
-          <a:p>
-            <a:pPr indent="0" marL="0">
-              <a:buNone/>
-            </a:pPr>
-            <a:r>
-              <a:rPr lang="en-US" sz="1000" dirty="0">
+            <a:endParaRPr lang="en-US" sz="2050" dirty="0"/>
+          </a:p>
+          <a:p>
+            <a:pPr indent="0" marL="0">
+              <a:buNone/>
+            </a:pPr>
+            <a:r>
+              <a:rPr lang="en-US" sz="1350" dirty="0">
                 <a:solidFill>
                   <a:srgbClr val="000000"/>
                 </a:solidFill>
               </a:rPr>
               <a:t> </a:t>
             </a:r>
-            <a:endParaRPr lang="en-US" sz="1500" dirty="0"/>
-          </a:p>
-          <a:p>
-            <a:pPr indent="0" marL="0">
-              <a:buNone/>
-            </a:pPr>
-            <a:r>
-              <a:rPr lang="en-US" sz="1500" dirty="0">
+            <a:endParaRPr lang="en-US" sz="2050" dirty="0"/>
+          </a:p>
+          <a:p>
+            <a:pPr indent="0" marL="0">
+              <a:buNone/>
+            </a:pPr>
+            <a:r>
+              <a:rPr lang="en-US" sz="2050" dirty="0">
                 <a:solidFill>
                   <a:schemeClr val="bg1"/>
                 </a:solidFill>
               </a:rPr>
               <a:t>เกณฑ์ผ่าน 8 ข้อ · มีเฉลยท้ายบท</a:t>
             </a:r>
-            <a:endParaRPr lang="en-US" sz="1500" dirty="0"/>
+            <a:endParaRPr lang="en-US" sz="2050" dirty="0"/>
           </a:p>
         </p:txBody>
       </p:sp>
@@ -22437,7 +22437,7 @@
           <a:bodyPr/>
           <a:lstStyle>
             <a:lvl1pPr>
-              <a:defRPr sz="1000">
+              <a:defRPr sz="1350">
                 <a:solidFill>
                   <a:schemeClr val="accent5"/>
                 </a:solidFill>
@@ -22557,14 +22557,14 @@
               <a:buNone/>
             </a:pPr>
             <a:r>
-              <a:rPr lang="en-US" sz="4000" b="1" dirty="0">
+              <a:rPr lang="en-US" sz="5400" b="1" dirty="0">
                 <a:solidFill>
                   <a:schemeClr val="bg1"/>
                 </a:solidFill>
               </a:rPr>
               <a:t>ขอบคุณครับ / ค่ะ</a:t>
             </a:r>
-            <a:endParaRPr lang="en-US" sz="4000" dirty="0"/>
+            <a:endParaRPr lang="en-US" sz="5400" dirty="0"/>
           </a:p>
         </p:txBody>
       </p:sp>
@@ -22595,14 +22595,14 @@
               <a:buNone/>
             </a:pPr>
             <a:r>
-              <a:rPr lang="en-US" sz="1800" dirty="0">
+              <a:rPr lang="en-US" sz="2450" dirty="0">
                 <a:solidFill>
                   <a:schemeClr val="bg1"/>
                 </a:solidFill>
               </a:rPr>
               <a:t>มีคำถาม ติดต่อผู้ดูแลระบบได้ตลอด</a:t>
             </a:r>
-            <a:endParaRPr lang="en-US" sz="1800" dirty="0"/>
+            <a:endParaRPr lang="en-US" sz="2450" dirty="0"/>
           </a:p>
         </p:txBody>
       </p:sp>
@@ -22658,28 +22658,28 @@
               <a:buNone/>
             </a:pPr>
             <a:r>
-              <a:rPr lang="en-US" sz="1200" dirty="0">
+              <a:rPr lang="en-US" sz="1600" dirty="0">
                 <a:solidFill>
                   <a:srgbClr val="B9CDE6"/>
                 </a:solidFill>
               </a:rPr>
               <a:t>คู่มือฉบับเต็ม</a:t>
             </a:r>
-            <a:endParaRPr lang="en-US" sz="1200" dirty="0"/>
-          </a:p>
-          <a:p>
-            <a:pPr indent="0" marL="0">
-              <a:buNone/>
-            </a:pPr>
-            <a:r>
-              <a:rPr lang="en-US" sz="1500" b="1" dirty="0">
+            <a:endParaRPr lang="en-US" sz="1600" dirty="0"/>
+          </a:p>
+          <a:p>
+            <a:pPr indent="0" marL="0">
+              <a:buNone/>
+            </a:pPr>
+            <a:r>
+              <a:rPr lang="en-US" sz="1750" b="1" dirty="0">
                 <a:solidFill>
                   <a:schemeClr val="bg1"/>
                 </a:solidFill>
               </a:rPr>
               <a:t>หน้าแรก → คู่มือการใช้งาน</a:t>
             </a:r>
-            <a:endParaRPr lang="en-US" sz="1200" dirty="0"/>
+            <a:endParaRPr lang="en-US" sz="1600" dirty="0"/>
           </a:p>
         </p:txBody>
       </p:sp>
@@ -22735,28 +22735,28 @@
               <a:buNone/>
             </a:pPr>
             <a:r>
-              <a:rPr lang="en-US" sz="1200" dirty="0">
+              <a:rPr lang="en-US" sz="1600" dirty="0">
                 <a:solidFill>
                   <a:srgbClr val="B9CDE6"/>
                 </a:solidFill>
               </a:rPr>
               <a:t>ผู้ดูแลระบบ</a:t>
             </a:r>
-            <a:endParaRPr lang="en-US" sz="1200" dirty="0"/>
-          </a:p>
-          <a:p>
-            <a:pPr indent="0" marL="0">
-              <a:buNone/>
-            </a:pPr>
-            <a:r>
-              <a:rPr lang="en-US" sz="1500" b="1" dirty="0">
+            <a:endParaRPr lang="en-US" sz="1600" dirty="0"/>
+          </a:p>
+          <a:p>
+            <a:pPr indent="0" marL="0">
+              <a:buNone/>
+            </a:pPr>
+            <a:r>
+              <a:rPr lang="en-US" sz="1750" b="1" dirty="0">
                 <a:solidFill>
                   <a:schemeClr val="bg1"/>
                 </a:solidFill>
               </a:rPr>
               <a:t>ต่อ 216 · it@primepower.co.th</a:t>
             </a:r>
-            <a:endParaRPr lang="en-US" sz="1200" dirty="0"/>
+            <a:endParaRPr lang="en-US" sz="1600" dirty="0"/>
           </a:p>
         </p:txBody>
       </p:sp>
@@ -22812,28 +22812,28 @@
               <a:buNone/>
             </a:pPr>
             <a:r>
-              <a:rPr lang="en-US" sz="1200" dirty="0">
+              <a:rPr lang="en-US" sz="1600" dirty="0">
                 <a:solidFill>
                   <a:srgbClr val="B9CDE6"/>
                 </a:solidFill>
               </a:rPr>
               <a:t>เวลาให้บริการ</a:t>
             </a:r>
-            <a:endParaRPr lang="en-US" sz="1200" dirty="0"/>
-          </a:p>
-          <a:p>
-            <a:pPr indent="0" marL="0">
-              <a:buNone/>
-            </a:pPr>
-            <a:r>
-              <a:rPr lang="en-US" sz="1500" b="1" dirty="0">
+            <a:endParaRPr lang="en-US" sz="1600" dirty="0"/>
+          </a:p>
+          <a:p>
+            <a:pPr indent="0" marL="0">
+              <a:buNone/>
+            </a:pPr>
+            <a:r>
+              <a:rPr lang="en-US" sz="1750" b="1" dirty="0">
                 <a:solidFill>
                   <a:schemeClr val="bg1"/>
                 </a:solidFill>
               </a:rPr>
               <a:t>จันทร์–ศุกร์ 08:30–17:30 น.</a:t>
             </a:r>
-            <a:endParaRPr lang="en-US" sz="1200" dirty="0"/>
+            <a:endParaRPr lang="en-US" sz="1600" dirty="0"/>
           </a:p>
         </p:txBody>
       </p:sp>
@@ -22889,14 +22889,14 @@
               <a:buNone/>
             </a:pPr>
             <a:r>
-              <a:rPr lang="en-US" sz="3000" b="1" dirty="0">
+              <a:rPr lang="en-US" sz="4050" b="1" dirty="0">
                 <a:solidFill>
                   <a:schemeClr val="tx2"/>
                 </a:solidFill>
               </a:rPr>
               <a:t>ตัวอย่างงานจริงที่จะเดินไปด้วยกันวันนี้</a:t>
             </a:r>
-            <a:endParaRPr lang="en-US" sz="3000" dirty="0"/>
+            <a:endParaRPr lang="en-US" sz="4050" dirty="0"/>
           </a:p>
         </p:txBody>
       </p:sp>
@@ -22925,14 +22925,14 @@
               <a:buNone/>
             </a:pPr>
             <a:r>
-              <a:rPr lang="en-US" sz="1600" dirty="0">
+              <a:rPr lang="en-US" sz="2150" dirty="0">
                 <a:solidFill>
                   <a:schemeClr val="accent5"/>
                 </a:solidFill>
               </a:rPr>
               <a:t>คุณชัยวัฒน์ขอเบิกเงินทดรองจ่าย 12,500 บาท ค่าวัสดุติดตั้งหน้างานโครงการบางปะกง (ข้อมูลตัวอย่าง)</a:t>
             </a:r>
-            <a:endParaRPr lang="en-US" sz="1600" dirty="0"/>
+            <a:endParaRPr lang="en-US" sz="2150" dirty="0"/>
           </a:p>
         </p:txBody>
       </p:sp>
@@ -23013,14 +23013,14 @@
               <a:buNone/>
             </a:pPr>
             <a:r>
-              <a:rPr lang="en-US" sz="3000" b="1" dirty="0">
+              <a:rPr lang="en-US" sz="4050" b="1" dirty="0">
                 <a:solidFill>
                   <a:schemeClr val="bg1"/>
                 </a:solidFill>
               </a:rPr>
               <a:t>ต</a:t>
             </a:r>
-            <a:endParaRPr lang="en-US" sz="3000" dirty="0"/>
+            <a:endParaRPr lang="en-US" sz="4050" dirty="0"/>
           </a:p>
         </p:txBody>
       </p:sp>
@@ -23032,8 +23032,8 @@
         </p:nvSpPr>
         <p:spPr>
           <a:xfrm>
-            <a:off x="594360" y="3200400"/>
-            <a:ext cx="2377440" cy="411480"/>
+            <a:off x="548640" y="3200400"/>
+            <a:ext cx="2468880" cy="411480"/>
           </a:xfrm>
           <a:prstGeom prst="rect">
             <a:avLst/>
@@ -23049,14 +23049,14 @@
               <a:buNone/>
             </a:pPr>
             <a:r>
-              <a:rPr lang="en-US" sz="1600" b="1" dirty="0">
+              <a:rPr lang="en-US" sz="1900" b="1" dirty="0">
                 <a:solidFill>
                   <a:schemeClr val="tx2"/>
                 </a:solidFill>
               </a:rPr>
               <a:t>คุณชัยวัฒน์ พูนผล</a:t>
             </a:r>
-            <a:endParaRPr lang="en-US" sz="1600" dirty="0"/>
+            <a:endParaRPr lang="en-US" sz="1900" dirty="0"/>
           </a:p>
         </p:txBody>
       </p:sp>
@@ -23085,14 +23085,14 @@
               <a:buNone/>
             </a:pPr>
             <a:r>
-              <a:rPr lang="en-US" sz="1300" dirty="0">
+              <a:rPr lang="en-US" sz="1750" dirty="0">
                 <a:solidFill>
                   <a:schemeClr val="accent5"/>
                 </a:solidFill>
               </a:rPr>
-              <a:t>วิศวกร แผนกออกแบบระบบไฟฟ้า</a:t>
-            </a:r>
-            <a:endParaRPr lang="en-US" sz="1300" dirty="0"/>
+              <a:t>วิศวกรออกแบบระบบไฟฟ้า</a:t>
+            </a:r>
+            <a:endParaRPr lang="en-US" sz="1750" dirty="0"/>
           </a:p>
         </p:txBody>
       </p:sp>
@@ -23148,14 +23148,14 @@
               <a:buNone/>
             </a:pPr>
             <a:r>
-              <a:rPr lang="en-US" sz="1300" b="1" dirty="0">
+              <a:rPr lang="en-US" sz="1750" b="1" dirty="0">
                 <a:solidFill>
                   <a:schemeClr val="bg1"/>
                 </a:solidFill>
               </a:rPr>
               <a:t>ผู้ยื่นคำขอ</a:t>
             </a:r>
-            <a:endParaRPr lang="en-US" sz="1300" dirty="0"/>
+            <a:endParaRPr lang="en-US" sz="1750" dirty="0"/>
           </a:p>
         </p:txBody>
       </p:sp>
@@ -23184,14 +23184,14 @@
               <a:buNone/>
             </a:pPr>
             <a:r>
-              <a:rPr lang="en-US" sz="1800" dirty="0">
+              <a:rPr lang="en-US" sz="2450" dirty="0">
                 <a:solidFill>
                   <a:schemeClr val="accent5"/>
                 </a:solidFill>
               </a:rPr>
               <a:t>➜</a:t>
             </a:r>
-            <a:endParaRPr lang="en-US" sz="1800" dirty="0"/>
+            <a:endParaRPr lang="en-US" sz="2450" dirty="0"/>
           </a:p>
         </p:txBody>
       </p:sp>
@@ -23272,14 +23272,14 @@
               <a:buNone/>
             </a:pPr>
             <a:r>
-              <a:rPr lang="en-US" sz="3000" b="1" dirty="0">
+              <a:rPr lang="en-US" sz="4050" b="1" dirty="0">
                 <a:solidFill>
                   <a:schemeClr val="bg1"/>
                 </a:solidFill>
               </a:rPr>
               <a:t>ธ</a:t>
             </a:r>
-            <a:endParaRPr lang="en-US" sz="3000" dirty="0"/>
+            <a:endParaRPr lang="en-US" sz="4050" dirty="0"/>
           </a:p>
         </p:txBody>
       </p:sp>
@@ -23291,8 +23291,8 @@
         </p:nvSpPr>
         <p:spPr>
           <a:xfrm>
-            <a:off x="3447288" y="3200400"/>
-            <a:ext cx="2377440" cy="411480"/>
+            <a:off x="3401568" y="3200400"/>
+            <a:ext cx="2468880" cy="411480"/>
           </a:xfrm>
           <a:prstGeom prst="rect">
             <a:avLst/>
@@ -23308,14 +23308,14 @@
               <a:buNone/>
             </a:pPr>
             <a:r>
-              <a:rPr lang="en-US" sz="1600" b="1" dirty="0">
+              <a:rPr lang="en-US" sz="1900" b="1" dirty="0">
                 <a:solidFill>
                   <a:schemeClr val="tx2"/>
                 </a:solidFill>
               </a:rPr>
               <a:t>คุณธีรพงศ์ สายทอง</a:t>
             </a:r>
-            <a:endParaRPr lang="en-US" sz="1600" dirty="0"/>
+            <a:endParaRPr lang="en-US" sz="1900" dirty="0"/>
           </a:p>
         </p:txBody>
       </p:sp>
@@ -23344,14 +23344,14 @@
               <a:buNone/>
             </a:pPr>
             <a:r>
-              <a:rPr lang="en-US" sz="1300" dirty="0">
+              <a:rPr lang="en-US" sz="1750" dirty="0">
                 <a:solidFill>
                   <a:schemeClr val="accent5"/>
                 </a:solidFill>
               </a:rPr>
               <a:t>ผู้จัดการแผนก</a:t>
             </a:r>
-            <a:endParaRPr lang="en-US" sz="1300" dirty="0"/>
+            <a:endParaRPr lang="en-US" sz="1750" dirty="0"/>
           </a:p>
         </p:txBody>
       </p:sp>
@@ -23407,14 +23407,14 @@
               <a:buNone/>
             </a:pPr>
             <a:r>
-              <a:rPr lang="en-US" sz="1300" b="1" dirty="0">
+              <a:rPr lang="en-US" sz="1750" b="1" dirty="0">
                 <a:solidFill>
                   <a:schemeClr val="bg1"/>
                 </a:solidFill>
               </a:rPr>
               <a:t>อนุมัติลำดับ 1</a:t>
             </a:r>
-            <a:endParaRPr lang="en-US" sz="1300" dirty="0"/>
+            <a:endParaRPr lang="en-US" sz="1750" dirty="0"/>
           </a:p>
         </p:txBody>
       </p:sp>
@@ -23443,14 +23443,14 @@
               <a:buNone/>
             </a:pPr>
             <a:r>
-              <a:rPr lang="en-US" sz="1800" dirty="0">
+              <a:rPr lang="en-US" sz="2450" dirty="0">
                 <a:solidFill>
                   <a:schemeClr val="accent5"/>
                 </a:solidFill>
               </a:rPr>
               <a:t>➜</a:t>
             </a:r>
-            <a:endParaRPr lang="en-US" sz="1800" dirty="0"/>
+            <a:endParaRPr lang="en-US" sz="2450" dirty="0"/>
           </a:p>
         </p:txBody>
       </p:sp>
@@ -23531,14 +23531,14 @@
               <a:buNone/>
             </a:pPr>
             <a:r>
-              <a:rPr lang="en-US" sz="3000" b="1" dirty="0">
+              <a:rPr lang="en-US" sz="4050" b="1" dirty="0">
                 <a:solidFill>
                   <a:schemeClr val="bg1"/>
                 </a:solidFill>
               </a:rPr>
               <a:t>ส</a:t>
             </a:r>
-            <a:endParaRPr lang="en-US" sz="3000" dirty="0"/>
+            <a:endParaRPr lang="en-US" sz="4050" dirty="0"/>
           </a:p>
         </p:txBody>
       </p:sp>
@@ -23550,8 +23550,8 @@
         </p:nvSpPr>
         <p:spPr>
           <a:xfrm>
-            <a:off x="6300216" y="3200400"/>
-            <a:ext cx="2377440" cy="411480"/>
+            <a:off x="6254496" y="3200400"/>
+            <a:ext cx="2468880" cy="411480"/>
           </a:xfrm>
           <a:prstGeom prst="rect">
             <a:avLst/>
@@ -23567,14 +23567,14 @@
               <a:buNone/>
             </a:pPr>
             <a:r>
-              <a:rPr lang="en-US" sz="1600" b="1" dirty="0">
+              <a:rPr lang="en-US" sz="1900" b="1" dirty="0">
                 <a:solidFill>
                   <a:schemeClr val="tx2"/>
                 </a:solidFill>
               </a:rPr>
               <a:t>คุณสมชาย วัฒนกิจ</a:t>
             </a:r>
-            <a:endParaRPr lang="en-US" sz="1600" dirty="0"/>
+            <a:endParaRPr lang="en-US" sz="1900" dirty="0"/>
           </a:p>
         </p:txBody>
       </p:sp>
@@ -23603,14 +23603,14 @@
               <a:buNone/>
             </a:pPr>
             <a:r>
-              <a:rPr lang="en-US" sz="1300" dirty="0">
+              <a:rPr lang="en-US" sz="1750" dirty="0">
                 <a:solidFill>
                   <a:schemeClr val="accent5"/>
                 </a:solidFill>
               </a:rPr>
               <a:t>กรรมการผู้จัดการ</a:t>
             </a:r>
-            <a:endParaRPr lang="en-US" sz="1300" dirty="0"/>
+            <a:endParaRPr lang="en-US" sz="1750" dirty="0"/>
           </a:p>
         </p:txBody>
       </p:sp>
@@ -23666,14 +23666,14 @@
               <a:buNone/>
             </a:pPr>
             <a:r>
-              <a:rPr lang="en-US" sz="1300" b="1" dirty="0">
+              <a:rPr lang="en-US" sz="1750" b="1" dirty="0">
                 <a:solidFill>
                   <a:schemeClr val="bg1"/>
                 </a:solidFill>
               </a:rPr>
               <a:t>อนุมัติลำดับ 2</a:t>
             </a:r>
-            <a:endParaRPr lang="en-US" sz="1300" dirty="0"/>
+            <a:endParaRPr lang="en-US" sz="1750" dirty="0"/>
           </a:p>
         </p:txBody>
       </p:sp>
@@ -23702,14 +23702,14 @@
               <a:buNone/>
             </a:pPr>
             <a:r>
-              <a:rPr lang="en-US" sz="1800" dirty="0">
+              <a:rPr lang="en-US" sz="2450" dirty="0">
                 <a:solidFill>
                   <a:schemeClr val="accent5"/>
                 </a:solidFill>
               </a:rPr>
               <a:t>➜</a:t>
             </a:r>
-            <a:endParaRPr lang="en-US" sz="1800" dirty="0"/>
+            <a:endParaRPr lang="en-US" sz="2450" dirty="0"/>
           </a:p>
         </p:txBody>
       </p:sp>
@@ -23790,14 +23790,14 @@
               <a:buNone/>
             </a:pPr>
             <a:r>
-              <a:rPr lang="en-US" sz="3000" b="1" dirty="0">
+              <a:rPr lang="en-US" sz="4050" b="1" dirty="0">
                 <a:solidFill>
                   <a:schemeClr val="bg1"/>
                 </a:solidFill>
               </a:rPr>
               <a:t>อ</a:t>
             </a:r>
-            <a:endParaRPr lang="en-US" sz="3000" dirty="0"/>
+            <a:endParaRPr lang="en-US" sz="4050" dirty="0"/>
           </a:p>
         </p:txBody>
       </p:sp>
@@ -23809,8 +23809,8 @@
         </p:nvSpPr>
         <p:spPr>
           <a:xfrm>
-            <a:off x="9153144" y="3200400"/>
-            <a:ext cx="2377440" cy="411480"/>
+            <a:off x="9107424" y="3200400"/>
+            <a:ext cx="2468880" cy="411480"/>
           </a:xfrm>
           <a:prstGeom prst="rect">
             <a:avLst/>
@@ -23826,14 +23826,14 @@
               <a:buNone/>
             </a:pPr>
             <a:r>
-              <a:rPr lang="en-US" sz="1600" b="1" dirty="0">
+              <a:rPr lang="en-US" sz="1900" b="1" dirty="0">
                 <a:solidFill>
                   <a:schemeClr val="tx2"/>
                 </a:solidFill>
               </a:rPr>
               <a:t>คุณอรวรรณ พงษ์เจริญ</a:t>
             </a:r>
-            <a:endParaRPr lang="en-US" sz="1600" dirty="0"/>
+            <a:endParaRPr lang="en-US" sz="1900" dirty="0"/>
           </a:p>
         </p:txBody>
       </p:sp>
@@ -23862,14 +23862,14 @@
               <a:buNone/>
             </a:pPr>
             <a:r>
-              <a:rPr lang="en-US" sz="1300" dirty="0">
+              <a:rPr lang="en-US" sz="1750" dirty="0">
                 <a:solidFill>
                   <a:schemeClr val="accent5"/>
                 </a:solidFill>
               </a:rPr>
               <a:t>ฝ่ายบัญชีและการเงิน</a:t>
             </a:r>
-            <a:endParaRPr lang="en-US" sz="1300" dirty="0"/>
+            <a:endParaRPr lang="en-US" sz="1750" dirty="0"/>
           </a:p>
         </p:txBody>
       </p:sp>
@@ -23925,14 +23925,14 @@
               <a:buNone/>
             </a:pPr>
             <a:r>
-              <a:rPr lang="en-US" sz="1300" b="1" dirty="0">
+              <a:rPr lang="en-US" sz="1750" b="1" dirty="0">
                 <a:solidFill>
                   <a:schemeClr val="bg1"/>
                 </a:solidFill>
               </a:rPr>
               <a:t>โอนเงิน + แนบสลิป</a:t>
             </a:r>
-            <a:endParaRPr lang="en-US" sz="1300" dirty="0"/>
+            <a:endParaRPr lang="en-US" sz="1750" dirty="0"/>
           </a:p>
         </p:txBody>
       </p:sp>
@@ -23988,7 +23988,7 @@
               <a:buNone/>
             </a:pPr>
             <a:r>
-              <a:rPr lang="en-US" sz="1400" dirty="0">
+              <a:rPr lang="en-US" sz="1900" dirty="0">
                 <a:solidFill>
                   <a:schemeClr val="tx1"/>
                 </a:solidFill>
@@ -23999,7 +23999,7 @@
               <a:buNone/>
             </a:pPr>
             <a:r>
-              <a:rPr lang="en-US" sz="1400" dirty="0">
+              <a:rPr lang="en-US" sz="1900" dirty="0">
                 <a:solidFill>
                   <a:schemeClr val="tx1"/>
                 </a:solidFill>
@@ -24010,7 +24010,7 @@
               <a:buNone/>
             </a:pPr>
             <a:r>
-              <a:rPr lang="en-US" sz="1400" b="1" dirty="0">
+              <a:rPr lang="en-US" sz="1900" b="1" dirty="0">
                 <a:solidFill>
                   <a:schemeClr val="tx2"/>
                 </a:solidFill>
@@ -24021,14 +24021,14 @@
               <a:buNone/>
             </a:pPr>
             <a:r>
-              <a:rPr lang="en-US" sz="1400" dirty="0">
+              <a:rPr lang="en-US" sz="1900" dirty="0">
                 <a:solidFill>
                   <a:schemeClr val="tx1"/>
                 </a:solidFill>
               </a:rPr>
               <a:t> ชี้จุดที่ต้องดูหรือกด ตรงกับคำอธิบายข้างภาพ</a:t>
             </a:r>
-            <a:endParaRPr lang="en-US" sz="1400" dirty="0"/>
+            <a:endParaRPr lang="en-US" sz="1900" dirty="0"/>
           </a:p>
         </p:txBody>
       </p:sp>
@@ -24060,7 +24060,7 @@
           <a:bodyPr/>
           <a:lstStyle>
             <a:lvl1pPr>
-              <a:defRPr sz="1000">
+              <a:defRPr sz="1350">
                 <a:solidFill>
                   <a:schemeClr val="accent5"/>
                 </a:solidFill>
@@ -24152,14 +24152,14 @@
               <a:buNone/>
             </a:pPr>
             <a:r>
-              <a:rPr lang="en-US" sz="4000" b="1" dirty="0">
+              <a:rPr lang="en-US" sz="5400" b="1" dirty="0">
                 <a:solidFill>
                   <a:schemeClr val="bg1"/>
                 </a:solidFill>
               </a:rPr>
               <a:t>1</a:t>
             </a:r>
-            <a:endParaRPr lang="en-US" sz="4000" dirty="0"/>
+            <a:endParaRPr lang="en-US" sz="5400" dirty="0"/>
           </a:p>
         </p:txBody>
       </p:sp>
@@ -24190,14 +24190,14 @@
               <a:buNone/>
             </a:pPr>
             <a:r>
-              <a:rPr lang="en-US" sz="3800" b="1" dirty="0">
+              <a:rPr lang="en-US" sz="5150" b="1" dirty="0">
                 <a:solidFill>
                   <a:schemeClr val="bg1"/>
                 </a:solidFill>
               </a:rPr>
               <a:t>เริ่มต้นใช้งาน</a:t>
             </a:r>
-            <a:endParaRPr lang="en-US" sz="3800" dirty="0"/>
+            <a:endParaRPr lang="en-US" sz="5150" dirty="0"/>
           </a:p>
         </p:txBody>
       </p:sp>
@@ -24228,14 +24228,14 @@
               <a:buNone/>
             </a:pPr>
             <a:r>
-              <a:rPr lang="en-US" sz="1800" dirty="0">
+              <a:rPr lang="en-US" sz="2450" dirty="0">
                 <a:solidFill>
                   <a:schemeClr val="bg1"/>
                 </a:solidFill>
               </a:rPr>
               <a:t>เข้าสู่ระบบ · นโยบาย PDPA · หน้าแรกและเมนู</a:t>
             </a:r>
-            <a:endParaRPr lang="en-US" sz="1800" dirty="0"/>
+            <a:endParaRPr lang="en-US" sz="2450" dirty="0"/>
           </a:p>
         </p:txBody>
       </p:sp>
@@ -24291,14 +24291,14 @@
               <a:buNone/>
             </a:pPr>
             <a:r>
-              <a:rPr lang="en-US" sz="3000" b="1" dirty="0">
+              <a:rPr lang="en-US" sz="4050" b="1" dirty="0">
                 <a:solidFill>
                   <a:schemeClr val="tx2"/>
                 </a:solidFill>
               </a:rPr>
               <a:t>เข้าสู่ระบบด้วยบัญชี Microsoft 365</a:t>
             </a:r>
-            <a:endParaRPr lang="en-US" sz="3000" dirty="0"/>
+            <a:endParaRPr lang="en-US" sz="4050" dirty="0"/>
           </a:p>
         </p:txBody>
       </p:sp>
@@ -24408,14 +24408,14 @@
               <a:buNone/>
             </a:pPr>
             <a:r>
-              <a:rPr lang="en-US" sz="1300" b="1" dirty="0">
+              <a:rPr lang="en-US" sz="1750" b="1" dirty="0">
                 <a:solidFill>
                   <a:schemeClr val="bg1"/>
                 </a:solidFill>
               </a:rPr>
               <a:t>1</a:t>
             </a:r>
-            <a:endParaRPr lang="en-US" sz="1300" dirty="0"/>
+            <a:endParaRPr lang="en-US" sz="1750" dirty="0"/>
           </a:p>
         </p:txBody>
       </p:sp>
@@ -24428,7 +24428,7 @@
         <p:spPr>
           <a:xfrm>
             <a:off x="8065008" y="1325880"/>
-            <a:ext cx="3685032" cy="881253"/>
+            <a:ext cx="3685032" cy="712978"/>
           </a:xfrm>
           <a:prstGeom prst="rect">
             <a:avLst/>
@@ -24444,36 +24444,25 @@
               <a:buNone/>
             </a:pPr>
             <a:r>
-              <a:rPr lang="en-US" sz="1500" dirty="0">
+              <a:rPr lang="en-US" sz="1900" dirty="0">
                 <a:solidFill>
                   <a:schemeClr val="tx1"/>
                 </a:solidFill>
               </a:rPr>
-              <a:t>เปิด Edge หรือ Chrome ไปที่ </a:t>
-            </a:r>
-            <a:pPr indent="0" marL="0">
-              <a:buNone/>
-            </a:pPr>
-            <a:r>
-              <a:rPr lang="en-US" sz="1500" b="1" dirty="0">
+              <a:t>เปิด Edge / Chrome ไปที่ลิงก์ระบบ แล้ว</a:t>
+            </a:r>
+            <a:pPr indent="0" marL="0">
+              <a:buNone/>
+            </a:pPr>
+            <a:r>
+              <a:rPr lang="en-US" sz="1900" b="1" dirty="0">
                 <a:solidFill>
                   <a:schemeClr val="tx2"/>
                 </a:solidFill>
               </a:rPr>
-              <a:t>ppg2014.github.io/prime-power-intranet</a:t>
-            </a:r>
-            <a:pPr indent="0" marL="0">
-              <a:buNone/>
-            </a:pPr>
-            <a:r>
-              <a:rPr lang="en-US" sz="1500" dirty="0">
-                <a:solidFill>
-                  <a:schemeClr val="tx1"/>
-                </a:solidFill>
-              </a:rPr>
-              <a:t> แล้วกดดาวบันทึกไว้</a:t>
-            </a:r>
-            <a:endParaRPr lang="en-US" sz="1500" dirty="0"/>
+              <a:t>กดดาวบันทึกไว้</a:t>
+            </a:r>
+            <a:endParaRPr lang="en-US" sz="1900" dirty="0"/>
           </a:p>
         </p:txBody>
       </p:sp>
@@ -24485,7 +24474,7 @@
         </p:nvSpPr>
         <p:spPr>
           <a:xfrm>
-            <a:off x="7589520" y="2362581"/>
+            <a:off x="7589520" y="2194306"/>
             <a:ext cx="329184" cy="329184"/>
           </a:xfrm>
           <a:prstGeom prst="ellipse">
@@ -24510,7 +24499,7 @@
         </p:nvSpPr>
         <p:spPr>
           <a:xfrm>
-            <a:off x="7589520" y="2362581"/>
+            <a:off x="7589520" y="2194306"/>
             <a:ext cx="329184" cy="329184"/>
           </a:xfrm>
           <a:prstGeom prst="rect">
@@ -24527,14 +24516,14 @@
               <a:buNone/>
             </a:pPr>
             <a:r>
-              <a:rPr lang="en-US" sz="1300" b="1" dirty="0">
+              <a:rPr lang="en-US" sz="1750" b="1" dirty="0">
                 <a:solidFill>
                   <a:schemeClr val="bg1"/>
                 </a:solidFill>
               </a:rPr>
               <a:t>2</a:t>
             </a:r>
-            <a:endParaRPr lang="en-US" sz="1300" dirty="0"/>
+            <a:endParaRPr lang="en-US" sz="1750" dirty="0"/>
           </a:p>
         </p:txBody>
       </p:sp>
@@ -24546,8 +24535,8 @@
         </p:nvSpPr>
         <p:spPr>
           <a:xfrm>
-            <a:off x="8065008" y="2335149"/>
-            <a:ext cx="3685032" cy="624078"/>
+            <a:off x="8065008" y="2166874"/>
+            <a:ext cx="3685032" cy="712978"/>
           </a:xfrm>
           <a:prstGeom prst="rect">
             <a:avLst/>
@@ -24563,7 +24552,7 @@
               <a:buNone/>
             </a:pPr>
             <a:r>
-              <a:rPr lang="en-US" sz="1500" dirty="0">
+              <a:rPr lang="en-US" sz="1900" dirty="0">
                 <a:solidFill>
                   <a:schemeClr val="tx1"/>
                 </a:solidFill>
@@ -24574,7 +24563,7 @@
               <a:buNone/>
             </a:pPr>
             <a:r>
-              <a:rPr lang="en-US" sz="1500" b="1" dirty="0">
+              <a:rPr lang="en-US" sz="1900" b="1" dirty="0">
                 <a:solidFill>
                   <a:schemeClr val="tx2"/>
                 </a:solidFill>
@@ -24585,14 +24574,14 @@
               <a:buNone/>
             </a:pPr>
             <a:r>
-              <a:rPr lang="en-US" sz="1500" dirty="0">
+              <a:rPr lang="en-US" sz="1900" dirty="0">
                 <a:solidFill>
                   <a:schemeClr val="tx1"/>
                 </a:solidFill>
               </a:rPr>
               <a:t> (หมายเลข 1 ในภาพ)</a:t>
             </a:r>
-            <a:endParaRPr lang="en-US" sz="1500" dirty="0"/>
+            <a:endParaRPr lang="en-US" sz="1900" dirty="0"/>
           </a:p>
         </p:txBody>
       </p:sp>
@@ -24604,7 +24593,7 @@
         </p:nvSpPr>
         <p:spPr>
           <a:xfrm>
-            <a:off x="7589520" y="3114675"/>
+            <a:off x="7589520" y="3035300"/>
             <a:ext cx="329184" cy="329184"/>
           </a:xfrm>
           <a:prstGeom prst="ellipse">
@@ -24629,7 +24618,7 @@
         </p:nvSpPr>
         <p:spPr>
           <a:xfrm>
-            <a:off x="7589520" y="3114675"/>
+            <a:off x="7589520" y="3035300"/>
             <a:ext cx="329184" cy="329184"/>
           </a:xfrm>
           <a:prstGeom prst="rect">
@@ -24646,14 +24635,14 @@
               <a:buNone/>
             </a:pPr>
             <a:r>
-              <a:rPr lang="en-US" sz="1300" b="1" dirty="0">
+              <a:rPr lang="en-US" sz="1750" b="1" dirty="0">
                 <a:solidFill>
                   <a:schemeClr val="bg1"/>
                 </a:solidFill>
               </a:rPr>
               <a:t>3</a:t>
             </a:r>
-            <a:endParaRPr lang="en-US" sz="1300" dirty="0"/>
+            <a:endParaRPr lang="en-US" sz="1750" dirty="0"/>
           </a:p>
         </p:txBody>
       </p:sp>
@@ -24665,8 +24654,8 @@
         </p:nvSpPr>
         <p:spPr>
           <a:xfrm>
-            <a:off x="8065008" y="3087243"/>
-            <a:ext cx="3685032" cy="624078"/>
+            <a:off x="8065008" y="3007868"/>
+            <a:ext cx="3685032" cy="712978"/>
           </a:xfrm>
           <a:prstGeom prst="rect">
             <a:avLst/>
@@ -24682,7 +24671,7 @@
               <a:buNone/>
             </a:pPr>
             <a:r>
-              <a:rPr lang="en-US" sz="1500" dirty="0">
+              <a:rPr lang="en-US" sz="1900" dirty="0">
                 <a:solidFill>
                   <a:schemeClr val="tx1"/>
                 </a:solidFill>
@@ -24693,7 +24682,7 @@
               <a:buNone/>
             </a:pPr>
             <a:r>
-              <a:rPr lang="en-US" sz="1500" b="1" dirty="0">
+              <a:rPr lang="en-US" sz="1900" b="1" dirty="0">
                 <a:solidFill>
                   <a:schemeClr val="tx2"/>
                 </a:solidFill>
@@ -24704,14 +24693,14 @@
               <a:buNone/>
             </a:pPr>
             <a:r>
-              <a:rPr lang="en-US" sz="1500" dirty="0">
+              <a:rPr lang="en-US" sz="1900" dirty="0">
                 <a:solidFill>
                   <a:schemeClr val="tx1"/>
                 </a:solidFill>
               </a:rPr>
               <a:t> และรหัสผ่านเดียวกับ Outlook</a:t>
             </a:r>
-            <a:endParaRPr lang="en-US" sz="1500" dirty="0"/>
+            <a:endParaRPr lang="en-US" sz="1900" dirty="0"/>
           </a:p>
         </p:txBody>
       </p:sp>
@@ -24723,7 +24712,7 @@
         </p:nvSpPr>
         <p:spPr>
           <a:xfrm>
-            <a:off x="7589520" y="3866769"/>
+            <a:off x="7589520" y="3876294"/>
             <a:ext cx="329184" cy="329184"/>
           </a:xfrm>
           <a:prstGeom prst="ellipse">
@@ -24748,7 +24737,7 @@
         </p:nvSpPr>
         <p:spPr>
           <a:xfrm>
-            <a:off x="7589520" y="3866769"/>
+            <a:off x="7589520" y="3876294"/>
             <a:ext cx="329184" cy="329184"/>
           </a:xfrm>
           <a:prstGeom prst="rect">
@@ -24765,14 +24754,14 @@
               <a:buNone/>
             </a:pPr>
             <a:r>
-              <a:rPr lang="en-US" sz="1300" b="1" dirty="0">
+              <a:rPr lang="en-US" sz="1750" b="1" dirty="0">
                 <a:solidFill>
                   <a:schemeClr val="bg1"/>
                 </a:solidFill>
               </a:rPr>
               <a:t>4</a:t>
             </a:r>
-            <a:endParaRPr lang="en-US" sz="1300" dirty="0"/>
+            <a:endParaRPr lang="en-US" sz="1750" dirty="0"/>
           </a:p>
         </p:txBody>
       </p:sp>
@@ -24784,8 +24773,8 @@
         </p:nvSpPr>
         <p:spPr>
           <a:xfrm>
-            <a:off x="8065008" y="3839337"/>
-            <a:ext cx="3685032" cy="624078"/>
+            <a:off x="8065008" y="3848862"/>
+            <a:ext cx="3685032" cy="712978"/>
           </a:xfrm>
           <a:prstGeom prst="rect">
             <a:avLst/>
@@ -24801,7 +24790,7 @@
               <a:buNone/>
             </a:pPr>
             <a:r>
-              <a:rPr lang="en-US" sz="1500" dirty="0">
+              <a:rPr lang="en-US" sz="1900" dirty="0">
                 <a:solidFill>
                   <a:schemeClr val="tx1"/>
                 </a:solidFill>
@@ -24812,14 +24801,14 @@
               <a:buNone/>
             </a:pPr>
             <a:r>
-              <a:rPr lang="en-US" sz="1500" b="1" dirty="0">
+              <a:rPr lang="en-US" sz="1900" b="1" dirty="0">
                 <a:solidFill>
                   <a:schemeClr val="tx2"/>
                 </a:solidFill>
               </a:rPr>
               <a:t>Accept</a:t>
             </a:r>
-            <a:endParaRPr lang="en-US" sz="1500" dirty="0"/>
+            <a:endParaRPr lang="en-US" sz="1900" dirty="0"/>
           </a:p>
         </p:txBody>
       </p:sp>
@@ -24831,7 +24820,7 @@
         </p:nvSpPr>
         <p:spPr>
           <a:xfrm>
-            <a:off x="7589520" y="4618863"/>
+            <a:off x="7589520" y="4717288"/>
             <a:ext cx="329184" cy="329184"/>
           </a:xfrm>
           <a:prstGeom prst="ellipse">
@@ -24856,7 +24845,7 @@
         </p:nvSpPr>
         <p:spPr>
           <a:xfrm>
-            <a:off x="7589520" y="4618863"/>
+            <a:off x="7589520" y="4717288"/>
             <a:ext cx="329184" cy="329184"/>
           </a:xfrm>
           <a:prstGeom prst="rect">
@@ -24873,14 +24862,14 @@
               <a:buNone/>
             </a:pPr>
             <a:r>
-              <a:rPr lang="en-US" sz="1300" b="1" dirty="0">
+              <a:rPr lang="en-US" sz="1750" b="1" dirty="0">
                 <a:solidFill>
                   <a:schemeClr val="bg1"/>
                 </a:solidFill>
               </a:rPr>
               <a:t>5</a:t>
             </a:r>
-            <a:endParaRPr lang="en-US" sz="1300" dirty="0"/>
+            <a:endParaRPr lang="en-US" sz="1750" dirty="0"/>
           </a:p>
         </p:txBody>
       </p:sp>
@@ -24892,8 +24881,8 @@
         </p:nvSpPr>
         <p:spPr>
           <a:xfrm>
-            <a:off x="8065008" y="4591431"/>
-            <a:ext cx="3685032" cy="624078"/>
+            <a:off x="8065008" y="4689856"/>
+            <a:ext cx="3685032" cy="712978"/>
           </a:xfrm>
           <a:prstGeom prst="rect">
             <a:avLst/>
@@ -24909,14 +24898,14 @@
               <a:buNone/>
             </a:pPr>
             <a:r>
-              <a:rPr lang="en-US" sz="1500" dirty="0">
+              <a:rPr lang="en-US" sz="1900" dirty="0">
                 <a:solidFill>
                   <a:schemeClr val="tx1"/>
                 </a:solidFill>
               </a:rPr>
-              <a:t>อ่านนโยบาย PDPA ได้ที่ลิงก์ใต้ปุ่ม (หมายเลข 2)</a:t>
-            </a:r>
-            <a:endParaRPr lang="en-US" sz="1500" dirty="0"/>
+              <a:t>อ่านนโยบาย PDPA ที่ลิงก์ใต้ปุ่ม (หมายเลข 2)</a:t>
+            </a:r>
+            <a:endParaRPr lang="en-US" sz="1900" dirty="0"/>
           </a:p>
         </p:txBody>
       </p:sp>
@@ -24972,7 +24961,7 @@
               <a:buNone/>
             </a:pPr>
             <a:r>
-              <a:rPr lang="en-US" sz="1400" dirty="0">
+              <a:rPr lang="en-US" sz="1900" dirty="0">
                 <a:solidFill>
                   <a:schemeClr val="tx1"/>
                 </a:solidFill>
@@ -24983,14 +24972,14 @@
               <a:buNone/>
             </a:pPr>
             <a:r>
-              <a:rPr lang="en-US" sz="1400" dirty="0">
+              <a:rPr lang="en-US" sz="1900" dirty="0">
                 <a:solidFill>
                   <a:schemeClr val="tx1"/>
                 </a:solidFill>
               </a:rPr>
-              <a:t>ออกจากระบบอัตโนมัติเมื่อไม่ใช้งาน 60 นาที</a:t>
-            </a:r>
-            <a:endParaRPr lang="en-US" sz="1400" dirty="0"/>
+              <a:t>ไม่ใช้งาน 60 นาที ระบบออกให้เอง</a:t>
+            </a:r>
+            <a:endParaRPr lang="en-US" sz="1900" dirty="0"/>
           </a:p>
         </p:txBody>
       </p:sp>
@@ -25022,7 +25011,7 @@
           <a:bodyPr/>
           <a:lstStyle>
             <a:lvl1pPr>
-              <a:defRPr sz="1000">
+              <a:defRPr sz="1350">
                 <a:solidFill>
                   <a:schemeClr val="accent5"/>
                 </a:solidFill>
@@ -25091,14 +25080,14 @@
               <a:buNone/>
             </a:pPr>
             <a:r>
-              <a:rPr lang="en-US" sz="3000" b="1" dirty="0">
+              <a:rPr lang="en-US" sz="4050" b="1" dirty="0">
                 <a:solidFill>
                   <a:schemeClr val="tx2"/>
                 </a:solidFill>
               </a:rPr>
               <a:t>หน้าแรก: ทุกอย่างที่ใช้บ่อยอยู่ตรงนี้</a:t>
             </a:r>
-            <a:endParaRPr lang="en-US" sz="3000" dirty="0"/>
+            <a:endParaRPr lang="en-US" sz="4050" dirty="0"/>
           </a:p>
         </p:txBody>
       </p:sp>
@@ -25208,14 +25197,14 @@
               <a:buNone/>
             </a:pPr>
             <a:r>
-              <a:rPr lang="en-US" sz="1300" b="1" dirty="0">
+              <a:rPr lang="en-US" sz="1750" b="1" dirty="0">
                 <a:solidFill>
                   <a:schemeClr val="bg1"/>
                 </a:solidFill>
               </a:rPr>
               <a:t>1</a:t>
             </a:r>
-            <a:endParaRPr lang="en-US" sz="1300" dirty="0"/>
+            <a:endParaRPr lang="en-US" sz="1750" dirty="0"/>
           </a:p>
         </p:txBody>
       </p:sp>
@@ -25228,7 +25217,7 @@
         <p:spPr>
           <a:xfrm>
             <a:off x="8842248" y="1371600"/>
-            <a:ext cx="2907792" cy="589788"/>
+            <a:ext cx="2907792" cy="712978"/>
           </a:xfrm>
           <a:prstGeom prst="rect">
             <a:avLst/>
@@ -25244,7 +25233,7 @@
               <a:buNone/>
             </a:pPr>
             <a:r>
-              <a:rPr lang="en-US" sz="1400" b="1" dirty="0">
+              <a:rPr lang="en-US" sz="1900" b="1" dirty="0">
                 <a:solidFill>
                   <a:schemeClr val="tx2"/>
                 </a:solidFill>
@@ -25255,14 +25244,14 @@
               <a:buNone/>
             </a:pPr>
             <a:r>
-              <a:rPr lang="en-US" sz="1400" dirty="0">
+              <a:rPr lang="en-US" sz="1900" dirty="0">
                 <a:solidFill>
                   <a:schemeClr val="tx1"/>
                 </a:solidFill>
               </a:rPr>
               <a:t> · ตัวเลขแดง = งานที่รอคุณ</a:t>
             </a:r>
-            <a:endParaRPr lang="en-US" sz="1400" dirty="0"/>
+            <a:endParaRPr lang="en-US" sz="1900" dirty="0"/>
           </a:p>
         </p:txBody>
       </p:sp>
@@ -25274,7 +25263,7 @@
         </p:nvSpPr>
         <p:spPr>
           <a:xfrm>
-            <a:off x="8366760" y="2116836"/>
+            <a:off x="8366760" y="2240026"/>
             <a:ext cx="329184" cy="329184"/>
           </a:xfrm>
           <a:prstGeom prst="ellipse">
@@ -25299,7 +25288,7 @@
         </p:nvSpPr>
         <p:spPr>
           <a:xfrm>
-            <a:off x="8366760" y="2116836"/>
+            <a:off x="8366760" y="2240026"/>
             <a:ext cx="329184" cy="329184"/>
           </a:xfrm>
           <a:prstGeom prst="rect">
@@ -25316,14 +25305,14 @@
               <a:buNone/>
             </a:pPr>
             <a:r>
-              <a:rPr lang="en-US" sz="1300" b="1" dirty="0">
+              <a:rPr lang="en-US" sz="1750" b="1" dirty="0">
                 <a:solidFill>
                   <a:schemeClr val="bg1"/>
                 </a:solidFill>
               </a:rPr>
               <a:t>2</a:t>
             </a:r>
-            <a:endParaRPr lang="en-US" sz="1300" dirty="0"/>
+            <a:endParaRPr lang="en-US" sz="1750" dirty="0"/>
           </a:p>
         </p:txBody>
       </p:sp>
@@ -25335,8 +25324,8 @@
         </p:nvSpPr>
         <p:spPr>
           <a:xfrm>
-            <a:off x="8842248" y="2089404"/>
-            <a:ext cx="2907792" cy="589788"/>
+            <a:off x="8842248" y="2212594"/>
+            <a:ext cx="2907792" cy="712978"/>
           </a:xfrm>
           <a:prstGeom prst="rect">
             <a:avLst/>
@@ -25352,7 +25341,7 @@
               <a:buNone/>
             </a:pPr>
             <a:r>
-              <a:rPr lang="en-US" sz="1400" b="1" dirty="0">
+              <a:rPr lang="en-US" sz="1900" b="1" dirty="0">
                 <a:solidFill>
                   <a:schemeClr val="tx2"/>
                 </a:solidFill>
@@ -25363,14 +25352,14 @@
               <a:buNone/>
             </a:pPr>
             <a:r>
-              <a:rPr lang="en-US" sz="1400" dirty="0">
+              <a:rPr lang="en-US" sz="1900" dirty="0">
                 <a:solidFill>
                   <a:schemeClr val="tx1"/>
                 </a:solidFill>
               </a:rPr>
               <a:t> · ทั้งหมด / กำลังทำ / ล่าช้า</a:t>
             </a:r>
-            <a:endParaRPr lang="en-US" sz="1400" dirty="0"/>
+            <a:endParaRPr lang="en-US" sz="1900" dirty="0"/>
           </a:p>
         </p:txBody>
       </p:sp>
@@ -25382,7 +25371,7 @@
         </p:nvSpPr>
         <p:spPr>
           <a:xfrm>
-            <a:off x="8366760" y="2834640"/>
+            <a:off x="8366760" y="3081020"/>
             <a:ext cx="329184" cy="329184"/>
           </a:xfrm>
           <a:prstGeom prst="ellipse">
@@ -25407,7 +25396,7 @@
         </p:nvSpPr>
         <p:spPr>
           <a:xfrm>
-            <a:off x="8366760" y="2834640"/>
+            <a:off x="8366760" y="3081020"/>
             <a:ext cx="329184" cy="329184"/>
           </a:xfrm>
           <a:prstGeom prst="rect">
@@ -25424,14 +25413,14 @@
               <a:buNone/>
             </a:pPr>
             <a:r>
-              <a:rPr lang="en-US" sz="1300" b="1" dirty="0">
+              <a:rPr lang="en-US" sz="1750" b="1" dirty="0">
                 <a:solidFill>
                   <a:schemeClr val="bg1"/>
                 </a:solidFill>
               </a:rPr>
               <a:t>3</a:t>
             </a:r>
-            <a:endParaRPr lang="en-US" sz="1300" dirty="0"/>
+            <a:endParaRPr lang="en-US" sz="1750" dirty="0"/>
           </a:p>
         </p:txBody>
       </p:sp>
@@ -25443,8 +25432,8 @@
         </p:nvSpPr>
         <p:spPr>
           <a:xfrm>
-            <a:off x="8842248" y="2807208"/>
-            <a:ext cx="2907792" cy="589788"/>
+            <a:off x="8842248" y="3053588"/>
+            <a:ext cx="2907792" cy="712978"/>
           </a:xfrm>
           <a:prstGeom prst="rect">
             <a:avLst/>
@@ -25460,7 +25449,7 @@
               <a:buNone/>
             </a:pPr>
             <a:r>
-              <a:rPr lang="en-US" sz="1400" b="1" dirty="0">
+              <a:rPr lang="en-US" sz="1900" b="1" dirty="0">
                 <a:solidFill>
                   <a:schemeClr val="tx2"/>
                 </a:solidFill>
@@ -25471,14 +25460,14 @@
               <a:buNone/>
             </a:pPr>
             <a:r>
-              <a:rPr lang="en-US" sz="1400" dirty="0">
+              <a:rPr lang="en-US" sz="1900" dirty="0">
                 <a:solidFill>
                   <a:schemeClr val="tx1"/>
                 </a:solidFill>
               </a:rPr>
               <a:t> · กดแล้วกรอกได้เลย</a:t>
             </a:r>
-            <a:endParaRPr lang="en-US" sz="1400" dirty="0"/>
+            <a:endParaRPr lang="en-US" sz="1900" dirty="0"/>
           </a:p>
         </p:txBody>
       </p:sp>
@@ -25490,7 +25479,7 @@
         </p:nvSpPr>
         <p:spPr>
           <a:xfrm>
-            <a:off x="8366760" y="3552444"/>
+            <a:off x="8366760" y="3922014"/>
             <a:ext cx="329184" cy="329184"/>
           </a:xfrm>
           <a:prstGeom prst="ellipse">
@@ -25515,7 +25504,7 @@
         </p:nvSpPr>
         <p:spPr>
           <a:xfrm>
-            <a:off x="8366760" y="3552444"/>
+            <a:off x="8366760" y="3922014"/>
             <a:ext cx="329184" cy="329184"/>
           </a:xfrm>
           <a:prstGeom prst="rect">
@@ -25532,14 +25521,14 @@
               <a:buNone/>
             </a:pPr>
             <a:r>
-              <a:rPr lang="en-US" sz="1300" b="1" dirty="0">
+              <a:rPr lang="en-US" sz="1750" b="1" dirty="0">
                 <a:solidFill>
                   <a:schemeClr val="bg1"/>
                 </a:solidFill>
               </a:rPr>
               <a:t>4</a:t>
             </a:r>
-            <a:endParaRPr lang="en-US" sz="1300" dirty="0"/>
+            <a:endParaRPr lang="en-US" sz="1750" dirty="0"/>
           </a:p>
         </p:txBody>
       </p:sp>
@@ -25551,8 +25540,8 @@
         </p:nvSpPr>
         <p:spPr>
           <a:xfrm>
-            <a:off x="8842248" y="3525012"/>
-            <a:ext cx="2907792" cy="384048"/>
+            <a:off x="8842248" y="3894582"/>
+            <a:ext cx="2907792" cy="712978"/>
           </a:xfrm>
           <a:prstGeom prst="rect">
             <a:avLst/>
@@ -25568,7 +25557,7 @@
               <a:buNone/>
             </a:pPr>
             <a:r>
-              <a:rPr lang="en-US" sz="1400" b="1" dirty="0">
+              <a:rPr lang="en-US" sz="1900" b="1" dirty="0">
                 <a:solidFill>
                   <a:schemeClr val="tx2"/>
                 </a:solidFill>
@@ -25579,14 +25568,14 @@
               <a:buNone/>
             </a:pPr>
             <a:r>
-              <a:rPr lang="en-US" sz="1400" dirty="0">
+              <a:rPr lang="en-US" sz="1900" dirty="0">
                 <a:solidFill>
                   <a:schemeClr val="tx1"/>
                 </a:solidFill>
               </a:rPr>
               <a:t> · กดอ่านพร้อมรูปแนบ</a:t>
             </a:r>
-            <a:endParaRPr lang="en-US" sz="1400" dirty="0"/>
+            <a:endParaRPr lang="en-US" sz="1900" dirty="0"/>
           </a:p>
         </p:txBody>
       </p:sp>
@@ -25598,7 +25587,7 @@
         </p:nvSpPr>
         <p:spPr>
           <a:xfrm>
-            <a:off x="8366760" y="4064508"/>
+            <a:off x="8366760" y="4763008"/>
             <a:ext cx="329184" cy="329184"/>
           </a:xfrm>
           <a:prstGeom prst="ellipse">
@@ -25623,7 +25612,7 @@
         </p:nvSpPr>
         <p:spPr>
           <a:xfrm>
-            <a:off x="8366760" y="4064508"/>
+            <a:off x="8366760" y="4763008"/>
             <a:ext cx="329184" cy="329184"/>
           </a:xfrm>
           <a:prstGeom prst="rect">
@@ -25640,14 +25629,14 @@
               <a:buNone/>
             </a:pPr>
             <a:r>
-              <a:rPr lang="en-US" sz="1300" b="1" dirty="0">
+              <a:rPr lang="en-US" sz="1750" b="1" dirty="0">
                 <a:solidFill>
                   <a:schemeClr val="bg1"/>
                 </a:solidFill>
               </a:rPr>
               <a:t>5</a:t>
             </a:r>
-            <a:endParaRPr lang="en-US" sz="1300" dirty="0"/>
+            <a:endParaRPr lang="en-US" sz="1750" dirty="0"/>
           </a:p>
         </p:txBody>
       </p:sp>
@@ -25659,8 +25648,8 @@
         </p:nvSpPr>
         <p:spPr>
           <a:xfrm>
-            <a:off x="8842248" y="4037076"/>
-            <a:ext cx="2907792" cy="589788"/>
+            <a:off x="8842248" y="4735576"/>
+            <a:ext cx="2907792" cy="712978"/>
           </a:xfrm>
           <a:prstGeom prst="rect">
             <a:avLst/>
@@ -25676,7 +25665,7 @@
               <a:buNone/>
             </a:pPr>
             <a:r>
-              <a:rPr lang="en-US" sz="1400" b="1" dirty="0">
+              <a:rPr lang="en-US" sz="1900" b="1" dirty="0">
                 <a:solidFill>
                   <a:schemeClr val="tx2"/>
                 </a:solidFill>
@@ -25687,14 +25676,14 @@
               <a:buNone/>
             </a:pPr>
             <a:r>
-              <a:rPr lang="en-US" sz="1400" dirty="0">
+              <a:rPr lang="en-US" sz="1900" dirty="0">
                 <a:solidFill>
                   <a:schemeClr val="tx1"/>
                 </a:solidFill>
               </a:rPr>
               <a:t> · รวมคู่มือฉบับเต็ม</a:t>
             </a:r>
-            <a:endParaRPr lang="en-US" sz="1400" dirty="0"/>
+            <a:endParaRPr lang="en-US" sz="1900" dirty="0"/>
           </a:p>
         </p:txBody>
       </p:sp>
@@ -25750,7 +25739,7 @@
               <a:buNone/>
             </a:pPr>
             <a:r>
-              <a:rPr lang="en-US" sz="1400" dirty="0">
+              <a:rPr lang="en-US" sz="1900" dirty="0">
                 <a:solidFill>
                   <a:schemeClr val="tx1"/>
                 </a:solidFill>
@@ -25761,7 +25750,7 @@
               <a:buNone/>
             </a:pPr>
             <a:r>
-              <a:rPr lang="en-US" sz="1400" dirty="0">
+              <a:rPr lang="en-US" sz="1900" dirty="0">
                 <a:solidFill>
                   <a:schemeClr val="tx1"/>
                 </a:solidFill>
@@ -25772,7 +25761,7 @@
               <a:buNone/>
             </a:pPr>
             <a:r>
-              <a:rPr lang="en-US" sz="1400" b="1" dirty="0">
+              <a:rPr lang="en-US" sz="1900" b="1" dirty="0">
                 <a:solidFill>
                   <a:schemeClr val="tx2"/>
                 </a:solidFill>
@@ -25783,14 +25772,14 @@
               <a:buNone/>
             </a:pPr>
             <a:r>
-              <a:rPr lang="en-US" sz="1400" dirty="0">
+              <a:rPr lang="en-US" sz="1900" dirty="0">
                 <a:solidFill>
                   <a:schemeClr val="tx1"/>
                 </a:solidFill>
               </a:rPr>
               <a:t> เพื่อปิด</a:t>
             </a:r>
-            <a:endParaRPr lang="en-US" sz="1400" dirty="0"/>
+            <a:endParaRPr lang="en-US" sz="1900" dirty="0"/>
           </a:p>
         </p:txBody>
       </p:sp>
@@ -25822,7 +25811,7 @@
           <a:bodyPr/>
           <a:lstStyle>
             <a:lvl1pPr>
-              <a:defRPr sz="1000">
+              <a:defRPr sz="1350">
                 <a:solidFill>
                   <a:schemeClr val="accent5"/>
                 </a:solidFill>
@@ -25914,14 +25903,14 @@
               <a:buNone/>
             </a:pPr>
             <a:r>
-              <a:rPr lang="en-US" sz="4000" b="1" dirty="0">
+              <a:rPr lang="en-US" sz="5400" b="1" dirty="0">
                 <a:solidFill>
                   <a:schemeClr val="bg1"/>
                 </a:solidFill>
               </a:rPr>
               <a:t>2</a:t>
             </a:r>
-            <a:endParaRPr lang="en-US" sz="4000" dirty="0"/>
+            <a:endParaRPr lang="en-US" sz="5400" dirty="0"/>
           </a:p>
         </p:txBody>
       </p:sp>
@@ -25952,14 +25941,14 @@
               <a:buNone/>
             </a:pPr>
             <a:r>
-              <a:rPr lang="en-US" sz="3800" b="1" dirty="0">
+              <a:rPr lang="en-US" sz="5150" b="1" dirty="0">
                 <a:solidFill>
                   <a:schemeClr val="bg1"/>
                 </a:solidFill>
               </a:rPr>
               <a:t>ยื่นคำขอและติดตามสถานะ</a:t>
             </a:r>
-            <a:endParaRPr lang="en-US" sz="3800" dirty="0"/>
+            <a:endParaRPr lang="en-US" sz="5150" dirty="0"/>
           </a:p>
         </p:txBody>
       </p:sp>
@@ -25990,14 +25979,14 @@
               <a:buNone/>
             </a:pPr>
             <a:r>
-              <a:rPr lang="en-US" sz="1800" dirty="0">
+              <a:rPr lang="en-US" sz="2450" dirty="0">
                 <a:solidFill>
                   <a:schemeClr val="bg1"/>
                 </a:solidFill>
               </a:rPr>
               <a:t>ตัวอย่างจริง: ขอเบิกเงินทดรองจ่าย 12,500 บาท</a:t>
             </a:r>
-            <a:endParaRPr lang="en-US" sz="1800" dirty="0"/>
+            <a:endParaRPr lang="en-US" sz="2450" dirty="0"/>
           </a:p>
         </p:txBody>
       </p:sp>
@@ -26053,14 +26042,14 @@
               <a:buNone/>
             </a:pPr>
             <a:r>
-              <a:rPr lang="en-US" sz="3000" b="1" dirty="0">
+              <a:rPr lang="en-US" sz="4050" b="1" dirty="0">
                 <a:solidFill>
                   <a:schemeClr val="tx2"/>
                 </a:solidFill>
               </a:rPr>
               <a:t>คำขอหนึ่งใบเดินทางอย่างไร</a:t>
             </a:r>
-            <a:endParaRPr lang="en-US" sz="3000" dirty="0"/>
+            <a:endParaRPr lang="en-US" sz="4050" dirty="0"/>
           </a:p>
         </p:txBody>
       </p:sp>
@@ -26116,28 +26105,28 @@
               <a:buNone/>
             </a:pPr>
             <a:r>
-              <a:rPr lang="en-US" sz="1900" b="1" dirty="0">
+              <a:rPr lang="en-US" sz="2550" b="1" dirty="0">
                 <a:solidFill>
                   <a:schemeClr val="bg1"/>
                 </a:solidFill>
               </a:rPr>
               <a:t>ยื่นคำขอ</a:t>
             </a:r>
-            <a:endParaRPr lang="en-US" sz="1900" dirty="0"/>
+            <a:endParaRPr lang="en-US" sz="2550" dirty="0"/>
           </a:p>
           <a:p>
             <a:pPr algn="ctr" indent="0" marL="0">
               <a:buNone/>
             </a:pPr>
             <a:r>
-              <a:rPr lang="en-US" sz="1400" dirty="0">
+              <a:rPr lang="en-US" sz="1900" dirty="0">
                 <a:solidFill>
                   <a:schemeClr val="bg1"/>
                 </a:solidFill>
               </a:rPr>
               <a:t>ชัยวัฒน์</a:t>
             </a:r>
-            <a:endParaRPr lang="en-US" sz="1900" dirty="0"/>
+            <a:endParaRPr lang="en-US" sz="2550" dirty="0"/>
           </a:p>
         </p:txBody>
       </p:sp>
@@ -26166,14 +26155,14 @@
               <a:buNone/>
             </a:pPr>
             <a:r>
-              <a:rPr lang="en-US" sz="2200" dirty="0">
+              <a:rPr lang="en-US" sz="2950" dirty="0">
                 <a:solidFill>
                   <a:schemeClr val="accent5"/>
                 </a:solidFill>
               </a:rPr>
               <a:t>➜</a:t>
             </a:r>
-            <a:endParaRPr lang="en-US" sz="2200" dirty="0"/>
+            <a:endParaRPr lang="en-US" sz="2950" dirty="0"/>
           </a:p>
         </p:txBody>
       </p:sp>
@@ -26229,28 +26218,28 @@
               <a:buNone/>
             </a:pPr>
             <a:r>
-              <a:rPr lang="en-US" sz="1900" b="1" dirty="0">
+              <a:rPr lang="en-US" sz="2550" b="1" dirty="0">
                 <a:solidFill>
                   <a:schemeClr val="bg1"/>
                 </a:solidFill>
               </a:rPr>
               <a:t>ลำดับ 1</a:t>
             </a:r>
-            <a:endParaRPr lang="en-US" sz="1900" dirty="0"/>
+            <a:endParaRPr lang="en-US" sz="2550" dirty="0"/>
           </a:p>
           <a:p>
             <a:pPr algn="ctr" indent="0" marL="0">
               <a:buNone/>
             </a:pPr>
             <a:r>
-              <a:rPr lang="en-US" sz="1400" dirty="0">
+              <a:rPr lang="en-US" sz="1900" dirty="0">
                 <a:solidFill>
                   <a:schemeClr val="bg1"/>
                 </a:solidFill>
               </a:rPr>
               <a:t>ผู้บังคับบัญชา</a:t>
             </a:r>
-            <a:endParaRPr lang="en-US" sz="1900" dirty="0"/>
+            <a:endParaRPr lang="en-US" sz="2550" dirty="0"/>
           </a:p>
         </p:txBody>
       </p:sp>
@@ -26279,14 +26268,14 @@
               <a:buNone/>
             </a:pPr>
             <a:r>
-              <a:rPr lang="en-US" sz="2200" dirty="0">
+              <a:rPr lang="en-US" sz="2950" dirty="0">
                 <a:solidFill>
                   <a:schemeClr val="accent5"/>
                 </a:solidFill>
               </a:rPr>
               <a:t>➜</a:t>
             </a:r>
-            <a:endParaRPr lang="en-US" sz="2200" dirty="0"/>
+            <a:endParaRPr lang="en-US" sz="2950" dirty="0"/>
           </a:p>
         </p:txBody>
       </p:sp>
@@ -26342,28 +26331,28 @@
               <a:buNone/>
             </a:pPr>
             <a:r>
-              <a:rPr lang="en-US" sz="1900" b="1" dirty="0">
+              <a:rPr lang="en-US" sz="2550" b="1" dirty="0">
                 <a:solidFill>
                   <a:schemeClr val="bg1"/>
                 </a:solidFill>
               </a:rPr>
               <a:t>ลำดับ 2</a:t>
             </a:r>
-            <a:endParaRPr lang="en-US" sz="1900" dirty="0"/>
+            <a:endParaRPr lang="en-US" sz="2550" dirty="0"/>
           </a:p>
           <a:p>
             <a:pPr algn="ctr" indent="0" marL="0">
               <a:buNone/>
             </a:pPr>
             <a:r>
-              <a:rPr lang="en-US" sz="1400" dirty="0">
+              <a:rPr lang="en-US" sz="1900" dirty="0">
                 <a:solidFill>
                   <a:schemeClr val="bg1"/>
                 </a:solidFill>
               </a:rPr>
               <a:t>ผู้บริหาร</a:t>
             </a:r>
-            <a:endParaRPr lang="en-US" sz="1900" dirty="0"/>
+            <a:endParaRPr lang="en-US" sz="2550" dirty="0"/>
           </a:p>
         </p:txBody>
       </p:sp>
@@ -26392,14 +26381,14 @@
               <a:buNone/>
             </a:pPr>
             <a:r>
-              <a:rPr lang="en-US" sz="2200" dirty="0">
+              <a:rPr lang="en-US" sz="2950" dirty="0">
                 <a:solidFill>
                   <a:schemeClr val="accent5"/>
                 </a:solidFill>
               </a:rPr>
               <a:t>➜</a:t>
             </a:r>
-            <a:endParaRPr lang="en-US" sz="2200" dirty="0"/>
+            <a:endParaRPr lang="en-US" sz="2950" dirty="0"/>
           </a:p>
         </p:txBody>
       </p:sp>
@@ -26455,28 +26444,28 @@
               <a:buNone/>
             </a:pPr>
             <a:r>
-              <a:rPr lang="en-US" sz="1900" b="1" dirty="0">
+              <a:rPr lang="en-US" sz="2550" b="1" dirty="0">
                 <a:solidFill>
                   <a:schemeClr val="bg1"/>
                 </a:solidFill>
               </a:rPr>
               <a:t>ลำดับ 3</a:t>
             </a:r>
-            <a:endParaRPr lang="en-US" sz="1900" dirty="0"/>
+            <a:endParaRPr lang="en-US" sz="2550" dirty="0"/>
           </a:p>
           <a:p>
             <a:pPr algn="ctr" indent="0" marL="0">
               <a:buNone/>
             </a:pPr>
             <a:r>
-              <a:rPr lang="en-US" sz="1400" dirty="0">
+              <a:rPr lang="en-US" sz="1900" dirty="0">
                 <a:solidFill>
                   <a:schemeClr val="bg1"/>
                 </a:solidFill>
               </a:rPr>
               <a:t>การเงินแนบสลิป</a:t>
             </a:r>
-            <a:endParaRPr lang="en-US" sz="1900" dirty="0"/>
+            <a:endParaRPr lang="en-US" sz="2550" dirty="0"/>
           </a:p>
         </p:txBody>
       </p:sp>
@@ -26505,14 +26494,14 @@
               <a:buNone/>
             </a:pPr>
             <a:r>
-              <a:rPr lang="en-US" sz="2200" dirty="0">
+              <a:rPr lang="en-US" sz="2950" dirty="0">
                 <a:solidFill>
                   <a:schemeClr val="accent5"/>
                 </a:solidFill>
               </a:rPr>
               <a:t>➜</a:t>
             </a:r>
-            <a:endParaRPr lang="en-US" sz="2200" dirty="0"/>
+            <a:endParaRPr lang="en-US" sz="2950" dirty="0"/>
           </a:p>
         </p:txBody>
       </p:sp>
@@ -26568,28 +26557,28 @@
               <a:buNone/>
             </a:pPr>
             <a:r>
-              <a:rPr lang="en-US" sz="1900" b="1" dirty="0">
+              <a:rPr lang="en-US" sz="2550" b="1" dirty="0">
                 <a:solidFill>
                   <a:schemeClr val="bg1"/>
                 </a:solidFill>
               </a:rPr>
               <a:t>เสร็จสิ้น</a:t>
             </a:r>
-            <a:endParaRPr lang="en-US" sz="1900" dirty="0"/>
+            <a:endParaRPr lang="en-US" sz="2550" dirty="0"/>
           </a:p>
           <a:p>
             <a:pPr algn="ctr" indent="0" marL="0">
               <a:buNone/>
             </a:pPr>
             <a:r>
-              <a:rPr lang="en-US" sz="1400" dirty="0">
+              <a:rPr lang="en-US" sz="1900" dirty="0">
                 <a:solidFill>
                   <a:schemeClr val="bg1"/>
                 </a:solidFill>
               </a:rPr>
               <a:t>แจ้ง Teams + สลิป</a:t>
             </a:r>
-            <a:endParaRPr lang="en-US" sz="1900" dirty="0"/>
+            <a:endParaRPr lang="en-US" sz="2550" dirty="0"/>
           </a:p>
         </p:txBody>
       </p:sp>
@@ -26645,14 +26634,14 @@
               <a:buNone/>
             </a:pPr>
             <a:r>
-              <a:rPr lang="en-US" sz="2800" dirty="0">
+              <a:rPr lang="en-US" sz="3800" dirty="0">
                 <a:solidFill>
                   <a:srgbClr val="000000"/>
                 </a:solidFill>
               </a:rPr>
               <a:t>🤖</a:t>
             </a:r>
-            <a:endParaRPr lang="en-US" sz="2800" dirty="0"/>
+            <a:endParaRPr lang="en-US" sz="3800" dirty="0"/>
           </a:p>
         </p:txBody>
       </p:sp>
@@ -26681,14 +26670,14 @@
               <a:buNone/>
             </a:pPr>
             <a:r>
-              <a:rPr lang="en-US" sz="1700" b="1" dirty="0">
+              <a:rPr lang="en-US" sz="2300" b="1" dirty="0">
                 <a:solidFill>
                   <a:schemeClr val="tx2"/>
                 </a:solidFill>
               </a:rPr>
               <a:t>ระบบหาผู้อนุมัติให้เอง</a:t>
             </a:r>
-            <a:endParaRPr lang="en-US" sz="1700" dirty="0"/>
+            <a:endParaRPr lang="en-US" sz="2300" dirty="0"/>
           </a:p>
         </p:txBody>
       </p:sp>
@@ -26717,14 +26706,14 @@
               <a:buNone/>
             </a:pPr>
             <a:r>
-              <a:rPr lang="en-US" sz="1400" dirty="0">
+              <a:rPr lang="en-US" sz="1900" dirty="0">
                 <a:solidFill>
                   <a:schemeClr val="tx1"/>
                 </a:solidFill>
               </a:rPr>
               <a:t>จากหัวหน้าในทะเบียนบุคลากร และเส้นทางอนุมัติของแต่ละฟอร์ม</a:t>
             </a:r>
-            <a:endParaRPr lang="en-US" sz="1400" dirty="0"/>
+            <a:endParaRPr lang="en-US" sz="1900" dirty="0"/>
           </a:p>
         </p:txBody>
       </p:sp>
@@ -26780,14 +26769,14 @@
               <a:buNone/>
             </a:pPr>
             <a:r>
-              <a:rPr lang="en-US" sz="2800" dirty="0">
+              <a:rPr lang="en-US" sz="3800" dirty="0">
                 <a:solidFill>
                   <a:srgbClr val="000000"/>
                 </a:solidFill>
               </a:rPr>
               <a:t>🔔</a:t>
             </a:r>
-            <a:endParaRPr lang="en-US" sz="2800" dirty="0"/>
+            <a:endParaRPr lang="en-US" sz="3800" dirty="0"/>
           </a:p>
         </p:txBody>
       </p:sp>
@@ -26816,14 +26805,14 @@
               <a:buNone/>
             </a:pPr>
             <a:r>
-              <a:rPr lang="en-US" sz="1700" b="1" dirty="0">
+              <a:rPr lang="en-US" sz="2300" b="1" dirty="0">
                 <a:solidFill>
                   <a:schemeClr val="tx2"/>
                 </a:solidFill>
               </a:rPr>
               <a:t>แจ้งเตือนทาง Teams</a:t>
             </a:r>
-            <a:endParaRPr lang="en-US" sz="1700" dirty="0"/>
+            <a:endParaRPr lang="en-US" sz="2300" dirty="0"/>
           </a:p>
         </p:txBody>
       </p:sp>
@@ -26852,14 +26841,14 @@
               <a:buNone/>
             </a:pPr>
             <a:r>
-              <a:rPr lang="en-US" sz="1400" dirty="0">
+              <a:rPr lang="en-US" sz="1900" dirty="0">
                 <a:solidFill>
                   <a:schemeClr val="tx1"/>
                 </a:solidFill>
               </a:rPr>
               <a:t>ผู้อนุมัติได้การ์ดใน Teams → Approvals ทุกครั้งที่ถึงคิว</a:t>
             </a:r>
-            <a:endParaRPr lang="en-US" sz="1400" dirty="0"/>
+            <a:endParaRPr lang="en-US" sz="1900" dirty="0"/>
           </a:p>
         </p:txBody>
       </p:sp>
@@ -26915,14 +26904,14 @@
               <a:buNone/>
             </a:pPr>
             <a:r>
-              <a:rPr lang="en-US" sz="2800" dirty="0">
+              <a:rPr lang="en-US" sz="3800" dirty="0">
                 <a:solidFill>
                   <a:srgbClr val="000000"/>
                 </a:solidFill>
               </a:rPr>
               <a:t>↩️</a:t>
             </a:r>
-            <a:endParaRPr lang="en-US" sz="2800" dirty="0"/>
+            <a:endParaRPr lang="en-US" sz="3800" dirty="0"/>
           </a:p>
         </p:txBody>
       </p:sp>
@@ -26951,14 +26940,14 @@
               <a:buNone/>
             </a:pPr>
             <a:r>
-              <a:rPr lang="en-US" sz="1700" b="1" dirty="0">
+              <a:rPr lang="en-US" sz="2300" b="1" dirty="0">
                 <a:solidFill>
                   <a:schemeClr val="tx2"/>
                 </a:solidFill>
               </a:rPr>
               <a:t>ส่งกลับได้ทุกลำดับ</a:t>
             </a:r>
-            <a:endParaRPr lang="en-US" sz="1700" dirty="0"/>
+            <a:endParaRPr lang="en-US" sz="2300" dirty="0"/>
           </a:p>
         </p:txBody>
       </p:sp>
@@ -26987,14 +26976,14 @@
               <a:buNone/>
             </a:pPr>
             <a:r>
-              <a:rPr lang="en-US" sz="1400" dirty="0">
+              <a:rPr lang="en-US" sz="1900" dirty="0">
                 <a:solidFill>
                   <a:schemeClr val="tx1"/>
                 </a:solidFill>
               </a:rPr>
               <a:t>ผู้ยื่นแก้แล้วยื่นใหม่ เริ่มอนุมัติจากลำดับแรก เลขที่เดิม</a:t>
             </a:r>
-            <a:endParaRPr lang="en-US" sz="1400" dirty="0"/>
+            <a:endParaRPr lang="en-US" sz="1900" dirty="0"/>
           </a:p>
         </p:txBody>
       </p:sp>
@@ -27026,7 +27015,7 @@
           <a:bodyPr/>
           <a:lstStyle>
             <a:lvl1pPr>
-              <a:defRPr sz="1000">
+              <a:defRPr sz="1350">
                 <a:solidFill>
                   <a:schemeClr val="accent5"/>
                 </a:solidFill>
@@ -27094,7 +27083,7 @@
     </a:clrScheme>
     <a:fontScheme name="Prime Power Intranet">
       <a:majorFont>
-        <a:latin typeface="Tahoma"/>
+        <a:latin typeface="TH SarabunPSK"/>
         <a:ea typeface=""/>
         <a:cs typeface=""/>
         <a:font script="Jpan" typeface="游ゴシック Light"/>
@@ -27146,7 +27135,7 @@
         <a:font script="Tfng" typeface="Ebrima"/>
       </a:majorFont>
       <a:minorFont>
-        <a:latin typeface="Tahoma"/>
+        <a:latin typeface="TH SarabunPSK"/>
         <a:ea typeface=""/>
         <a:cs typeface=""/>
         <a:font script="Jpan" typeface="游ゴシック"/>
